--- a/Proyecto_Personal_OSRM_v2.pptx
+++ b/Proyecto_Personal_OSRM_v2.pptx
@@ -3051,7 +3051,7 @@
                 <a:ea typeface="Courier New" pitchFamily="34" charset="-122"/>
                 <a:cs typeface="Courier New" pitchFamily="34" charset="-120"/>
               </a:rPr>
-              <a:t>BLOQUE 2 · ÁREAS</a:t>
+              <a:t>PALANCA 2 · ÁREAS</a:t>
             </a:r>
             <a:endParaRPr lang="en-US" sz="1800" dirty="0"/>
           </a:p>
@@ -5624,7 +5624,7 @@
                 <a:ea typeface="Courier New" pitchFamily="34" charset="-122"/>
                 <a:cs typeface="Courier New" pitchFamily="34" charset="-120"/>
               </a:rPr>
-              <a:t>BLOQUE 2 · LA HERRAMIENTA</a:t>
+              <a:t>PALANCA 2 · LA HERRAMIENTA</a:t>
             </a:r>
             <a:endParaRPr lang="en-US" sz="1800" dirty="0"/>
           </a:p>
@@ -15131,7 +15131,7 @@
                 <a:ea typeface="Arial" pitchFamily="34" charset="-122"/>
                 <a:cs typeface="Arial" pitchFamily="34" charset="-120"/>
               </a:rPr>
-              <a:t>tablas · coordenadas de entrega · demanda</a:t>
+              <a:t>tablas · coordenadas · demanda</a:t>
             </a:r>
             <a:endParaRPr lang="en-US" sz="1500" dirty="0"/>
           </a:p>
@@ -15441,14 +15441,44 @@
       </p:sp>
       <p:sp>
         <p:nvSpPr>
-          <p:cNvPr id="19" name="Text 19"/>
-          <p:cNvSpPr/>
-          <p:nvPr/>
-        </p:nvSpPr>
-        <p:spPr>
-          <a:xfrm>
-            <a:off x="7165594" y="5500000"/>
-            <a:ext cx="4441444" cy="352425"/>
+          <p:cNvPr id="19" name="Shape 19"/>
+          <p:cNvSpPr/>
+          <p:nvPr/>
+        </p:nvSpPr>
+        <p:spPr>
+          <a:xfrm>
+            <a:off x="7165594" y="5100000"/>
+            <a:ext cx="4441444" cy="880000"/>
+          </a:xfrm>
+          <a:prstGeom prst="roundRect">
+            <a:avLst>
+              <a:gd name="adj" fmla="val 8000"/>
+            </a:avLst>
+          </a:prstGeom>
+          <a:solidFill>
+            <a:srgbClr val="2D7A55"/>
+          </a:solidFill>
+          <a:ln/>
+          <a:effectLst/>
+        </p:spPr>
+        <p:txBody>
+          <a:bodyPr/>
+          <a:lstStyle/>
+          <a:p>
+            <a:endParaRPr lang="es-ES"/>
+          </a:p>
+        </p:txBody>
+      </p:sp>
+      <p:sp>
+        <p:nvSpPr>
+          <p:cNvPr id="20" name="Text 20"/>
+          <p:cNvSpPr/>
+          <p:nvPr/>
+        </p:nvSpPr>
+        <p:spPr>
+          <a:xfrm>
+            <a:off x="7401744" y="5210000"/>
+            <a:ext cx="3971444" cy="380000"/>
           </a:xfrm>
           <a:prstGeom prst="rect">
             <a:avLst/>
@@ -15466,7 +15496,7 @@
               <a:buNone/>
             </a:pPr>
             <a:r>
-              <a:rPr lang="en-US" sz="2250" b="1" kern="0" dirty="0">
+              <a:rPr lang="en-US" sz="1950" b="1" kern="0" dirty="0">
                 <a:solidFill>
                   <a:srgbClr val="F4F1EA"/>
                 </a:solidFill>
@@ -15474,22 +15504,22 @@
                 <a:ea typeface="Arial" pitchFamily="34" charset="-122"/>
                 <a:cs typeface="Arial" pitchFamily="34" charset="-120"/>
               </a:rPr>
-              <a:t>Las palancas</a:t>
-            </a:r>
-            <a:endParaRPr lang="en-US" sz="2250" dirty="0"/>
-          </a:p>
-        </p:txBody>
-      </p:sp>
-      <p:sp>
-        <p:nvSpPr>
-          <p:cNvPr id="20" name="Text 20"/>
-          <p:cNvSpPr/>
-          <p:nvPr/>
-        </p:nvSpPr>
-        <p:spPr>
-          <a:xfrm>
-            <a:off x="7165594" y="5950000"/>
-            <a:ext cx="4441444" cy="1011882"/>
+              <a:t>Palanca 1 · Productividad</a:t>
+            </a:r>
+            <a:endParaRPr lang="en-US" sz="1950" dirty="0"/>
+          </a:p>
+        </p:txBody>
+      </p:sp>
+      <p:sp>
+        <p:nvSpPr>
+          <p:cNvPr id="21" name="Text 21"/>
+          <p:cNvSpPr/>
+          <p:nvPr/>
+        </p:nvSpPr>
+        <p:spPr>
+          <a:xfrm>
+            <a:off x="7401744" y="5590000"/>
+            <a:ext cx="3971444" cy="320000"/>
           </a:xfrm>
           <a:prstGeom prst="rect">
             <a:avLst/>
@@ -15504,13 +15534,10 @@
           <a:lstStyle/>
           <a:p>
             <a:pPr marL="0" indent="0" algn="l">
-              <a:lnSpc>
-                <a:spcPct val="130000"/>
-              </a:lnSpc>
-              <a:buNone/>
-            </a:pPr>
-            <a:r>
-              <a:rPr lang="en-US" sz="1800" kern="0" dirty="0">
+              <a:buNone/>
+            </a:pPr>
+            <a:r>
+              <a:rPr lang="en-US" sz="1500" kern="0" dirty="0">
                 <a:solidFill>
                   <a:srgbClr val="D7E0D8"/>
                 </a:solidFill>
@@ -15518,15 +15545,212 @@
                 <a:ea typeface="Arial" pitchFamily="34" charset="-122"/>
                 <a:cs typeface="Arial" pitchFamily="34" charset="-120"/>
               </a:rPr>
-              <a:t>Subir o bajar productividad · configurar áreas.</a:t>
-            </a:r>
-            <a:endParaRPr lang="en-US" sz="1800" dirty="0"/>
-          </a:p>
-        </p:txBody>
-      </p:sp>
-      <p:sp>
-        <p:nvSpPr>
-          <p:cNvPr id="21" name="Shape 21"/>
+              <a:t>se ajusta operativa a operativa</a:t>
+            </a:r>
+            <a:endParaRPr lang="en-US" sz="1500" dirty="0"/>
+          </a:p>
+        </p:txBody>
+      </p:sp>
+      <p:sp>
+        <p:nvSpPr>
+          <p:cNvPr id="22" name="Text 22"/>
+          <p:cNvSpPr/>
+          <p:nvPr/>
+        </p:nvSpPr>
+        <p:spPr>
+          <a:xfrm>
+            <a:off x="7165594" y="5980000"/>
+            <a:ext cx="4441444" cy="330000"/>
+          </a:xfrm>
+          <a:prstGeom prst="rect">
+            <a:avLst/>
+          </a:prstGeom>
+          <a:noFill/>
+          <a:ln/>
+        </p:spPr>
+        <p:txBody>
+          <a:bodyPr wrap="square" lIns="25400" tIns="25400" rIns="25400" bIns="25400" rtlCol="0" anchor="ctr">
+            <a:normAutofit/>
+          </a:bodyPr>
+          <a:lstStyle/>
+          <a:p>
+            <a:pPr marL="0" indent="0" algn="ctr">
+              <a:lnSpc>
+                <a:spcPct val="100000"/>
+              </a:lnSpc>
+              <a:buNone/>
+            </a:pPr>
+            <a:r>
+              <a:rPr lang="en-US" sz="2100" b="1" kern="0" dirty="0">
+                <a:solidFill>
+                  <a:srgbClr val="8FBBA6"/>
+                </a:solidFill>
+                <a:latin typeface="Arial" pitchFamily="34" charset="0"/>
+                <a:ea typeface="Arial" pitchFamily="34" charset="-122"/>
+                <a:cs typeface="Arial" pitchFamily="34" charset="-120"/>
+              </a:rPr>
+              <a:t>↓</a:t>
+            </a:r>
+            <a:endParaRPr lang="en-US" sz="2100" dirty="0"/>
+          </a:p>
+        </p:txBody>
+      </p:sp>
+      <p:sp>
+        <p:nvSpPr>
+          <p:cNvPr id="23" name="Shape 23"/>
+          <p:cNvSpPr/>
+          <p:nvPr/>
+        </p:nvSpPr>
+        <p:spPr>
+          <a:xfrm>
+            <a:off x="7165594" y="6310000"/>
+            <a:ext cx="4441444" cy="880000"/>
+          </a:xfrm>
+          <a:prstGeom prst="roundRect">
+            <a:avLst>
+              <a:gd name="adj" fmla="val 8000"/>
+            </a:avLst>
+          </a:prstGeom>
+          <a:solidFill>
+            <a:srgbClr val="2D7A55"/>
+          </a:solidFill>
+          <a:ln/>
+          <a:effectLst/>
+        </p:spPr>
+        <p:txBody>
+          <a:bodyPr/>
+          <a:lstStyle/>
+          <a:p>
+            <a:endParaRPr lang="es-ES"/>
+          </a:p>
+        </p:txBody>
+      </p:sp>
+      <p:sp>
+        <p:nvSpPr>
+          <p:cNvPr id="24" name="Text 24"/>
+          <p:cNvSpPr/>
+          <p:nvPr/>
+        </p:nvSpPr>
+        <p:spPr>
+          <a:xfrm>
+            <a:off x="7401744" y="6420000"/>
+            <a:ext cx="3971444" cy="380000"/>
+          </a:xfrm>
+          <a:prstGeom prst="rect">
+            <a:avLst/>
+          </a:prstGeom>
+          <a:noFill/>
+          <a:ln/>
+        </p:spPr>
+        <p:txBody>
+          <a:bodyPr wrap="square" lIns="25400" tIns="25400" rIns="25400" bIns="25400" rtlCol="0" anchor="t">
+            <a:normAutofit/>
+          </a:bodyPr>
+          <a:lstStyle/>
+          <a:p>
+            <a:pPr marL="0" indent="0" algn="l">
+              <a:buNone/>
+            </a:pPr>
+            <a:r>
+              <a:rPr lang="en-US" sz="1950" b="1" kern="0" dirty="0">
+                <a:solidFill>
+                  <a:srgbClr val="F4F1EA"/>
+                </a:solidFill>
+                <a:latin typeface="Arial" pitchFamily="34" charset="0"/>
+                <a:ea typeface="Arial" pitchFamily="34" charset="-122"/>
+                <a:cs typeface="Arial" pitchFamily="34" charset="-120"/>
+              </a:rPr>
+              <a:t>Palanca 2 · Áreas</a:t>
+            </a:r>
+            <a:endParaRPr lang="en-US" sz="1950" dirty="0"/>
+          </a:p>
+        </p:txBody>
+      </p:sp>
+      <p:sp>
+        <p:nvSpPr>
+          <p:cNvPr id="25" name="Text 25"/>
+          <p:cNvSpPr/>
+          <p:nvPr/>
+        </p:nvSpPr>
+        <p:spPr>
+          <a:xfrm>
+            <a:off x="7401744" y="6800000"/>
+            <a:ext cx="3971444" cy="320000"/>
+          </a:xfrm>
+          <a:prstGeom prst="rect">
+            <a:avLst/>
+          </a:prstGeom>
+          <a:noFill/>
+          <a:ln/>
+        </p:spPr>
+        <p:txBody>
+          <a:bodyPr wrap="square" lIns="25400" tIns="25400" rIns="25400" bIns="25400" rtlCol="0" anchor="t">
+            <a:normAutofit/>
+          </a:bodyPr>
+          <a:lstStyle/>
+          <a:p>
+            <a:pPr marL="0" indent="0" algn="l">
+              <a:buNone/>
+            </a:pPr>
+            <a:r>
+              <a:rPr lang="en-US" sz="1500" kern="0" dirty="0">
+                <a:solidFill>
+                  <a:srgbClr val="D7E0D8"/>
+                </a:solidFill>
+                <a:latin typeface="Arial" pitchFamily="34" charset="0"/>
+                <a:ea typeface="Arial" pitchFamily="34" charset="-122"/>
+                <a:cs typeface="Arial" pitchFamily="34" charset="-120"/>
+              </a:rPr>
+              <a:t>el margen estructural</a:t>
+            </a:r>
+            <a:endParaRPr lang="en-US" sz="1500" dirty="0"/>
+          </a:p>
+        </p:txBody>
+      </p:sp>
+      <p:sp>
+        <p:nvSpPr>
+          <p:cNvPr id="26" name="Text 26"/>
+          <p:cNvSpPr/>
+          <p:nvPr/>
+        </p:nvSpPr>
+        <p:spPr>
+          <a:xfrm>
+            <a:off x="7165594" y="7310000"/>
+            <a:ext cx="4441444" cy="320000"/>
+          </a:xfrm>
+          <a:prstGeom prst="rect">
+            <a:avLst/>
+          </a:prstGeom>
+          <a:noFill/>
+          <a:ln/>
+        </p:spPr>
+        <p:txBody>
+          <a:bodyPr wrap="square" lIns="25400" tIns="25400" rIns="25400" bIns="25400" rtlCol="0" anchor="t">
+            <a:normAutofit/>
+          </a:bodyPr>
+          <a:lstStyle/>
+          <a:p>
+            <a:pPr marL="0" indent="0" algn="l">
+              <a:buNone/>
+            </a:pPr>
+            <a:r>
+              <a:rPr lang="en-US" sz="1600" b="1" kern="0" dirty="0">
+                <a:solidFill>
+                  <a:srgbClr val="8FBBA6"/>
+                </a:solidFill>
+                <a:latin typeface="Arial" pitchFamily="34" charset="0"/>
+                <a:ea typeface="Arial" pitchFamily="34" charset="-122"/>
+                <a:cs typeface="Arial" pitchFamily="34" charset="-120"/>
+              </a:rPr>
+              <a:t>El guion de esta presentación.</a:t>
+            </a:r>
+            <a:endParaRPr lang="en-US" sz="1600" dirty="0"/>
+          </a:p>
+        </p:txBody>
+      </p:sp>
+      <p:sp>
+        <p:nvSpPr>
+          <p:cNvPr id="27" name="Shape 27"/>
           <p:cNvSpPr/>
           <p:nvPr/>
         </p:nvSpPr>
@@ -15562,7 +15786,7 @@
       </p:sp>
       <p:sp>
         <p:nvSpPr>
-          <p:cNvPr id="22" name="Shape 22"/>
+          <p:cNvPr id="28" name="Shape 28"/>
           <p:cNvSpPr/>
           <p:nvPr/>
         </p:nvSpPr>
@@ -15590,7 +15814,7 @@
       </p:sp>
       <p:sp>
         <p:nvSpPr>
-          <p:cNvPr id="23" name="Text 23"/>
+          <p:cNvPr id="29" name="Text 29"/>
           <p:cNvSpPr/>
           <p:nvPr/>
         </p:nvSpPr>
@@ -15631,7 +15855,7 @@
       </p:sp>
       <p:sp>
         <p:nvSpPr>
-          <p:cNvPr id="24" name="Text 24"/>
+          <p:cNvPr id="30" name="Text 30"/>
           <p:cNvSpPr/>
           <p:nvPr/>
         </p:nvSpPr>
@@ -15672,7 +15896,7 @@
       </p:sp>
       <p:sp>
         <p:nvSpPr>
-          <p:cNvPr id="25" name="Text 25"/>
+          <p:cNvPr id="31" name="Text 31"/>
           <p:cNvSpPr/>
           <p:nvPr/>
         </p:nvSpPr>
@@ -15716,7 +15940,7 @@
       </p:sp>
       <p:sp>
         <p:nvSpPr>
-          <p:cNvPr id="26" name="Text 26"/>
+          <p:cNvPr id="32" name="Text 32"/>
           <p:cNvSpPr/>
           <p:nvPr/>
         </p:nvSpPr>
@@ -15760,7 +15984,7 @@
       </p:sp>
       <p:sp>
         <p:nvSpPr>
-          <p:cNvPr id="27" name="Text 27"/>
+          <p:cNvPr id="33" name="Text 33"/>
           <p:cNvSpPr/>
           <p:nvPr/>
         </p:nvSpPr>
@@ -15804,7 +16028,117 @@
       </p:sp>
       <p:sp>
         <p:nvSpPr>
-          <p:cNvPr id="28" name="Shape 28"/>
+          <p:cNvPr id="34" name="Shape 34"/>
+          <p:cNvSpPr/>
+          <p:nvPr/>
+        </p:nvSpPr>
+        <p:spPr>
+          <a:xfrm>
+            <a:off x="1066800" y="8352676"/>
+            <a:ext cx="16154400" cy="947737"/>
+          </a:xfrm>
+          <a:prstGeom prst="roundRect">
+            <a:avLst>
+              <a:gd name="adj" fmla="val 3770"/>
+            </a:avLst>
+          </a:prstGeom>
+          <a:solidFill>
+            <a:srgbClr val="ECE7DC"/>
+          </a:solidFill>
+          <a:ln/>
+          <a:effectLst/>
+        </p:spPr>
+        <p:txBody>
+          <a:bodyPr/>
+          <a:lstStyle/>
+          <a:p>
+            <a:endParaRPr lang="es-ES"/>
+          </a:p>
+        </p:txBody>
+      </p:sp>
+      <p:sp>
+        <p:nvSpPr>
+          <p:cNvPr id="35" name="Shape 35"/>
+          <p:cNvSpPr/>
+          <p:nvPr/>
+        </p:nvSpPr>
+        <p:spPr>
+          <a:xfrm>
+            <a:off x="1066800" y="8352676"/>
+            <a:ext cx="57150" cy="947737"/>
+          </a:xfrm>
+          <a:prstGeom prst="rect">
+            <a:avLst/>
+          </a:prstGeom>
+          <a:solidFill>
+            <a:srgbClr val="2D7A55"/>
+          </a:solidFill>
+          <a:ln/>
+          <a:effectLst/>
+        </p:spPr>
+        <p:txBody>
+          <a:bodyPr/>
+          <a:lstStyle/>
+          <a:p>
+            <a:endParaRPr lang="es-ES"/>
+          </a:p>
+        </p:txBody>
+      </p:sp>
+      <p:sp>
+        <p:nvSpPr>
+          <p:cNvPr id="36" name="Text 36"/>
+          <p:cNvSpPr/>
+          <p:nvPr/>
+        </p:nvSpPr>
+        <p:spPr>
+          <a:xfrm>
+            <a:off x="1447800" y="8352676"/>
+            <a:ext cx="15934182" cy="947737"/>
+          </a:xfrm>
+          <a:prstGeom prst="rect">
+            <a:avLst/>
+          </a:prstGeom>
+          <a:noFill/>
+          <a:ln/>
+        </p:spPr>
+        <p:txBody>
+          <a:bodyPr wrap="square" lIns="25400" tIns="25400" rIns="25400" bIns="25400" rtlCol="0" anchor="ctr">
+            <a:normAutofit/>
+          </a:bodyPr>
+          <a:lstStyle/>
+          <a:p>
+            <a:pPr marL="0" indent="0" algn="l">
+              <a:buNone/>
+            </a:pPr>
+            <a:r>
+              <a:rPr lang="en-US" sz="1950" b="1" kern="0" dirty="0">
+                <a:solidFill>
+                  <a:srgbClr val="0F1D18"/>
+                </a:solidFill>
+                <a:latin typeface="Arial" pitchFamily="34" charset="0"/>
+                <a:ea typeface="Arial" pitchFamily="34" charset="-122"/>
+                <a:cs typeface="Arial" pitchFamily="34" charset="-120"/>
+              </a:rPr>
+              <a:t>Las dos palancas marcan el guion a partir de aquí: </a:t>
+            </a:r>
+            <a:r>
+              <a:rPr lang="en-US" sz="1950" kern="0" dirty="0">
+                <a:solidFill>
+                  <a:srgbClr val="2A3A33"/>
+                </a:solidFill>
+                <a:latin typeface="Arial" pitchFamily="34" charset="0"/>
+                <a:ea typeface="Arial" pitchFamily="34" charset="-122"/>
+                <a:cs typeface="Arial" pitchFamily="34" charset="-120"/>
+              </a:rPr>
+              <a:t>primero la productividad; cuando se agota, las áreas.</a:t>
+            </a:r>
+            <a:endParaRPr lang="en-US" sz="1950" dirty="0"/>
+          </a:p>
+        </p:txBody>
+      </p:sp>
+      <p:sp>
+        <p:nvSpPr>
+          <p:cNvPr id="37" name="Shape 37"/>
           <p:cNvSpPr/>
           <p:nvPr/>
         </p:nvSpPr>
@@ -15834,7 +16168,7 @@
       </p:sp>
       <p:sp>
         <p:nvSpPr>
-          <p:cNvPr id="29" name="Shape 29"/>
+          <p:cNvPr id="38" name="Shape 38"/>
           <p:cNvSpPr/>
           <p:nvPr/>
         </p:nvSpPr>
@@ -15864,7 +16198,7 @@
       </p:sp>
       <p:sp>
         <p:nvSpPr>
-          <p:cNvPr id="30" name="Shape 30"/>
+          <p:cNvPr id="39" name="Shape 39"/>
           <p:cNvSpPr/>
           <p:nvPr/>
         </p:nvSpPr>
@@ -15894,7 +16228,7 @@
       </p:sp>
       <p:sp>
         <p:nvSpPr>
-          <p:cNvPr id="31" name="Shape 31"/>
+          <p:cNvPr id="40" name="Shape 40"/>
           <p:cNvSpPr/>
           <p:nvPr/>
         </p:nvSpPr>
@@ -15924,7 +16258,7 @@
       </p:sp>
       <p:sp>
         <p:nvSpPr>
-          <p:cNvPr id="32" name="Shape 32"/>
+          <p:cNvPr id="41" name="Shape 41"/>
           <p:cNvSpPr/>
           <p:nvPr/>
         </p:nvSpPr>
@@ -15954,7 +16288,7 @@
       </p:sp>
       <p:sp>
         <p:nvSpPr>
-          <p:cNvPr id="33" name="Shape 33"/>
+          <p:cNvPr id="42" name="Shape 42"/>
           <p:cNvSpPr/>
           <p:nvPr/>
         </p:nvSpPr>
@@ -15984,7 +16318,7 @@
       </p:sp>
       <p:sp>
         <p:nvSpPr>
-          <p:cNvPr id="34" name="Shape 34"/>
+          <p:cNvPr id="43" name="Shape 43"/>
           <p:cNvSpPr/>
           <p:nvPr/>
         </p:nvSpPr>
@@ -16080,7 +16414,7 @@
                 <a:ea typeface="Courier New" pitchFamily="34" charset="-122"/>
                 <a:cs typeface="Courier New" pitchFamily="34" charset="-120"/>
               </a:rPr>
-              <a:t>ANTES DE SEGUIR</a:t>
+              <a:t>ANTES DE LA PRIMERA PALANCA</a:t>
             </a:r>
             <a:endParaRPr lang="en-US" sz="1800" dirty="0"/>
           </a:p>
@@ -16955,6 +17289,61 @@
           <a:lstStyle/>
           <a:p>
             <a:endParaRPr lang="es-ES"/>
+          </a:p>
+        </p:txBody>
+      </p:sp>
+      <p:sp>
+        <p:nvSpPr>
+          <p:cNvPr id="201" name="Text 201"/>
+          <p:cNvSpPr/>
+          <p:nvPr/>
+        </p:nvSpPr>
+        <p:spPr>
+          <a:xfrm>
+            <a:off x="1066800" y="6500000"/>
+            <a:ext cx="16639032" cy="700000"/>
+          </a:xfrm>
+          <a:prstGeom prst="rect">
+            <a:avLst/>
+          </a:prstGeom>
+          <a:noFill/>
+          <a:ln/>
+        </p:spPr>
+        <p:txBody>
+          <a:bodyPr wrap="square" lIns="25400" tIns="25400" rIns="25400" bIns="25400" rtlCol="0" anchor="t">
+            <a:normAutofit/>
+          </a:bodyPr>
+          <a:lstStyle/>
+          <a:p>
+            <a:pPr marL="0" indent="0" algn="l">
+              <a:lnSpc>
+                <a:spcPct val="145000"/>
+              </a:lnSpc>
+              <a:buNone/>
+            </a:pPr>
+            <a:r>
+              <a:rPr lang="en-US" sz="2250" kern="0" dirty="0">
+                <a:solidFill>
+                  <a:srgbClr val="6A7A72"/>
+                </a:solidFill>
+                <a:latin typeface="Arial" pitchFamily="34" charset="0"/>
+                <a:ea typeface="Arial" pitchFamily="34" charset="-122"/>
+                <a:cs typeface="Arial" pitchFamily="34" charset="-120"/>
+              </a:rPr>
+              <a:t>Importa porque la productividad no se ajusta en bloque: </a:t>
+            </a:r>
+            <a:r>
+              <a:rPr lang="en-US" sz="2250" b="1" kern="0" dirty="0">
+                <a:solidFill>
+                  <a:srgbClr val="0F1D18"/>
+                </a:solidFill>
+                <a:latin typeface="Arial" pitchFamily="34" charset="0"/>
+                <a:ea typeface="Arial" pitchFamily="34" charset="-122"/>
+                <a:cs typeface="Arial" pitchFamily="34" charset="-120"/>
+              </a:rPr>
+              <a:t>se toca operativa a operativa.</a:t>
+            </a:r>
+            <a:endParaRPr lang="en-US" sz="2250" dirty="0"/>
           </a:p>
         </p:txBody>
       </p:sp>
@@ -17026,7 +17415,7 @@
                 <a:ea typeface="Courier New" pitchFamily="34" charset="-122"/>
                 <a:cs typeface="Courier New" pitchFamily="34" charset="-120"/>
               </a:rPr>
-              <a:t>BLOQUE 1 · PRODUCTIVIDAD</a:t>
+              <a:t>PALANCA 1 · PRODUCTIVIDAD</a:t>
             </a:r>
             <a:endParaRPr lang="en-US" sz="1800" dirty="0"/>
           </a:p>

--- a/Proyecto_Personal_OSRM_v2.pptx
+++ b/Proyecto_Personal_OSRM_v2.pptx
@@ -26,8 +26,6 @@
     <p:sldId id="284" r:id="rId25"/>
     <p:sldId id="285" r:id="rId26"/>
     <p:sldId id="286" r:id="rId27"/>
-    <p:sldId id="287" r:id="rId28"/>
-    <p:sldId id="288" r:id="rId29"/>
     <p:sldId id="271" r:id="rId13"/>
     <p:sldId id="272" r:id="rId14"/>
     <p:sldId id="274" r:id="rId15"/>
@@ -6732,7 +6730,7 @@
     <p:bg>
       <p:bgPr>
         <a:solidFill>
-          <a:srgbClr val="0D0F14"/>
+          <a:srgbClr val="F4F1EA"/>
         </a:solidFill>
       </p:bgPr>
     </p:bg>
@@ -6777,7 +6775,7 @@
             <a:r>
               <a:rPr lang="en-US" sz="2400" spc="600" kern="0" dirty="0">
                 <a:solidFill>
-                  <a:srgbClr val="8B92A5"/>
+                  <a:srgbClr val="6A7A72"/>
                 </a:solidFill>
                 <a:latin typeface="Courier New" pitchFamily="34" charset="0"/>
                 <a:ea typeface="Courier New" pitchFamily="34" charset="-122"/>
@@ -6816,7 +6814,7 @@
             <a:r>
               <a:rPr lang="en-US" sz="6000" b="1" dirty="0">
                 <a:solidFill>
-                  <a:srgbClr val="E8EAF0"/>
+                  <a:srgbClr val="0F1D18"/>
                 </a:solidFill>
                 <a:latin typeface="Arial" pitchFamily="34" charset="0"/>
                 <a:ea typeface="Arial" pitchFamily="34" charset="-122"/>
@@ -6858,7 +6856,7 @@
             <a:r>
               <a:rPr lang="en-US" sz="2900" dirty="0">
                 <a:solidFill>
-                  <a:srgbClr val="E8EAF0"/>
+                  <a:srgbClr val="0F1D18"/>
                 </a:solidFill>
                 <a:latin typeface="Arial" pitchFamily="34" charset="0"/>
                 <a:ea typeface="Arial" pitchFamily="34" charset="-122"/>
@@ -6887,7 +6885,7 @@
             <a:r>
               <a:rPr lang="en-US" sz="2900" dirty="0">
                 <a:solidFill>
-                  <a:srgbClr val="E8EAF0"/>
+                  <a:srgbClr val="0F1D18"/>
                 </a:solidFill>
                 <a:latin typeface="Arial" pitchFamily="34" charset="0"/>
                 <a:ea typeface="Arial" pitchFamily="34" charset="-122"/>
@@ -6926,7 +6924,7 @@
             <a:r>
               <a:rPr lang="en-US" sz="8000" b="1" dirty="0">
                 <a:solidFill>
-                  <a:srgbClr val="E8554D"/>
+                  <a:srgbClr val="C1432E"/>
                 </a:solidFill>
                 <a:latin typeface="Courier New" pitchFamily="34" charset="0"/>
                 <a:ea typeface="Courier New" pitchFamily="34" charset="-122"/>
@@ -6943,7 +6941,7 @@
             <a:r>
               <a:rPr lang="en-US" sz="2400" dirty="0">
                 <a:solidFill>
-                  <a:srgbClr val="8B92A5"/>
+                  <a:srgbClr val="6A7A72"/>
                 </a:solidFill>
               </a:rPr>
               <a:t>entre dos pedidos consecutivos = salto</a:t>
@@ -6969,11 +6967,11 @@
             </a:avLst>
           </a:prstGeom>
           <a:solidFill>
-            <a:srgbClr val="161B26"/>
+            <a:srgbClr val="FBFAF5"/>
           </a:solidFill>
           <a:ln w="25400">
             <a:solidFill>
-              <a:srgbClr val="2A3040"/>
+              <a:srgbClr val="CFC7B5"/>
             </a:solidFill>
             <a:prstDash val="solid"/>
           </a:ln>
@@ -7002,7 +7000,7 @@
           </a:solidFill>
           <a:ln w="25400">
             <a:solidFill>
-              <a:srgbClr val="2A3040"/>
+              <a:srgbClr val="CFC7B5"/>
             </a:solidFill>
             <a:prstDash val="dash"/>
           </a:ln>
@@ -7031,7 +7029,7 @@
           </a:solidFill>
           <a:ln w="25400">
             <a:solidFill>
-              <a:srgbClr val="2A3040"/>
+              <a:srgbClr val="CFC7B5"/>
             </a:solidFill>
             <a:prstDash val="dash"/>
           </a:ln>
@@ -7064,7 +7062,7 @@
             <a:r>
               <a:rPr lang="en-US" sz="2000" dirty="0">
                 <a:solidFill>
-                  <a:srgbClr val="8B92A5"/>
+                  <a:srgbClr val="6A7A72"/>
                 </a:solidFill>
                 <a:latin typeface="Courier New" pitchFamily="34" charset="0"/>
                 <a:ea typeface="Courier New" pitchFamily="34" charset="-122"/>
@@ -7103,7 +7101,7 @@
             <a:r>
               <a:rPr lang="en-US" sz="2000" dirty="0">
                 <a:solidFill>
-                  <a:srgbClr val="8B92A5"/>
+                  <a:srgbClr val="6A7A72"/>
                 </a:solidFill>
                 <a:latin typeface="Courier New" pitchFamily="34" charset="0"/>
                 <a:ea typeface="Courier New" pitchFamily="34" charset="-122"/>
@@ -7201,7 +7199,7 @@
           <a:noFill/>
           <a:ln w="76200">
             <a:solidFill>
-              <a:srgbClr val="E8554D"/>
+              <a:srgbClr val="C1432E"/>
             </a:solidFill>
             <a:prstDash val="solid"/>
           </a:ln>
@@ -7455,7 +7453,7 @@
             <a:r>
               <a:rPr lang="en-US" sz="2100" b="1" dirty="0">
                 <a:solidFill>
-                  <a:srgbClr val="E8554D"/>
+                  <a:srgbClr val="C1432E"/>
                 </a:solidFill>
                 <a:latin typeface="Courier New" pitchFamily="34" charset="0"/>
                 <a:ea typeface="Courier New" pitchFamily="34" charset="-122"/>
@@ -7481,7 +7479,7 @@
     <p:bg>
       <p:bgPr>
         <a:solidFill>
-          <a:srgbClr val="0D0F14"/>
+          <a:srgbClr val="F4F1EA"/>
         </a:solidFill>
       </p:bgPr>
     </p:bg>
@@ -7526,7 +7524,7 @@
             <a:r>
               <a:rPr lang="en-US" sz="2400" spc="600" kern="0" dirty="0">
                 <a:solidFill>
-                  <a:srgbClr val="8B92A5"/>
+                  <a:srgbClr val="6A7A72"/>
                 </a:solidFill>
                 <a:latin typeface="Courier New" pitchFamily="34" charset="0"/>
                 <a:ea typeface="Courier New" pitchFamily="34" charset="-122"/>
@@ -7565,7 +7563,7 @@
             <a:r>
               <a:rPr lang="en-US" sz="6000" b="1" dirty="0">
                 <a:solidFill>
-                  <a:srgbClr val="E8EAF0"/>
+                  <a:srgbClr val="0F1D18"/>
                 </a:solidFill>
                 <a:latin typeface="Arial" pitchFamily="34" charset="0"/>
                 <a:ea typeface="Arial" pitchFamily="34" charset="-122"/>
@@ -7594,11 +7592,11 @@
             </a:avLst>
           </a:prstGeom>
           <a:solidFill>
-            <a:srgbClr val="161B26"/>
+            <a:srgbClr val="FBFAF5"/>
           </a:solidFill>
           <a:ln w="25400">
             <a:solidFill>
-              <a:srgbClr val="2A3040"/>
+              <a:srgbClr val="CFC7B5"/>
             </a:solidFill>
             <a:prstDash val="solid"/>
           </a:ln>
@@ -7627,7 +7625,7 @@
           </a:solidFill>
           <a:ln w="25400">
             <a:solidFill>
-              <a:srgbClr val="2A3040"/>
+              <a:srgbClr val="CFC7B5"/>
             </a:solidFill>
             <a:prstDash val="dash"/>
           </a:ln>
@@ -7656,7 +7654,7 @@
           </a:solidFill>
           <a:ln w="25400">
             <a:solidFill>
-              <a:srgbClr val="2A3040"/>
+              <a:srgbClr val="CFC7B5"/>
             </a:solidFill>
             <a:prstDash val="dash"/>
           </a:ln>
@@ -7685,7 +7683,7 @@
           </a:solidFill>
           <a:ln w="25400">
             <a:solidFill>
-              <a:srgbClr val="2A3040"/>
+              <a:srgbClr val="CFC7B5"/>
             </a:solidFill>
             <a:prstDash val="dash"/>
           </a:ln>
@@ -7714,7 +7712,7 @@
           </a:solidFill>
           <a:ln w="25400">
             <a:solidFill>
-              <a:srgbClr val="2A3040"/>
+              <a:srgbClr val="CFC7B5"/>
             </a:solidFill>
             <a:prstDash val="dash"/>
           </a:ln>
@@ -7747,7 +7745,7 @@
             <a:r>
               <a:rPr lang="en-US" sz="2000" dirty="0">
                 <a:solidFill>
-                  <a:srgbClr val="8B92A5"/>
+                  <a:srgbClr val="6A7A72"/>
                 </a:solidFill>
                 <a:latin typeface="Courier New" pitchFamily="34" charset="0"/>
                 <a:ea typeface="Courier New" pitchFamily="34" charset="-122"/>
@@ -7786,7 +7784,7 @@
             <a:r>
               <a:rPr lang="en-US" sz="2000" dirty="0">
                 <a:solidFill>
-                  <a:srgbClr val="8B92A5"/>
+                  <a:srgbClr val="6A7A72"/>
                 </a:solidFill>
                 <a:latin typeface="Courier New" pitchFamily="34" charset="0"/>
                 <a:ea typeface="Courier New" pitchFamily="34" charset="-122"/>
@@ -7825,7 +7823,7 @@
             <a:r>
               <a:rPr lang="en-US" sz="2000" dirty="0">
                 <a:solidFill>
-                  <a:srgbClr val="8B92A5"/>
+                  <a:srgbClr val="6A7A72"/>
                 </a:solidFill>
                 <a:latin typeface="Courier New" pitchFamily="34" charset="0"/>
                 <a:ea typeface="Courier New" pitchFamily="34" charset="-122"/>
@@ -7864,7 +7862,7 @@
             <a:r>
               <a:rPr lang="en-US" sz="2000" dirty="0">
                 <a:solidFill>
-                  <a:srgbClr val="8B92A5"/>
+                  <a:srgbClr val="6A7A72"/>
                 </a:solidFill>
                 <a:latin typeface="Courier New" pitchFamily="34" charset="0"/>
                 <a:ea typeface="Courier New" pitchFamily="34" charset="-122"/>
@@ -8054,7 +8052,7 @@
           <a:noFill/>
           <a:ln w="63500">
             <a:solidFill>
-              <a:srgbClr val="E8554D"/>
+              <a:srgbClr val="C1432E"/>
             </a:solidFill>
             <a:prstDash val="solid"/>
           </a:ln>
@@ -8100,7 +8098,7 @@
           <a:noFill/>
           <a:ln w="63500">
             <a:solidFill>
-              <a:srgbClr val="E8554D"/>
+              <a:srgbClr val="C1432E"/>
             </a:solidFill>
             <a:prstDash val="solid"/>
           </a:ln>
@@ -8271,7 +8269,7 @@
             <a:r>
               <a:rPr lang="en-US" sz="2000" b="1" dirty="0">
                 <a:solidFill>
-                  <a:srgbClr val="E8554D"/>
+                  <a:srgbClr val="C1432E"/>
                 </a:solidFill>
                 <a:latin typeface="Courier New" pitchFamily="34" charset="0"/>
                 <a:ea typeface="Courier New" pitchFamily="34" charset="-122"/>
@@ -8310,7 +8308,7 @@
             <a:r>
               <a:rPr lang="en-US" sz="2000" b="1" dirty="0">
                 <a:solidFill>
-                  <a:srgbClr val="E8554D"/>
+                  <a:srgbClr val="C1432E"/>
                 </a:solidFill>
                 <a:latin typeface="Courier New" pitchFamily="34" charset="0"/>
                 <a:ea typeface="Courier New" pitchFamily="34" charset="-122"/>
@@ -8886,7 +8884,7 @@
             <a:r>
               <a:rPr lang="en-US" sz="2100" dirty="0">
                 <a:solidFill>
-                  <a:srgbClr val="8B92A5"/>
+                  <a:srgbClr val="6A7A72"/>
                 </a:solidFill>
                 <a:latin typeface="Courier New" pitchFamily="34" charset="0"/>
                 <a:ea typeface="Courier New" pitchFamily="34" charset="-122"/>
@@ -8962,7 +8960,7 @@
             <a:r>
               <a:rPr lang="en-US" sz="2100" dirty="0">
                 <a:solidFill>
-                  <a:srgbClr val="8B92A5"/>
+                  <a:srgbClr val="6A7A72"/>
                 </a:solidFill>
                 <a:latin typeface="Courier New" pitchFamily="34" charset="0"/>
                 <a:ea typeface="Courier New" pitchFamily="34" charset="-122"/>
@@ -9038,7 +9036,7 @@
             <a:r>
               <a:rPr lang="en-US" sz="2100" dirty="0">
                 <a:solidFill>
-                  <a:srgbClr val="8B92A5"/>
+                  <a:srgbClr val="6A7A72"/>
                 </a:solidFill>
                 <a:latin typeface="Courier New" pitchFamily="34" charset="0"/>
                 <a:ea typeface="Courier New" pitchFamily="34" charset="-122"/>
@@ -9114,7 +9112,7 @@
             <a:r>
               <a:rPr lang="en-US" sz="2100" dirty="0">
                 <a:solidFill>
-                  <a:srgbClr val="8B92A5"/>
+                  <a:srgbClr val="6A7A72"/>
                 </a:solidFill>
                 <a:latin typeface="Courier New" pitchFamily="34" charset="0"/>
                 <a:ea typeface="Courier New" pitchFamily="34" charset="-122"/>
@@ -9143,7 +9141,7 @@
           <a:noFill/>
           <a:ln w="25400">
             <a:solidFill>
-              <a:srgbClr val="2A3040"/>
+              <a:srgbClr val="CFC7B5"/>
             </a:solidFill>
             <a:prstDash val="solid"/>
           </a:ln>
@@ -9176,7 +9174,7 @@
             <a:r>
               <a:rPr lang="en-US" sz="4400" b="1" dirty="0">
                 <a:solidFill>
-                  <a:srgbClr val="E8EAF0"/>
+                  <a:srgbClr val="0F1D18"/>
                 </a:solidFill>
                 <a:latin typeface="Courier New" pitchFamily="34" charset="0"/>
                 <a:ea typeface="Courier New" pitchFamily="34" charset="-122"/>
@@ -9193,7 +9191,7 @@
             <a:r>
               <a:rPr lang="en-US" sz="2500" dirty="0">
                 <a:solidFill>
-                  <a:srgbClr val="8B92A5"/>
+                  <a:srgbClr val="6A7A72"/>
                 </a:solidFill>
               </a:rPr>
               <a:t>y 25 de esos 50 km son los dos saltos en rojo</a:t>
@@ -9229,7 +9227,7 @@
             <a:r>
               <a:rPr lang="en-US" sz="2500" i="1" dirty="0">
                 <a:solidFill>
-                  <a:srgbClr val="F97316"/>
+                  <a:srgbClr val="1E4F3A"/>
                 </a:solidFill>
                 <a:latin typeface="Arial" pitchFamily="34" charset="0"/>
                 <a:ea typeface="Arial" pitchFamily="34" charset="-122"/>
@@ -9251,11 +9249,11 @@
 
 <file path=ppt/slides/slide18.xml><?xml version="1.0" encoding="utf-8"?>
 <p:sld xmlns:a="http://schemas.openxmlformats.org/drawingml/2006/main" xmlns:r="http://schemas.openxmlformats.org/officeDocument/2006/relationships" xmlns:p="http://schemas.openxmlformats.org/presentationml/2006/main">
-  <p:cSld name="Slide 4">
+  <p:cSld name="Slide 5">
     <p:bg>
       <p:bgPr>
         <a:solidFill>
-          <a:srgbClr val="0D0F14"/>
+          <a:srgbClr val="F4F1EA"/>
         </a:solidFill>
       </p:bgPr>
     </p:bg>
@@ -9300,13 +9298,13 @@
             <a:r>
               <a:rPr lang="en-US" sz="2400" spc="600" kern="0" dirty="0">
                 <a:solidFill>
-                  <a:srgbClr val="8B92A5"/>
+                  <a:srgbClr val="6A7A72"/>
                 </a:solidFill>
                 <a:latin typeface="Courier New" pitchFamily="34" charset="0"/>
                 <a:ea typeface="Courier New" pitchFamily="34" charset="-122"/>
                 <a:cs typeface="Courier New" pitchFamily="34" charset="-120"/>
               </a:rPr>
-              <a:t>03 · CÓMO MEDIMOS</a:t>
+              <a:t>03 · EL PUNTO DE PARTIDA</a:t>
             </a:r>
             <a:endParaRPr lang="en-US" sz="2400" dirty="0"/>
           </a:p>
@@ -9339,13 +9337,13 @@
             <a:r>
               <a:rPr lang="en-US" sz="6000" b="1" dirty="0">
                 <a:solidFill>
-                  <a:srgbClr val="E8EAF0"/>
+                  <a:srgbClr val="0F1D18"/>
                 </a:solidFill>
                 <a:latin typeface="Arial" pitchFamily="34" charset="0"/>
                 <a:ea typeface="Arial" pitchFamily="34" charset="-122"/>
                 <a:cs typeface="Arial" pitchFamily="34" charset="-120"/>
               </a:rPr>
-              <a:t>Kilómetros reales por carretera, no en línea recta</a:t>
+              <a:t>Baseline: el km/pedido de hoy</a:t>
             </a:r>
             <a:endParaRPr lang="en-US" sz="6000" dirty="0"/>
           </a:p>
@@ -9353,26 +9351,68 @@
       </p:sp>
       <p:sp>
         <p:nvSpPr>
-          <p:cNvPr id="4" name="Shape 2"/>
-          <p:cNvSpPr/>
-          <p:nvPr/>
-        </p:nvSpPr>
-        <p:spPr>
-          <a:xfrm>
-            <a:off x="1097280" y="3108960"/>
-            <a:ext cx="7863840" cy="5303520"/>
+          <p:cNvPr id="4" name="Text 2"/>
+          <p:cNvSpPr/>
+          <p:nvPr/>
+        </p:nvSpPr>
+        <p:spPr>
+          <a:xfrm>
+            <a:off x="1097280" y="2926080"/>
+            <a:ext cx="16093440" cy="1371600"/>
+          </a:xfrm>
+          <a:prstGeom prst="rect">
+            <a:avLst/>
+          </a:prstGeom>
+          <a:noFill/>
+          <a:ln/>
+        </p:spPr>
+        <p:txBody>
+          <a:bodyPr wrap="square" lIns="0" tIns="0" rIns="0" bIns="0" rtlCol="0" anchor="ctr"/>
+          <a:lstStyle/>
+          <a:p>
+            <a:pPr indent="0" marL="0">
+              <a:lnSpc>
+                <a:spcPct val="112000"/>
+              </a:lnSpc>
+              <a:buNone/>
+            </a:pPr>
+            <a:r>
+              <a:rPr lang="en-US" sz="2900" dirty="0">
+                <a:solidFill>
+                  <a:srgbClr val="6A7A72"/>
+                </a:solidFill>
+                <a:latin typeface="Arial" pitchFamily="34" charset="0"/>
+                <a:ea typeface="Arial" pitchFamily="34" charset="-122"/>
+                <a:cs typeface="Arial" pitchFamily="34" charset="-120"/>
+              </a:rPr>
+              <a:t>Todos los km son lo mismo: distancias entre pedidos consecutivos, medidas por carretera. En el ejemplo hay 16 desplazamientos; 14 son cortos y 2 son los saltos. El baseline los suma todos y divide entre los pedidos.</a:t>
+            </a:r>
+            <a:endParaRPr lang="en-US" sz="2900" dirty="0"/>
+          </a:p>
+        </p:txBody>
+      </p:sp>
+      <p:sp>
+        <p:nvSpPr>
+          <p:cNvPr id="5" name="Shape 3"/>
+          <p:cNvSpPr/>
+          <p:nvPr/>
+        </p:nvSpPr>
+        <p:spPr>
+          <a:xfrm>
+            <a:off x="2011680" y="4754880"/>
+            <a:ext cx="14264640" cy="3291840"/>
           </a:xfrm>
           <a:prstGeom prst="roundRect">
             <a:avLst>
-              <a:gd name="adj" fmla="val 2069"/>
+              <a:gd name="adj" fmla="val 3333"/>
             </a:avLst>
           </a:prstGeom>
           <a:solidFill>
-            <a:srgbClr val="161B26"/>
+            <a:srgbClr val="ECE7DC"/>
           </a:solidFill>
           <a:ln w="25400">
             <a:solidFill>
-              <a:srgbClr val="2A3040"/>
+              <a:srgbClr val="CFC7B5"/>
             </a:solidFill>
             <a:prstDash val="solid"/>
           </a:ln>
@@ -9380,87 +9420,14 @@
       </p:sp>
       <p:sp>
         <p:nvSpPr>
-          <p:cNvPr id="5" name="Shape 3"/>
-          <p:cNvSpPr/>
-          <p:nvPr/>
-        </p:nvSpPr>
-        <p:spPr>
-          <a:xfrm>
-            <a:off x="2066544" y="7004304"/>
-            <a:ext cx="256032" cy="256032"/>
-          </a:xfrm>
-          <a:prstGeom prst="ellipse">
-            <a:avLst/>
-          </a:prstGeom>
-          <a:solidFill>
-            <a:srgbClr val="E8EAF0"/>
-          </a:solidFill>
-          <a:ln w="19050">
-            <a:solidFill>
-              <a:srgbClr val="0D0F14"/>
-            </a:solidFill>
-            <a:prstDash val="solid"/>
-          </a:ln>
-        </p:spPr>
-      </p:sp>
-      <p:sp>
-        <p:nvSpPr>
-          <p:cNvPr id="6" name="Shape 4"/>
-          <p:cNvSpPr/>
-          <p:nvPr/>
-        </p:nvSpPr>
-        <p:spPr>
-          <a:xfrm>
-            <a:off x="7735824" y="4078224"/>
-            <a:ext cx="256032" cy="256032"/>
-          </a:xfrm>
-          <a:prstGeom prst="ellipse">
-            <a:avLst/>
-          </a:prstGeom>
-          <a:solidFill>
-            <a:srgbClr val="E8EAF0"/>
-          </a:solidFill>
-          <a:ln w="19050">
-            <a:solidFill>
-              <a:srgbClr val="0D0F14"/>
-            </a:solidFill>
-            <a:prstDash val="solid"/>
-          </a:ln>
-        </p:spPr>
-      </p:sp>
-      <p:sp>
-        <p:nvSpPr>
-          <p:cNvPr id="7" name="Shape 5"/>
-          <p:cNvSpPr/>
-          <p:nvPr/>
-        </p:nvSpPr>
-        <p:spPr>
-          <a:xfrm flipV="1">
-            <a:off x="2194560" y="4206240"/>
-            <a:ext cx="5669280" cy="2926080"/>
-          </a:xfrm>
-          <a:prstGeom prst="line">
-            <a:avLst/>
-          </a:prstGeom>
-          <a:noFill/>
-          <a:ln w="38100">
-            <a:solidFill>
-              <a:srgbClr val="6B7280"/>
-            </a:solidFill>
-            <a:prstDash val="dash"/>
-          </a:ln>
-        </p:spPr>
-      </p:sp>
-      <p:sp>
-        <p:nvSpPr>
-          <p:cNvPr id="8" name="Text 6"/>
-          <p:cNvSpPr/>
-          <p:nvPr/>
-        </p:nvSpPr>
-        <p:spPr>
-          <a:xfrm>
-            <a:off x="2651760" y="4663440"/>
-            <a:ext cx="4023360" cy="457200"/>
+          <p:cNvPr id="6" name="Text 4"/>
+          <p:cNvSpPr/>
+          <p:nvPr/>
+        </p:nvSpPr>
+        <p:spPr>
+          <a:xfrm>
+            <a:off x="2560320" y="5303520"/>
+            <a:ext cx="13167360" cy="822960"/>
           </a:xfrm>
           <a:prstGeom prst="rect">
             <a:avLst/>
@@ -9472,165 +9439,90 @@
           <a:bodyPr wrap="square" lIns="0" tIns="0" rIns="0" bIns="0" rtlCol="0" anchor="ctr"/>
           <a:lstStyle/>
           <a:p>
-            <a:pPr indent="0" marL="0">
-              <a:buNone/>
-            </a:pPr>
-            <a:r>
-              <a:rPr lang="en-US" sz="2000" dirty="0">
-                <a:solidFill>
-                  <a:srgbClr val="6B7280"/>
+            <a:pPr algn="ctr" indent="0" marL="0">
+              <a:buNone/>
+            </a:pPr>
+            <a:r>
+              <a:rPr lang="en-US" sz="3000" b="1" dirty="0">
+                <a:solidFill>
+                  <a:srgbClr val="0F1D18"/>
                 </a:solidFill>
                 <a:latin typeface="Courier New" pitchFamily="34" charset="0"/>
                 <a:ea typeface="Courier New" pitchFamily="34" charset="-122"/>
                 <a:cs typeface="Courier New" pitchFamily="34" charset="-120"/>
               </a:rPr>
-              <a:t>8 km en línea recta</a:t>
-            </a:r>
-            <a:endParaRPr lang="en-US" sz="2000" dirty="0"/>
-          </a:p>
-        </p:txBody>
-      </p:sp>
-      <p:sp>
-        <p:nvSpPr>
-          <p:cNvPr id="9" name="Shape 7"/>
-          <p:cNvSpPr/>
-          <p:nvPr/>
-        </p:nvSpPr>
-        <p:spPr>
-          <a:xfrm>
-            <a:off x="2194560" y="7132320"/>
-            <a:ext cx="1280160" cy="457200"/>
-          </a:xfrm>
-          <a:prstGeom prst="line">
-            <a:avLst/>
-          </a:prstGeom>
-          <a:noFill/>
-          <a:ln w="63500">
-            <a:solidFill>
-              <a:srgbClr val="F97316"/>
-            </a:solidFill>
-            <a:prstDash val="solid"/>
-          </a:ln>
-        </p:spPr>
-      </p:sp>
-      <p:sp>
-        <p:nvSpPr>
-          <p:cNvPr id="10" name="Shape 8"/>
-          <p:cNvSpPr/>
-          <p:nvPr/>
-        </p:nvSpPr>
-        <p:spPr>
-          <a:xfrm flipV="1">
-            <a:off x="3474720" y="7040880"/>
-            <a:ext cx="1828800" cy="548640"/>
-          </a:xfrm>
-          <a:prstGeom prst="line">
-            <a:avLst/>
-          </a:prstGeom>
-          <a:noFill/>
-          <a:ln w="63500">
-            <a:solidFill>
-              <a:srgbClr val="F97316"/>
-            </a:solidFill>
-            <a:prstDash val="solid"/>
-          </a:ln>
-        </p:spPr>
-      </p:sp>
-      <p:sp>
-        <p:nvSpPr>
-          <p:cNvPr id="11" name="Shape 9"/>
-          <p:cNvSpPr/>
-          <p:nvPr/>
-        </p:nvSpPr>
-        <p:spPr>
-          <a:xfrm flipV="1">
-            <a:off x="5303520" y="5669280"/>
-            <a:ext cx="1097280" cy="1371600"/>
-          </a:xfrm>
-          <a:prstGeom prst="line">
-            <a:avLst/>
-          </a:prstGeom>
-          <a:noFill/>
-          <a:ln w="63500">
-            <a:solidFill>
-              <a:srgbClr val="F97316"/>
-            </a:solidFill>
-            <a:prstDash val="solid"/>
-          </a:ln>
-        </p:spPr>
-      </p:sp>
-      <p:sp>
-        <p:nvSpPr>
-          <p:cNvPr id="12" name="Shape 10"/>
-          <p:cNvSpPr/>
-          <p:nvPr/>
-        </p:nvSpPr>
-        <p:spPr>
-          <a:xfrm flipV="1">
-            <a:off x="6400800" y="4206240"/>
-            <a:ext cx="1463040" cy="1463040"/>
-          </a:xfrm>
-          <a:prstGeom prst="line">
-            <a:avLst/>
-          </a:prstGeom>
-          <a:noFill/>
-          <a:ln w="63500">
-            <a:solidFill>
-              <a:srgbClr val="F97316"/>
-            </a:solidFill>
-            <a:prstDash val="solid"/>
-          </a:ln>
-        </p:spPr>
-      </p:sp>
-      <p:sp>
-        <p:nvSpPr>
-          <p:cNvPr id="13" name="Text 11"/>
-          <p:cNvSpPr/>
-          <p:nvPr/>
-        </p:nvSpPr>
-        <p:spPr>
-          <a:xfrm>
-            <a:off x="2834640" y="7772400"/>
-            <a:ext cx="5120640" cy="457200"/>
-          </a:xfrm>
-          <a:prstGeom prst="rect">
-            <a:avLst/>
-          </a:prstGeom>
-          <a:noFill/>
-          <a:ln/>
-        </p:spPr>
-        <p:txBody>
-          <a:bodyPr wrap="square" lIns="0" tIns="0" rIns="0" bIns="0" rtlCol="0" anchor="ctr"/>
-          <a:lstStyle/>
-          <a:p>
-            <a:pPr indent="0" marL="0">
-              <a:buNone/>
-            </a:pPr>
-            <a:r>
-              <a:rPr lang="en-US" sz="2000" b="1" dirty="0">
-                <a:solidFill>
-                  <a:srgbClr val="F97316"/>
+              <a:t>14 desplaz. cortos (25 km)</a:t>
+            </a:r>
+            <a:pPr algn="ctr" indent="0" marL="0">
+              <a:buNone/>
+            </a:pPr>
+            <a:r>
+              <a:rPr lang="en-US" sz="3000" dirty="0">
+                <a:solidFill>
+                  <a:srgbClr val="6A7A72"/>
                 </a:solidFill>
                 <a:latin typeface="Courier New" pitchFamily="34" charset="0"/>
                 <a:ea typeface="Courier New" pitchFamily="34" charset="-122"/>
                 <a:cs typeface="Courier New" pitchFamily="34" charset="-120"/>
               </a:rPr>
-              <a:t>12 km por carretera (OSRM)</a:t>
-            </a:r>
-            <a:endParaRPr lang="en-US" sz="2000" dirty="0"/>
-          </a:p>
-        </p:txBody>
-      </p:sp>
-      <p:sp>
-        <p:nvSpPr>
-          <p:cNvPr id="14" name="Text 12"/>
-          <p:cNvSpPr/>
-          <p:nvPr/>
-        </p:nvSpPr>
-        <p:spPr>
-          <a:xfrm>
-            <a:off x="9601200" y="3383280"/>
-            <a:ext cx="7589520" cy="2377440"/>
+              <a:t> + </a:t>
+            </a:r>
+            <a:pPr algn="ctr" indent="0" marL="0">
+              <a:buNone/>
+            </a:pPr>
+            <a:r>
+              <a:rPr lang="en-US" sz="3000" b="1" dirty="0">
+                <a:solidFill>
+                  <a:srgbClr val="C1432E"/>
+                </a:solidFill>
+                <a:latin typeface="Courier New" pitchFamily="34" charset="0"/>
+                <a:ea typeface="Courier New" pitchFamily="34" charset="-122"/>
+                <a:cs typeface="Courier New" pitchFamily="34" charset="-120"/>
+              </a:rPr>
+              <a:t>2 saltos (25 km)</a:t>
+            </a:r>
+            <a:pPr algn="ctr" indent="0" marL="0">
+              <a:buNone/>
+            </a:pPr>
+            <a:r>
+              <a:rPr lang="en-US" sz="3000" dirty="0">
+                <a:solidFill>
+                  <a:srgbClr val="6A7A72"/>
+                </a:solidFill>
+                <a:latin typeface="Courier New" pitchFamily="34" charset="0"/>
+                <a:ea typeface="Courier New" pitchFamily="34" charset="-122"/>
+                <a:cs typeface="Courier New" pitchFamily="34" charset="-120"/>
+              </a:rPr>
+              <a:t> = </a:t>
+            </a:r>
+            <a:pPr algn="ctr" indent="0" marL="0">
+              <a:buNone/>
+            </a:pPr>
+            <a:r>
+              <a:rPr lang="en-US" sz="3000" b="1" dirty="0">
+                <a:solidFill>
+                  <a:srgbClr val="1E4F3A"/>
+                </a:solidFill>
+                <a:latin typeface="Courier New" pitchFamily="34" charset="0"/>
+                <a:ea typeface="Courier New" pitchFamily="34" charset="-122"/>
+                <a:cs typeface="Courier New" pitchFamily="34" charset="-120"/>
+              </a:rPr>
+              <a:t>50 km</a:t>
+            </a:r>
+            <a:endParaRPr lang="en-US" sz="3000" dirty="0"/>
+          </a:p>
+        </p:txBody>
+      </p:sp>
+      <p:sp>
+        <p:nvSpPr>
+          <p:cNvPr id="7" name="Text 5"/>
+          <p:cNvSpPr/>
+          <p:nvPr/>
+        </p:nvSpPr>
+        <p:spPr>
+          <a:xfrm>
+            <a:off x="2560320" y="6400800"/>
+            <a:ext cx="13167360" cy="1097280"/>
           </a:xfrm>
           <a:prstGeom prst="rect">
             <a:avLst/>
@@ -9642,83 +9534,74 @@
           <a:bodyPr wrap="square" lIns="0" tIns="0" rIns="0" bIns="0" rtlCol="0" anchor="ctr"/>
           <a:lstStyle/>
           <a:p>
-            <a:pPr indent="0" marL="0">
-              <a:lnSpc>
-                <a:spcPct val="115000"/>
-              </a:lnSpc>
-              <a:buNone/>
-            </a:pPr>
-            <a:r>
-              <a:rPr lang="en-US" sz="2800" dirty="0">
-                <a:solidFill>
-                  <a:srgbClr val="E8EAF0"/>
+            <a:pPr algn="ctr" indent="0" marL="0">
+              <a:buNone/>
+            </a:pPr>
+            <a:r>
+              <a:rPr lang="en-US" sz="5000" dirty="0">
+                <a:solidFill>
+                  <a:srgbClr val="0F1D18"/>
+                </a:solidFill>
+                <a:latin typeface="Courier New" pitchFamily="34" charset="0"/>
+                <a:ea typeface="Courier New" pitchFamily="34" charset="-122"/>
+                <a:cs typeface="Courier New" pitchFamily="34" charset="-120"/>
+              </a:rPr>
+              <a:t>50 km ÷ 20 pedidos = </a:t>
+            </a:r>
+            <a:pPr algn="ctr" indent="0" marL="0">
+              <a:buNone/>
+            </a:pPr>
+            <a:r>
+              <a:rPr lang="en-US" sz="5000" b="1" dirty="0">
+                <a:solidFill>
+                  <a:srgbClr val="1E4F3A"/>
+                </a:solidFill>
+                <a:latin typeface="Courier New" pitchFamily="34" charset="0"/>
+                <a:ea typeface="Courier New" pitchFamily="34" charset="-122"/>
+                <a:cs typeface="Courier New" pitchFamily="34" charset="-120"/>
+              </a:rPr>
+              <a:t>2.5 km/pedido</a:t>
+            </a:r>
+            <a:endParaRPr lang="en-US" sz="5000" dirty="0"/>
+          </a:p>
+        </p:txBody>
+      </p:sp>
+      <p:sp>
+        <p:nvSpPr>
+          <p:cNvPr id="8" name="Text 6"/>
+          <p:cNvSpPr/>
+          <p:nvPr/>
+        </p:nvSpPr>
+        <p:spPr>
+          <a:xfrm>
+            <a:off x="1097280" y="8686800"/>
+            <a:ext cx="16093440" cy="731520"/>
+          </a:xfrm>
+          <a:prstGeom prst="rect">
+            <a:avLst/>
+          </a:prstGeom>
+          <a:noFill/>
+          <a:ln/>
+        </p:spPr>
+        <p:txBody>
+          <a:bodyPr wrap="square" lIns="0" tIns="0" rIns="0" bIns="0" rtlCol="0" anchor="ctr"/>
+          <a:lstStyle/>
+          <a:p>
+            <a:pPr algn="ctr" indent="0" marL="0">
+              <a:buNone/>
+            </a:pPr>
+            <a:r>
+              <a:rPr lang="en-US" sz="2500" i="1" dirty="0">
+                <a:solidFill>
+                  <a:srgbClr val="6A7A72"/>
                 </a:solidFill>
                 <a:latin typeface="Arial" pitchFamily="34" charset="0"/>
                 <a:ea typeface="Arial" pitchFamily="34" charset="-122"/>
                 <a:cs typeface="Arial" pitchFamily="34" charset="-120"/>
               </a:rPr>
-              <a:t>La herramienta calcula cada desplazamiento con el callejero real: curvas, rodeos, montaña. En zonas de interior la diferencia con la línea recta supera el 30%.</a:t>
-            </a:r>
-            <a:endParaRPr lang="en-US" sz="2800" dirty="0"/>
-          </a:p>
-        </p:txBody>
-      </p:sp>
-      <p:sp>
-        <p:nvSpPr>
-          <p:cNvPr id="15" name="Text 13"/>
-          <p:cNvSpPr/>
-          <p:nvPr/>
-        </p:nvSpPr>
-        <p:spPr>
-          <a:xfrm>
-            <a:off x="9601200" y="5943600"/>
-            <a:ext cx="7589520" cy="2743200"/>
-          </a:xfrm>
-          <a:prstGeom prst="rect">
-            <a:avLst/>
-          </a:prstGeom>
-          <a:noFill/>
-          <a:ln/>
-        </p:spPr>
-        <p:txBody>
-          <a:bodyPr wrap="square" lIns="0" tIns="0" rIns="0" bIns="0" rtlCol="0" anchor="ctr"/>
-          <a:lstStyle/>
-          <a:p>
-            <a:pPr indent="0" marL="0">
-              <a:lnSpc>
-                <a:spcPct val="115000"/>
-              </a:lnSpc>
-              <a:buNone/>
-            </a:pPr>
-            <a:r>
-              <a:rPr lang="en-US" sz="2700" b="1" dirty="0">
-                <a:solidFill>
-                  <a:srgbClr val="34D399"/>
-                </a:solidFill>
-                <a:latin typeface="Arial" pitchFamily="34" charset="0"/>
-                <a:ea typeface="Arial" pitchFamily="34" charset="-122"/>
-                <a:cs typeface="Arial" pitchFamily="34" charset="-120"/>
-              </a:rPr>
-              <a:t>Una sola regla de medir. </a:t>
-            </a:r>
-            <a:pPr indent="0" marL="0">
-              <a:lnSpc>
-                <a:spcPct val="115000"/>
-              </a:lnSpc>
-              <a:buNone/>
-            </a:pPr>
-            <a:r>
-              <a:rPr lang="en-US" sz="2700" dirty="0">
-                <a:solidFill>
-                  <a:srgbClr val="8B92A5"/>
-                </a:solidFill>
-                <a:latin typeface="Arial" pitchFamily="34" charset="0"/>
-                <a:ea typeface="Arial" pitchFamily="34" charset="-122"/>
-                <a:cs typeface="Arial" pitchFamily="34" charset="-120"/>
-              </a:rPr>
-              <a:t>El km/pedido de hoy, el baseline y el de los corredores salen todos de la misma función, con los mismos costes por carretera. Por eso son comparables sin trampa.</a:t>
-            </a:r>
-            <a:endParaRPr lang="en-US" sz="2700" dirty="0"/>
+              <a:t>Es el número del panel superior de la herramienta: la foto fiel de lo que el área recorre hoy por cada pedido.</a:t>
+            </a:r>
+            <a:endParaRPr lang="en-US" sz="2500" dirty="0"/>
           </a:p>
         </p:txBody>
       </p:sp>
@@ -9732,11 +9615,11 @@
 
 <file path=ppt/slides/slide19.xml><?xml version="1.0" encoding="utf-8"?>
 <p:sld xmlns:a="http://schemas.openxmlformats.org/drawingml/2006/main" xmlns:r="http://schemas.openxmlformats.org/officeDocument/2006/relationships" xmlns:p="http://schemas.openxmlformats.org/presentationml/2006/main">
-  <p:cSld name="Slide 5">
+  <p:cSld name="Slide 7">
     <p:bg>
       <p:bgPr>
         <a:solidFill>
-          <a:srgbClr val="0D0F14"/>
+          <a:srgbClr val="F4F1EA"/>
         </a:solidFill>
       </p:bgPr>
     </p:bg>
@@ -9781,13 +9664,13 @@
             <a:r>
               <a:rPr lang="en-US" sz="2400" spc="600" kern="0" dirty="0">
                 <a:solidFill>
-                  <a:srgbClr val="8B92A5"/>
+                  <a:srgbClr val="6A7A72"/>
                 </a:solidFill>
                 <a:latin typeface="Courier New" pitchFamily="34" charset="0"/>
                 <a:ea typeface="Courier New" pitchFamily="34" charset="-122"/>
                 <a:cs typeface="Courier New" pitchFamily="34" charset="-120"/>
               </a:rPr>
-              <a:t>04 · EL PUNTO DE PARTIDA</a:t>
+              <a:t>04 · EL MISMO DÍA, CON CORREDORES</a:t>
             </a:r>
             <a:endParaRPr lang="en-US" sz="2400" dirty="0"/>
           </a:p>
@@ -9820,13 +9703,13 @@
             <a:r>
               <a:rPr lang="en-US" sz="6000" b="1" dirty="0">
                 <a:solidFill>
-                  <a:srgbClr val="E8EAF0"/>
+                  <a:srgbClr val="0F1D18"/>
                 </a:solidFill>
                 <a:latin typeface="Arial" pitchFamily="34" charset="0"/>
                 <a:ea typeface="Arial" pitchFamily="34" charset="-122"/>
                 <a:cs typeface="Arial" pitchFamily="34" charset="-120"/>
               </a:rPr>
-              <a:t>Baseline: el km/pedido de hoy</a:t>
+              <a:t>Mismas paradas, sin cruces</a:t>
             </a:r>
             <a:endParaRPr lang="en-US" sz="6000" dirty="0"/>
           </a:p>
@@ -9834,14 +9717,157 @@
       </p:sp>
       <p:sp>
         <p:nvSpPr>
-          <p:cNvPr id="4" name="Text 2"/>
-          <p:cNvSpPr/>
-          <p:nvPr/>
-        </p:nvSpPr>
-        <p:spPr>
-          <a:xfrm>
-            <a:off x="1097280" y="2926080"/>
-            <a:ext cx="16093440" cy="1371600"/>
+          <p:cNvPr id="4" name="Shape 2"/>
+          <p:cNvSpPr/>
+          <p:nvPr/>
+        </p:nvSpPr>
+        <p:spPr>
+          <a:xfrm>
+            <a:off x="9784080" y="2834640"/>
+            <a:ext cx="7589520" cy="7040880"/>
+          </a:xfrm>
+          <a:prstGeom prst="roundRect">
+            <a:avLst>
+              <a:gd name="adj" fmla="val 1558"/>
+            </a:avLst>
+          </a:prstGeom>
+          <a:solidFill>
+            <a:srgbClr val="FBFAF5"/>
+          </a:solidFill>
+          <a:ln w="25400">
+            <a:solidFill>
+              <a:srgbClr val="CFC7B5"/>
+            </a:solidFill>
+            <a:prstDash val="solid"/>
+          </a:ln>
+        </p:spPr>
+      </p:sp>
+      <p:sp>
+        <p:nvSpPr>
+          <p:cNvPr id="5" name="Shape 3"/>
+          <p:cNvSpPr/>
+          <p:nvPr/>
+        </p:nvSpPr>
+        <p:spPr>
+          <a:xfrm>
+            <a:off x="10515600" y="3621024"/>
+            <a:ext cx="2651760" cy="2286000"/>
+          </a:xfrm>
+          <a:prstGeom prst="roundRect">
+            <a:avLst>
+              <a:gd name="adj" fmla="val 6400"/>
+            </a:avLst>
+          </a:prstGeom>
+          <a:solidFill>
+            <a:srgbClr val="0D0F14">
+              <a:alpha val="0"/>
+            </a:srgbClr>
+          </a:solidFill>
+          <a:ln w="25400">
+            <a:solidFill>
+              <a:srgbClr val="4D9DE0"/>
+            </a:solidFill>
+            <a:prstDash val="dash"/>
+          </a:ln>
+        </p:spPr>
+      </p:sp>
+      <p:sp>
+        <p:nvSpPr>
+          <p:cNvPr id="6" name="Shape 4"/>
+          <p:cNvSpPr/>
+          <p:nvPr/>
+        </p:nvSpPr>
+        <p:spPr>
+          <a:xfrm>
+            <a:off x="14081760" y="3621024"/>
+            <a:ext cx="2651760" cy="2286000"/>
+          </a:xfrm>
+          <a:prstGeom prst="roundRect">
+            <a:avLst>
+              <a:gd name="adj" fmla="val 6400"/>
+            </a:avLst>
+          </a:prstGeom>
+          <a:solidFill>
+            <a:srgbClr val="0D0F14">
+              <a:alpha val="0"/>
+            </a:srgbClr>
+          </a:solidFill>
+          <a:ln w="25400">
+            <a:solidFill>
+              <a:srgbClr val="2D7A55"/>
+            </a:solidFill>
+            <a:prstDash val="dash"/>
+          </a:ln>
+        </p:spPr>
+      </p:sp>
+      <p:sp>
+        <p:nvSpPr>
+          <p:cNvPr id="7" name="Shape 5"/>
+          <p:cNvSpPr/>
+          <p:nvPr/>
+        </p:nvSpPr>
+        <p:spPr>
+          <a:xfrm>
+            <a:off x="10515600" y="6455664"/>
+            <a:ext cx="2651760" cy="2286000"/>
+          </a:xfrm>
+          <a:prstGeom prst="roundRect">
+            <a:avLst>
+              <a:gd name="adj" fmla="val 6400"/>
+            </a:avLst>
+          </a:prstGeom>
+          <a:solidFill>
+            <a:srgbClr val="0D0F14">
+              <a:alpha val="0"/>
+            </a:srgbClr>
+          </a:solidFill>
+          <a:ln w="25400">
+            <a:solidFill>
+              <a:srgbClr val="4D9DE0"/>
+            </a:solidFill>
+            <a:prstDash val="dash"/>
+          </a:ln>
+        </p:spPr>
+      </p:sp>
+      <p:sp>
+        <p:nvSpPr>
+          <p:cNvPr id="8" name="Shape 6"/>
+          <p:cNvSpPr/>
+          <p:nvPr/>
+        </p:nvSpPr>
+        <p:spPr>
+          <a:xfrm>
+            <a:off x="14081760" y="6455664"/>
+            <a:ext cx="2651760" cy="2286000"/>
+          </a:xfrm>
+          <a:prstGeom prst="roundRect">
+            <a:avLst>
+              <a:gd name="adj" fmla="val 6400"/>
+            </a:avLst>
+          </a:prstGeom>
+          <a:solidFill>
+            <a:srgbClr val="0D0F14">
+              <a:alpha val="0"/>
+            </a:srgbClr>
+          </a:solidFill>
+          <a:ln w="25400">
+            <a:solidFill>
+              <a:srgbClr val="2D7A55"/>
+            </a:solidFill>
+            <a:prstDash val="dash"/>
+          </a:ln>
+        </p:spPr>
+      </p:sp>
+      <p:sp>
+        <p:nvSpPr>
+          <p:cNvPr id="9" name="Text 7"/>
+          <p:cNvSpPr/>
+          <p:nvPr/>
+        </p:nvSpPr>
+        <p:spPr>
+          <a:xfrm>
+            <a:off x="10515600" y="3145536"/>
+            <a:ext cx="2651760" cy="402336"/>
           </a:xfrm>
           <a:prstGeom prst="rect">
             <a:avLst/>
@@ -9853,49 +9879,306 @@
           <a:bodyPr wrap="square" lIns="0" tIns="0" rIns="0" bIns="0" rtlCol="0" anchor="ctr"/>
           <a:lstStyle/>
           <a:p>
-            <a:pPr indent="0" marL="0">
-              <a:lnSpc>
-                <a:spcPct val="112000"/>
-              </a:lnSpc>
-              <a:buNone/>
-            </a:pPr>
-            <a:r>
-              <a:rPr lang="en-US" sz="2900" dirty="0">
-                <a:solidFill>
-                  <a:srgbClr val="8B92A5"/>
+            <a:pPr algn="ctr" indent="0" marL="0">
+              <a:buNone/>
+            </a:pPr>
+            <a:r>
+              <a:rPr lang="en-US" sz="2000" dirty="0">
+                <a:solidFill>
+                  <a:srgbClr val="6A7A72"/>
+                </a:solidFill>
+                <a:latin typeface="Courier New" pitchFamily="34" charset="0"/>
+                <a:ea typeface="Courier New" pitchFamily="34" charset="-122"/>
+                <a:cs typeface="Courier New" pitchFamily="34" charset="-120"/>
+              </a:rPr>
+              <a:t>28001</a:t>
+            </a:r>
+            <a:endParaRPr lang="en-US" sz="2000" dirty="0"/>
+          </a:p>
+        </p:txBody>
+      </p:sp>
+      <p:sp>
+        <p:nvSpPr>
+          <p:cNvPr id="10" name="Text 8"/>
+          <p:cNvSpPr/>
+          <p:nvPr/>
+        </p:nvSpPr>
+        <p:spPr>
+          <a:xfrm>
+            <a:off x="14081760" y="3145536"/>
+            <a:ext cx="2651760" cy="402336"/>
+          </a:xfrm>
+          <a:prstGeom prst="rect">
+            <a:avLst/>
+          </a:prstGeom>
+          <a:noFill/>
+          <a:ln/>
+        </p:spPr>
+        <p:txBody>
+          <a:bodyPr wrap="square" lIns="0" tIns="0" rIns="0" bIns="0" rtlCol="0" anchor="ctr"/>
+          <a:lstStyle/>
+          <a:p>
+            <a:pPr algn="ctr" indent="0" marL="0">
+              <a:buNone/>
+            </a:pPr>
+            <a:r>
+              <a:rPr lang="en-US" sz="2000" dirty="0">
+                <a:solidFill>
+                  <a:srgbClr val="6A7A72"/>
+                </a:solidFill>
+                <a:latin typeface="Courier New" pitchFamily="34" charset="0"/>
+                <a:ea typeface="Courier New" pitchFamily="34" charset="-122"/>
+                <a:cs typeface="Courier New" pitchFamily="34" charset="-120"/>
+              </a:rPr>
+              <a:t>28010</a:t>
+            </a:r>
+            <a:endParaRPr lang="en-US" sz="2000" dirty="0"/>
+          </a:p>
+        </p:txBody>
+      </p:sp>
+      <p:sp>
+        <p:nvSpPr>
+          <p:cNvPr id="11" name="Text 9"/>
+          <p:cNvSpPr/>
+          <p:nvPr/>
+        </p:nvSpPr>
+        <p:spPr>
+          <a:xfrm>
+            <a:off x="10515600" y="8778240"/>
+            <a:ext cx="2651760" cy="402336"/>
+          </a:xfrm>
+          <a:prstGeom prst="rect">
+            <a:avLst/>
+          </a:prstGeom>
+          <a:noFill/>
+          <a:ln/>
+        </p:spPr>
+        <p:txBody>
+          <a:bodyPr wrap="square" lIns="0" tIns="0" rIns="0" bIns="0" rtlCol="0" anchor="ctr"/>
+          <a:lstStyle/>
+          <a:p>
+            <a:pPr algn="ctr" indent="0" marL="0">
+              <a:buNone/>
+            </a:pPr>
+            <a:r>
+              <a:rPr lang="en-US" sz="2000" dirty="0">
+                <a:solidFill>
+                  <a:srgbClr val="6A7A72"/>
+                </a:solidFill>
+                <a:latin typeface="Courier New" pitchFamily="34" charset="0"/>
+                <a:ea typeface="Courier New" pitchFamily="34" charset="-122"/>
+                <a:cs typeface="Courier New" pitchFamily="34" charset="-120"/>
+              </a:rPr>
+              <a:t>28002</a:t>
+            </a:r>
+            <a:endParaRPr lang="en-US" sz="2000" dirty="0"/>
+          </a:p>
+        </p:txBody>
+      </p:sp>
+      <p:sp>
+        <p:nvSpPr>
+          <p:cNvPr id="12" name="Text 10"/>
+          <p:cNvSpPr/>
+          <p:nvPr/>
+        </p:nvSpPr>
+        <p:spPr>
+          <a:xfrm>
+            <a:off x="14081760" y="8778240"/>
+            <a:ext cx="2651760" cy="402336"/>
+          </a:xfrm>
+          <a:prstGeom prst="rect">
+            <a:avLst/>
+          </a:prstGeom>
+          <a:noFill/>
+          <a:ln/>
+        </p:spPr>
+        <p:txBody>
+          <a:bodyPr wrap="square" lIns="0" tIns="0" rIns="0" bIns="0" rtlCol="0" anchor="ctr"/>
+          <a:lstStyle/>
+          <a:p>
+            <a:pPr algn="ctr" indent="0" marL="0">
+              <a:buNone/>
+            </a:pPr>
+            <a:r>
+              <a:rPr lang="en-US" sz="2000" dirty="0">
+                <a:solidFill>
+                  <a:srgbClr val="6A7A72"/>
+                </a:solidFill>
+                <a:latin typeface="Courier New" pitchFamily="34" charset="0"/>
+                <a:ea typeface="Courier New" pitchFamily="34" charset="-122"/>
+                <a:cs typeface="Courier New" pitchFamily="34" charset="-120"/>
+              </a:rPr>
+              <a:t>28011</a:t>
+            </a:r>
+            <a:endParaRPr lang="en-US" sz="2000" dirty="0"/>
+          </a:p>
+        </p:txBody>
+      </p:sp>
+      <p:sp>
+        <p:nvSpPr>
+          <p:cNvPr id="13" name="Shape 11"/>
+          <p:cNvSpPr/>
+          <p:nvPr/>
+        </p:nvSpPr>
+        <p:spPr>
+          <a:xfrm>
+            <a:off x="13624560" y="3529584"/>
+            <a:ext cx="1828" cy="5303520"/>
+          </a:xfrm>
+          <a:prstGeom prst="line">
+            <a:avLst/>
+          </a:prstGeom>
+          <a:noFill/>
+          <a:ln w="25400">
+            <a:solidFill>
+              <a:srgbClr val="6A7A72"/>
+            </a:solidFill>
+            <a:prstDash val="sysDot"/>
+          </a:ln>
+        </p:spPr>
+      </p:sp>
+      <p:sp>
+        <p:nvSpPr>
+          <p:cNvPr id="14" name="Shape 12"/>
+          <p:cNvSpPr/>
+          <p:nvPr/>
+        </p:nvSpPr>
+        <p:spPr>
+          <a:xfrm flipV="1">
+            <a:off x="12124944" y="4169664"/>
+            <a:ext cx="2377440" cy="36576"/>
+          </a:xfrm>
+          <a:prstGeom prst="line">
+            <a:avLst/>
+          </a:prstGeom>
+          <a:noFill/>
+          <a:ln w="31750">
+            <a:solidFill>
+              <a:srgbClr val="6A7A72"/>
+            </a:solidFill>
+            <a:prstDash val="dash"/>
+          </a:ln>
+        </p:spPr>
+      </p:sp>
+      <p:sp>
+        <p:nvSpPr>
+          <p:cNvPr id="15" name="Shape 13"/>
+          <p:cNvSpPr/>
+          <p:nvPr/>
+        </p:nvSpPr>
+        <p:spPr>
+          <a:xfrm flipV="1">
+            <a:off x="11887200" y="7004304"/>
+            <a:ext cx="2560320" cy="1408176"/>
+          </a:xfrm>
+          <a:prstGeom prst="line">
+            <a:avLst/>
+          </a:prstGeom>
+          <a:noFill/>
+          <a:ln w="31750">
+            <a:solidFill>
+              <a:srgbClr val="6A7A72"/>
+            </a:solidFill>
+            <a:prstDash val="dash"/>
+          </a:ln>
+        </p:spPr>
+      </p:sp>
+      <p:sp>
+        <p:nvSpPr>
+          <p:cNvPr id="16" name="Text 14"/>
+          <p:cNvSpPr/>
+          <p:nvPr/>
+        </p:nvSpPr>
+        <p:spPr>
+          <a:xfrm>
+            <a:off x="13075920" y="3913632"/>
+            <a:ext cx="548640" cy="548640"/>
+          </a:xfrm>
+          <a:prstGeom prst="rect">
+            <a:avLst/>
+          </a:prstGeom>
+          <a:noFill/>
+          <a:ln/>
+        </p:spPr>
+        <p:txBody>
+          <a:bodyPr wrap="square" lIns="0" tIns="0" rIns="0" bIns="0" rtlCol="0" anchor="ctr"/>
+          <a:lstStyle/>
+          <a:p>
+            <a:pPr algn="ctr" indent="0" marL="0">
+              <a:buNone/>
+            </a:pPr>
+            <a:r>
+              <a:rPr lang="en-US" sz="2800" b="1" dirty="0">
+                <a:solidFill>
+                  <a:srgbClr val="C1432E"/>
                 </a:solidFill>
                 <a:latin typeface="Arial" pitchFamily="34" charset="0"/>
                 <a:ea typeface="Arial" pitchFamily="34" charset="-122"/>
                 <a:cs typeface="Arial" pitchFamily="34" charset="-120"/>
               </a:rPr>
-              <a:t>Todos los km son lo mismo: distancias entre pedidos consecutivos, medidas por carretera. En el ejemplo hay 16 desplazamientos; 14 son cortos y 2 son los saltos. El baseline los suma todos y divide entre los pedidos.</a:t>
-            </a:r>
-            <a:endParaRPr lang="en-US" sz="2900" dirty="0"/>
-          </a:p>
-        </p:txBody>
-      </p:sp>
-      <p:sp>
-        <p:nvSpPr>
-          <p:cNvPr id="5" name="Shape 3"/>
-          <p:cNvSpPr/>
-          <p:nvPr/>
-        </p:nvSpPr>
-        <p:spPr>
-          <a:xfrm>
-            <a:off x="2011680" y="4754880"/>
-            <a:ext cx="14264640" cy="3291840"/>
-          </a:xfrm>
-          <a:prstGeom prst="roundRect">
-            <a:avLst>
-              <a:gd name="adj" fmla="val 3333"/>
-            </a:avLst>
-          </a:prstGeom>
-          <a:solidFill>
-            <a:srgbClr val="1B2130"/>
-          </a:solidFill>
-          <a:ln w="25400">
+              <a:t>×</a:t>
+            </a:r>
+            <a:endParaRPr lang="en-US" sz="2800" dirty="0"/>
+          </a:p>
+        </p:txBody>
+      </p:sp>
+      <p:sp>
+        <p:nvSpPr>
+          <p:cNvPr id="17" name="Text 15"/>
+          <p:cNvSpPr/>
+          <p:nvPr/>
+        </p:nvSpPr>
+        <p:spPr>
+          <a:xfrm>
+            <a:off x="12929616" y="7388352"/>
+            <a:ext cx="548640" cy="548640"/>
+          </a:xfrm>
+          <a:prstGeom prst="rect">
+            <a:avLst/>
+          </a:prstGeom>
+          <a:noFill/>
+          <a:ln/>
+        </p:spPr>
+        <p:txBody>
+          <a:bodyPr wrap="square" lIns="0" tIns="0" rIns="0" bIns="0" rtlCol="0" anchor="ctr"/>
+          <a:lstStyle/>
+          <a:p>
+            <a:pPr algn="ctr" indent="0" marL="0">
+              <a:buNone/>
+            </a:pPr>
+            <a:r>
+              <a:rPr lang="en-US" sz="2800" b="1" dirty="0">
+                <a:solidFill>
+                  <a:srgbClr val="C1432E"/>
+                </a:solidFill>
+                <a:latin typeface="Arial" pitchFamily="34" charset="0"/>
+                <a:ea typeface="Arial" pitchFamily="34" charset="-122"/>
+                <a:cs typeface="Arial" pitchFamily="34" charset="-120"/>
+              </a:rPr>
+              <a:t>×</a:t>
+            </a:r>
+            <a:endParaRPr lang="en-US" sz="2800" dirty="0"/>
+          </a:p>
+        </p:txBody>
+      </p:sp>
+      <p:sp>
+        <p:nvSpPr>
+          <p:cNvPr id="18" name="Shape 16"/>
+          <p:cNvSpPr/>
+          <p:nvPr/>
+        </p:nvSpPr>
+        <p:spPr>
+          <a:xfrm>
+            <a:off x="10917936" y="4133088"/>
+            <a:ext cx="146304" cy="731520"/>
+          </a:xfrm>
+          <a:prstGeom prst="line">
+            <a:avLst/>
+          </a:prstGeom>
+          <a:noFill/>
+          <a:ln w="57150">
             <a:solidFill>
-              <a:srgbClr val="2A3040"/>
+              <a:srgbClr val="4D9DE0"/>
             </a:solidFill>
             <a:prstDash val="solid"/>
           </a:ln>
@@ -9903,14 +10186,813 @@
       </p:sp>
       <p:sp>
         <p:nvSpPr>
-          <p:cNvPr id="6" name="Text 4"/>
-          <p:cNvSpPr/>
-          <p:nvPr/>
-        </p:nvSpPr>
-        <p:spPr>
-          <a:xfrm>
-            <a:off x="2560320" y="5303520"/>
-            <a:ext cx="13167360" cy="822960"/>
+          <p:cNvPr id="19" name="Shape 17"/>
+          <p:cNvSpPr/>
+          <p:nvPr/>
+        </p:nvSpPr>
+        <p:spPr>
+          <a:xfrm flipH="1">
+            <a:off x="10972800" y="4864608"/>
+            <a:ext cx="91440" cy="2011680"/>
+          </a:xfrm>
+          <a:prstGeom prst="line">
+            <a:avLst/>
+          </a:prstGeom>
+          <a:noFill/>
+          <a:ln w="57150">
+            <a:solidFill>
+              <a:srgbClr val="4D9DE0"/>
+            </a:solidFill>
+            <a:prstDash val="solid"/>
+          </a:ln>
+        </p:spPr>
+      </p:sp>
+      <p:sp>
+        <p:nvSpPr>
+          <p:cNvPr id="20" name="Shape 18"/>
+          <p:cNvSpPr/>
+          <p:nvPr/>
+        </p:nvSpPr>
+        <p:spPr>
+          <a:xfrm>
+            <a:off x="10972800" y="6876288"/>
+            <a:ext cx="146304" cy="768096"/>
+          </a:xfrm>
+          <a:prstGeom prst="line">
+            <a:avLst/>
+          </a:prstGeom>
+          <a:noFill/>
+          <a:ln w="57150">
+            <a:solidFill>
+              <a:srgbClr val="4D9DE0"/>
+            </a:solidFill>
+            <a:prstDash val="solid"/>
+          </a:ln>
+        </p:spPr>
+      </p:sp>
+      <p:sp>
+        <p:nvSpPr>
+          <p:cNvPr id="21" name="Shape 19"/>
+          <p:cNvSpPr/>
+          <p:nvPr/>
+        </p:nvSpPr>
+        <p:spPr>
+          <a:xfrm>
+            <a:off x="11649456" y="7918704"/>
+            <a:ext cx="237744" cy="493776"/>
+          </a:xfrm>
+          <a:prstGeom prst="line">
+            <a:avLst/>
+          </a:prstGeom>
+          <a:noFill/>
+          <a:ln w="57150">
+            <a:solidFill>
+              <a:srgbClr val="EFA13B"/>
+            </a:solidFill>
+            <a:prstDash val="solid"/>
+          </a:ln>
+        </p:spPr>
+      </p:sp>
+      <p:sp>
+        <p:nvSpPr>
+          <p:cNvPr id="22" name="Shape 20"/>
+          <p:cNvSpPr/>
+          <p:nvPr/>
+        </p:nvSpPr>
+        <p:spPr>
+          <a:xfrm flipH="1" flipV="1">
+            <a:off x="12124944" y="7370064"/>
+            <a:ext cx="128016" cy="914400"/>
+          </a:xfrm>
+          <a:prstGeom prst="line">
+            <a:avLst/>
+          </a:prstGeom>
+          <a:noFill/>
+          <a:ln w="57150">
+            <a:solidFill>
+              <a:srgbClr val="8B83E8"/>
+            </a:solidFill>
+            <a:prstDash val="solid"/>
+          </a:ln>
+        </p:spPr>
+      </p:sp>
+      <p:sp>
+        <p:nvSpPr>
+          <p:cNvPr id="23" name="Shape 21"/>
+          <p:cNvSpPr/>
+          <p:nvPr/>
+        </p:nvSpPr>
+        <p:spPr>
+          <a:xfrm flipV="1">
+            <a:off x="12124944" y="5266944"/>
+            <a:ext cx="128016" cy="2103120"/>
+          </a:xfrm>
+          <a:prstGeom prst="line">
+            <a:avLst/>
+          </a:prstGeom>
+          <a:noFill/>
+          <a:ln w="57150">
+            <a:solidFill>
+              <a:srgbClr val="8B83E8"/>
+            </a:solidFill>
+            <a:prstDash val="solid"/>
+          </a:ln>
+        </p:spPr>
+      </p:sp>
+      <p:sp>
+        <p:nvSpPr>
+          <p:cNvPr id="24" name="Shape 22"/>
+          <p:cNvSpPr/>
+          <p:nvPr/>
+        </p:nvSpPr>
+        <p:spPr>
+          <a:xfrm flipH="1" flipV="1">
+            <a:off x="12124944" y="4206240"/>
+            <a:ext cx="128016" cy="1060704"/>
+          </a:xfrm>
+          <a:prstGeom prst="line">
+            <a:avLst/>
+          </a:prstGeom>
+          <a:noFill/>
+          <a:ln w="57150">
+            <a:solidFill>
+              <a:srgbClr val="8B83E8"/>
+            </a:solidFill>
+            <a:prstDash val="solid"/>
+          </a:ln>
+        </p:spPr>
+      </p:sp>
+      <p:sp>
+        <p:nvSpPr>
+          <p:cNvPr id="25" name="Shape 23"/>
+          <p:cNvSpPr/>
+          <p:nvPr/>
+        </p:nvSpPr>
+        <p:spPr>
+          <a:xfrm>
+            <a:off x="14502384" y="4169664"/>
+            <a:ext cx="402336" cy="694944"/>
+          </a:xfrm>
+          <a:prstGeom prst="line">
+            <a:avLst/>
+          </a:prstGeom>
+          <a:noFill/>
+          <a:ln w="57150">
+            <a:solidFill>
+              <a:srgbClr val="8B83E8"/>
+            </a:solidFill>
+            <a:prstDash val="solid"/>
+          </a:ln>
+        </p:spPr>
+      </p:sp>
+      <p:sp>
+        <p:nvSpPr>
+          <p:cNvPr id="26" name="Shape 24"/>
+          <p:cNvSpPr/>
+          <p:nvPr/>
+        </p:nvSpPr>
+        <p:spPr>
+          <a:xfrm flipH="1">
+            <a:off x="15416784" y="5175504"/>
+            <a:ext cx="182880" cy="548640"/>
+          </a:xfrm>
+          <a:prstGeom prst="line">
+            <a:avLst/>
+          </a:prstGeom>
+          <a:noFill/>
+          <a:ln w="57150">
+            <a:solidFill>
+              <a:srgbClr val="DE6488"/>
+            </a:solidFill>
+            <a:prstDash val="solid"/>
+          </a:ln>
+        </p:spPr>
+      </p:sp>
+      <p:sp>
+        <p:nvSpPr>
+          <p:cNvPr id="27" name="Shape 25"/>
+          <p:cNvSpPr/>
+          <p:nvPr/>
+        </p:nvSpPr>
+        <p:spPr>
+          <a:xfrm>
+            <a:off x="15416784" y="5724144"/>
+            <a:ext cx="219456" cy="1280160"/>
+          </a:xfrm>
+          <a:prstGeom prst="line">
+            <a:avLst/>
+          </a:prstGeom>
+          <a:noFill/>
+          <a:ln w="57150">
+            <a:solidFill>
+              <a:srgbClr val="DE6488"/>
+            </a:solidFill>
+            <a:prstDash val="solid"/>
+          </a:ln>
+        </p:spPr>
+      </p:sp>
+      <p:sp>
+        <p:nvSpPr>
+          <p:cNvPr id="28" name="Shape 26"/>
+          <p:cNvSpPr/>
+          <p:nvPr/>
+        </p:nvSpPr>
+        <p:spPr>
+          <a:xfrm flipH="1">
+            <a:off x="15453360" y="7004304"/>
+            <a:ext cx="182880" cy="822960"/>
+          </a:xfrm>
+          <a:prstGeom prst="line">
+            <a:avLst/>
+          </a:prstGeom>
+          <a:noFill/>
+          <a:ln w="57150">
+            <a:solidFill>
+              <a:srgbClr val="DE6488"/>
+            </a:solidFill>
+            <a:prstDash val="solid"/>
+          </a:ln>
+        </p:spPr>
+      </p:sp>
+      <p:sp>
+        <p:nvSpPr>
+          <p:cNvPr id="29" name="Shape 27"/>
+          <p:cNvSpPr/>
+          <p:nvPr/>
+        </p:nvSpPr>
+        <p:spPr>
+          <a:xfrm>
+            <a:off x="15453360" y="7827264"/>
+            <a:ext cx="329184" cy="585216"/>
+          </a:xfrm>
+          <a:prstGeom prst="line">
+            <a:avLst/>
+          </a:prstGeom>
+          <a:noFill/>
+          <a:ln w="57150">
+            <a:solidFill>
+              <a:srgbClr val="DE6488"/>
+            </a:solidFill>
+            <a:prstDash val="solid"/>
+          </a:ln>
+        </p:spPr>
+      </p:sp>
+      <p:sp>
+        <p:nvSpPr>
+          <p:cNvPr id="30" name="Shape 28"/>
+          <p:cNvSpPr/>
+          <p:nvPr/>
+        </p:nvSpPr>
+        <p:spPr>
+          <a:xfrm>
+            <a:off x="14447520" y="7004304"/>
+            <a:ext cx="310896" cy="731520"/>
+          </a:xfrm>
+          <a:prstGeom prst="line">
+            <a:avLst/>
+          </a:prstGeom>
+          <a:noFill/>
+          <a:ln w="57150">
+            <a:solidFill>
+              <a:srgbClr val="EFA13B"/>
+            </a:solidFill>
+            <a:prstDash val="solid"/>
+          </a:ln>
+        </p:spPr>
+      </p:sp>
+      <p:sp>
+        <p:nvSpPr>
+          <p:cNvPr id="31" name="Shape 29"/>
+          <p:cNvSpPr/>
+          <p:nvPr/>
+        </p:nvSpPr>
+        <p:spPr>
+          <a:xfrm>
+            <a:off x="14758416" y="7735824"/>
+            <a:ext cx="329184" cy="640080"/>
+          </a:xfrm>
+          <a:prstGeom prst="line">
+            <a:avLst/>
+          </a:prstGeom>
+          <a:noFill/>
+          <a:ln w="57150">
+            <a:solidFill>
+              <a:srgbClr val="EFA13B"/>
+            </a:solidFill>
+            <a:prstDash val="solid"/>
+          </a:ln>
+        </p:spPr>
+      </p:sp>
+      <p:sp>
+        <p:nvSpPr>
+          <p:cNvPr id="32" name="Shape 30"/>
+          <p:cNvSpPr/>
+          <p:nvPr/>
+        </p:nvSpPr>
+        <p:spPr>
+          <a:xfrm>
+            <a:off x="10817352" y="4032504"/>
+            <a:ext cx="201168" cy="201168"/>
+          </a:xfrm>
+          <a:prstGeom prst="ellipse">
+            <a:avLst/>
+          </a:prstGeom>
+          <a:solidFill>
+            <a:srgbClr val="4D9DE0"/>
+          </a:solidFill>
+          <a:ln w="19050">
+            <a:solidFill>
+              <a:srgbClr val="0D0F14"/>
+            </a:solidFill>
+            <a:prstDash val="solid"/>
+          </a:ln>
+        </p:spPr>
+      </p:sp>
+      <p:sp>
+        <p:nvSpPr>
+          <p:cNvPr id="33" name="Shape 31"/>
+          <p:cNvSpPr/>
+          <p:nvPr/>
+        </p:nvSpPr>
+        <p:spPr>
+          <a:xfrm>
+            <a:off x="10963656" y="4764024"/>
+            <a:ext cx="201168" cy="201168"/>
+          </a:xfrm>
+          <a:prstGeom prst="ellipse">
+            <a:avLst/>
+          </a:prstGeom>
+          <a:solidFill>
+            <a:srgbClr val="4D9DE0"/>
+          </a:solidFill>
+          <a:ln w="19050">
+            <a:solidFill>
+              <a:srgbClr val="0D0F14"/>
+            </a:solidFill>
+            <a:prstDash val="solid"/>
+          </a:ln>
+        </p:spPr>
+      </p:sp>
+      <p:sp>
+        <p:nvSpPr>
+          <p:cNvPr id="34" name="Shape 32"/>
+          <p:cNvSpPr/>
+          <p:nvPr/>
+        </p:nvSpPr>
+        <p:spPr>
+          <a:xfrm>
+            <a:off x="10872216" y="6775704"/>
+            <a:ext cx="201168" cy="201168"/>
+          </a:xfrm>
+          <a:prstGeom prst="ellipse">
+            <a:avLst/>
+          </a:prstGeom>
+          <a:solidFill>
+            <a:srgbClr val="4D9DE0"/>
+          </a:solidFill>
+          <a:ln w="19050">
+            <a:solidFill>
+              <a:srgbClr val="0D0F14"/>
+            </a:solidFill>
+            <a:prstDash val="solid"/>
+          </a:ln>
+        </p:spPr>
+      </p:sp>
+      <p:sp>
+        <p:nvSpPr>
+          <p:cNvPr id="35" name="Shape 33"/>
+          <p:cNvSpPr/>
+          <p:nvPr/>
+        </p:nvSpPr>
+        <p:spPr>
+          <a:xfrm>
+            <a:off x="11018520" y="7543800"/>
+            <a:ext cx="201168" cy="201168"/>
+          </a:xfrm>
+          <a:prstGeom prst="ellipse">
+            <a:avLst/>
+          </a:prstGeom>
+          <a:solidFill>
+            <a:srgbClr val="4D9DE0"/>
+          </a:solidFill>
+          <a:ln w="19050">
+            <a:solidFill>
+              <a:srgbClr val="0D0F14"/>
+            </a:solidFill>
+            <a:prstDash val="solid"/>
+          </a:ln>
+        </p:spPr>
+      </p:sp>
+      <p:sp>
+        <p:nvSpPr>
+          <p:cNvPr id="36" name="Shape 34"/>
+          <p:cNvSpPr/>
+          <p:nvPr/>
+        </p:nvSpPr>
+        <p:spPr>
+          <a:xfrm>
+            <a:off x="11548872" y="7818120"/>
+            <a:ext cx="201168" cy="201168"/>
+          </a:xfrm>
+          <a:prstGeom prst="ellipse">
+            <a:avLst/>
+          </a:prstGeom>
+          <a:solidFill>
+            <a:srgbClr val="EFA13B"/>
+          </a:solidFill>
+          <a:ln w="19050">
+            <a:solidFill>
+              <a:srgbClr val="0D0F14"/>
+            </a:solidFill>
+            <a:prstDash val="solid"/>
+          </a:ln>
+        </p:spPr>
+      </p:sp>
+      <p:sp>
+        <p:nvSpPr>
+          <p:cNvPr id="37" name="Shape 35"/>
+          <p:cNvSpPr/>
+          <p:nvPr/>
+        </p:nvSpPr>
+        <p:spPr>
+          <a:xfrm>
+            <a:off x="11786616" y="8311896"/>
+            <a:ext cx="201168" cy="201168"/>
+          </a:xfrm>
+          <a:prstGeom prst="ellipse">
+            <a:avLst/>
+          </a:prstGeom>
+          <a:solidFill>
+            <a:srgbClr val="EFA13B"/>
+          </a:solidFill>
+          <a:ln w="19050">
+            <a:solidFill>
+              <a:srgbClr val="0D0F14"/>
+            </a:solidFill>
+            <a:prstDash val="solid"/>
+          </a:ln>
+        </p:spPr>
+      </p:sp>
+      <p:sp>
+        <p:nvSpPr>
+          <p:cNvPr id="38" name="Shape 36"/>
+          <p:cNvSpPr/>
+          <p:nvPr/>
+        </p:nvSpPr>
+        <p:spPr>
+          <a:xfrm>
+            <a:off x="12152376" y="8183880"/>
+            <a:ext cx="201168" cy="201168"/>
+          </a:xfrm>
+          <a:prstGeom prst="ellipse">
+            <a:avLst/>
+          </a:prstGeom>
+          <a:solidFill>
+            <a:srgbClr val="8B83E8"/>
+          </a:solidFill>
+          <a:ln w="19050">
+            <a:solidFill>
+              <a:srgbClr val="0D0F14"/>
+            </a:solidFill>
+            <a:prstDash val="solid"/>
+          </a:ln>
+        </p:spPr>
+      </p:sp>
+      <p:sp>
+        <p:nvSpPr>
+          <p:cNvPr id="39" name="Shape 37"/>
+          <p:cNvSpPr/>
+          <p:nvPr/>
+        </p:nvSpPr>
+        <p:spPr>
+          <a:xfrm>
+            <a:off x="12024360" y="7269480"/>
+            <a:ext cx="201168" cy="201168"/>
+          </a:xfrm>
+          <a:prstGeom prst="ellipse">
+            <a:avLst/>
+          </a:prstGeom>
+          <a:solidFill>
+            <a:srgbClr val="8B83E8"/>
+          </a:solidFill>
+          <a:ln w="19050">
+            <a:solidFill>
+              <a:srgbClr val="0D0F14"/>
+            </a:solidFill>
+            <a:prstDash val="solid"/>
+          </a:ln>
+        </p:spPr>
+      </p:sp>
+      <p:sp>
+        <p:nvSpPr>
+          <p:cNvPr id="40" name="Shape 38"/>
+          <p:cNvSpPr/>
+          <p:nvPr/>
+        </p:nvSpPr>
+        <p:spPr>
+          <a:xfrm>
+            <a:off x="12152376" y="5166360"/>
+            <a:ext cx="201168" cy="201168"/>
+          </a:xfrm>
+          <a:prstGeom prst="ellipse">
+            <a:avLst/>
+          </a:prstGeom>
+          <a:solidFill>
+            <a:srgbClr val="8B83E8"/>
+          </a:solidFill>
+          <a:ln w="19050">
+            <a:solidFill>
+              <a:srgbClr val="0D0F14"/>
+            </a:solidFill>
+            <a:prstDash val="solid"/>
+          </a:ln>
+        </p:spPr>
+      </p:sp>
+      <p:sp>
+        <p:nvSpPr>
+          <p:cNvPr id="41" name="Shape 39"/>
+          <p:cNvSpPr/>
+          <p:nvPr/>
+        </p:nvSpPr>
+        <p:spPr>
+          <a:xfrm>
+            <a:off x="12024360" y="4105656"/>
+            <a:ext cx="201168" cy="201168"/>
+          </a:xfrm>
+          <a:prstGeom prst="ellipse">
+            <a:avLst/>
+          </a:prstGeom>
+          <a:solidFill>
+            <a:srgbClr val="8B83E8"/>
+          </a:solidFill>
+          <a:ln w="19050">
+            <a:solidFill>
+              <a:srgbClr val="0D0F14"/>
+            </a:solidFill>
+            <a:prstDash val="solid"/>
+          </a:ln>
+        </p:spPr>
+      </p:sp>
+      <p:sp>
+        <p:nvSpPr>
+          <p:cNvPr id="42" name="Shape 40"/>
+          <p:cNvSpPr/>
+          <p:nvPr/>
+        </p:nvSpPr>
+        <p:spPr>
+          <a:xfrm>
+            <a:off x="14401800" y="4069080"/>
+            <a:ext cx="201168" cy="201168"/>
+          </a:xfrm>
+          <a:prstGeom prst="ellipse">
+            <a:avLst/>
+          </a:prstGeom>
+          <a:solidFill>
+            <a:srgbClr val="8B83E8"/>
+          </a:solidFill>
+          <a:ln w="19050">
+            <a:solidFill>
+              <a:srgbClr val="0D0F14"/>
+            </a:solidFill>
+            <a:prstDash val="solid"/>
+          </a:ln>
+        </p:spPr>
+      </p:sp>
+      <p:sp>
+        <p:nvSpPr>
+          <p:cNvPr id="43" name="Shape 41"/>
+          <p:cNvSpPr/>
+          <p:nvPr/>
+        </p:nvSpPr>
+        <p:spPr>
+          <a:xfrm>
+            <a:off x="14804136" y="4764024"/>
+            <a:ext cx="201168" cy="201168"/>
+          </a:xfrm>
+          <a:prstGeom prst="ellipse">
+            <a:avLst/>
+          </a:prstGeom>
+          <a:solidFill>
+            <a:srgbClr val="8B83E8"/>
+          </a:solidFill>
+          <a:ln w="19050">
+            <a:solidFill>
+              <a:srgbClr val="0D0F14"/>
+            </a:solidFill>
+            <a:prstDash val="solid"/>
+          </a:ln>
+        </p:spPr>
+      </p:sp>
+      <p:sp>
+        <p:nvSpPr>
+          <p:cNvPr id="44" name="Shape 42"/>
+          <p:cNvSpPr/>
+          <p:nvPr/>
+        </p:nvSpPr>
+        <p:spPr>
+          <a:xfrm>
+            <a:off x="14346936" y="6903720"/>
+            <a:ext cx="201168" cy="201168"/>
+          </a:xfrm>
+          <a:prstGeom prst="ellipse">
+            <a:avLst/>
+          </a:prstGeom>
+          <a:solidFill>
+            <a:srgbClr val="EFA13B"/>
+          </a:solidFill>
+          <a:ln w="19050">
+            <a:solidFill>
+              <a:srgbClr val="0D0F14"/>
+            </a:solidFill>
+            <a:prstDash val="solid"/>
+          </a:ln>
+        </p:spPr>
+      </p:sp>
+      <p:sp>
+        <p:nvSpPr>
+          <p:cNvPr id="45" name="Shape 43"/>
+          <p:cNvSpPr/>
+          <p:nvPr/>
+        </p:nvSpPr>
+        <p:spPr>
+          <a:xfrm>
+            <a:off x="14657832" y="7635240"/>
+            <a:ext cx="201168" cy="201168"/>
+          </a:xfrm>
+          <a:prstGeom prst="ellipse">
+            <a:avLst/>
+          </a:prstGeom>
+          <a:solidFill>
+            <a:srgbClr val="EFA13B"/>
+          </a:solidFill>
+          <a:ln w="19050">
+            <a:solidFill>
+              <a:srgbClr val="0D0F14"/>
+            </a:solidFill>
+            <a:prstDash val="solid"/>
+          </a:ln>
+        </p:spPr>
+      </p:sp>
+      <p:sp>
+        <p:nvSpPr>
+          <p:cNvPr id="46" name="Shape 44"/>
+          <p:cNvSpPr/>
+          <p:nvPr/>
+        </p:nvSpPr>
+        <p:spPr>
+          <a:xfrm>
+            <a:off x="14987016" y="8275320"/>
+            <a:ext cx="201168" cy="201168"/>
+          </a:xfrm>
+          <a:prstGeom prst="ellipse">
+            <a:avLst/>
+          </a:prstGeom>
+          <a:solidFill>
+            <a:srgbClr val="EFA13B"/>
+          </a:solidFill>
+          <a:ln w="19050">
+            <a:solidFill>
+              <a:srgbClr val="0D0F14"/>
+            </a:solidFill>
+            <a:prstDash val="solid"/>
+          </a:ln>
+        </p:spPr>
+      </p:sp>
+      <p:sp>
+        <p:nvSpPr>
+          <p:cNvPr id="47" name="Shape 45"/>
+          <p:cNvSpPr/>
+          <p:nvPr/>
+        </p:nvSpPr>
+        <p:spPr>
+          <a:xfrm>
+            <a:off x="15499080" y="5074920"/>
+            <a:ext cx="201168" cy="201168"/>
+          </a:xfrm>
+          <a:prstGeom prst="ellipse">
+            <a:avLst/>
+          </a:prstGeom>
+          <a:solidFill>
+            <a:srgbClr val="DE6488"/>
+          </a:solidFill>
+          <a:ln w="19050">
+            <a:solidFill>
+              <a:srgbClr val="0D0F14"/>
+            </a:solidFill>
+            <a:prstDash val="solid"/>
+          </a:ln>
+        </p:spPr>
+      </p:sp>
+      <p:sp>
+        <p:nvSpPr>
+          <p:cNvPr id="48" name="Shape 46"/>
+          <p:cNvSpPr/>
+          <p:nvPr/>
+        </p:nvSpPr>
+        <p:spPr>
+          <a:xfrm>
+            <a:off x="15316200" y="5623560"/>
+            <a:ext cx="201168" cy="201168"/>
+          </a:xfrm>
+          <a:prstGeom prst="ellipse">
+            <a:avLst/>
+          </a:prstGeom>
+          <a:solidFill>
+            <a:srgbClr val="DE6488"/>
+          </a:solidFill>
+          <a:ln w="19050">
+            <a:solidFill>
+              <a:srgbClr val="0D0F14"/>
+            </a:solidFill>
+            <a:prstDash val="solid"/>
+          </a:ln>
+        </p:spPr>
+      </p:sp>
+      <p:sp>
+        <p:nvSpPr>
+          <p:cNvPr id="49" name="Shape 47"/>
+          <p:cNvSpPr/>
+          <p:nvPr/>
+        </p:nvSpPr>
+        <p:spPr>
+          <a:xfrm>
+            <a:off x="15535656" y="6903720"/>
+            <a:ext cx="201168" cy="201168"/>
+          </a:xfrm>
+          <a:prstGeom prst="ellipse">
+            <a:avLst/>
+          </a:prstGeom>
+          <a:solidFill>
+            <a:srgbClr val="DE6488"/>
+          </a:solidFill>
+          <a:ln w="19050">
+            <a:solidFill>
+              <a:srgbClr val="0D0F14"/>
+            </a:solidFill>
+            <a:prstDash val="solid"/>
+          </a:ln>
+        </p:spPr>
+      </p:sp>
+      <p:sp>
+        <p:nvSpPr>
+          <p:cNvPr id="50" name="Shape 48"/>
+          <p:cNvSpPr/>
+          <p:nvPr/>
+        </p:nvSpPr>
+        <p:spPr>
+          <a:xfrm>
+            <a:off x="15352776" y="7726680"/>
+            <a:ext cx="201168" cy="201168"/>
+          </a:xfrm>
+          <a:prstGeom prst="ellipse">
+            <a:avLst/>
+          </a:prstGeom>
+          <a:solidFill>
+            <a:srgbClr val="DE6488"/>
+          </a:solidFill>
+          <a:ln w="19050">
+            <a:solidFill>
+              <a:srgbClr val="0D0F14"/>
+            </a:solidFill>
+            <a:prstDash val="solid"/>
+          </a:ln>
+        </p:spPr>
+      </p:sp>
+      <p:sp>
+        <p:nvSpPr>
+          <p:cNvPr id="51" name="Shape 49"/>
+          <p:cNvSpPr/>
+          <p:nvPr/>
+        </p:nvSpPr>
+        <p:spPr>
+          <a:xfrm>
+            <a:off x="15681960" y="8311896"/>
+            <a:ext cx="201168" cy="201168"/>
+          </a:xfrm>
+          <a:prstGeom prst="ellipse">
+            <a:avLst/>
+          </a:prstGeom>
+          <a:solidFill>
+            <a:srgbClr val="DE6488"/>
+          </a:solidFill>
+          <a:ln w="19050">
+            <a:solidFill>
+              <a:srgbClr val="0D0F14"/>
+            </a:solidFill>
+            <a:prstDash val="solid"/>
+          </a:ln>
+        </p:spPr>
+      </p:sp>
+      <p:sp>
+        <p:nvSpPr>
+          <p:cNvPr id="52" name="Text 50"/>
+          <p:cNvSpPr/>
+          <p:nvPr/>
+        </p:nvSpPr>
+        <p:spPr>
+          <a:xfrm>
+            <a:off x="1097280" y="3200400"/>
+            <a:ext cx="7863840" cy="3383280"/>
           </a:xfrm>
           <a:prstGeom prst="rect">
             <a:avLst/>
@@ -9922,90 +11004,156 @@
           <a:bodyPr wrap="square" lIns="0" tIns="0" rIns="0" bIns="0" rtlCol="0" anchor="ctr"/>
           <a:lstStyle/>
           <a:p>
-            <a:pPr algn="ctr" indent="0" marL="0">
-              <a:buNone/>
-            </a:pPr>
-            <a:r>
-              <a:rPr lang="en-US" sz="3000" b="1" dirty="0">
-                <a:solidFill>
-                  <a:srgbClr val="E8EAF0"/>
+            <a:pPr indent="0" marL="0">
+              <a:lnSpc>
+                <a:spcPct val="113000"/>
+              </a:lnSpc>
+              <a:buNone/>
+            </a:pPr>
+            <a:r>
+              <a:rPr lang="en-US" sz="2700" b="1" dirty="0">
+                <a:solidFill>
+                  <a:srgbClr val="0F1D18"/>
+                </a:solidFill>
+                <a:latin typeface="Arial" pitchFamily="34" charset="0"/>
+                <a:ea typeface="Arial" pitchFamily="34" charset="-122"/>
+                <a:cs typeface="Arial" pitchFamily="34" charset="-120"/>
+              </a:rPr>
+              <a:t>Las 20 paradas y sus desplazamientos cortos no cambian. </a:t>
+            </a:r>
+            <a:endParaRPr lang="en-US" sz="2700" dirty="0"/>
+          </a:p>
+          <a:p>
+            <a:pPr indent="0" marL="0">
+              <a:lnSpc>
+                <a:spcPct val="113000"/>
+              </a:lnSpc>
+              <a:buNone/>
+            </a:pPr>
+            <a:endParaRPr lang="en-US" sz="2700" dirty="0"/>
+          </a:p>
+          <a:p>
+            <a:pPr indent="0" marL="0">
+              <a:lnSpc>
+                <a:spcPct val="113000"/>
+              </a:lnSpc>
+              <a:buNone/>
+            </a:pPr>
+            <a:r>
+              <a:rPr lang="en-US" sz="2700" dirty="0">
+                <a:solidFill>
+                  <a:srgbClr val="6A7A72"/>
+                </a:solidFill>
+                <a:latin typeface="Arial" pitchFamily="34" charset="0"/>
+                <a:ea typeface="Arial" pitchFamily="34" charset="-122"/>
+                <a:cs typeface="Arial" pitchFamily="34" charset="-120"/>
+              </a:rPr>
+              <a:t>El corredor solo quita de la cuenta los dos saltos: nadie tiene que cruzar la frontera para entregar. Cómo se organizan las rutas de cada día dentro de su corredor lo sigue decidiendo la operación, como siempre.</a:t>
+            </a:r>
+            <a:endParaRPr lang="en-US" sz="2700" dirty="0"/>
+          </a:p>
+        </p:txBody>
+      </p:sp>
+      <p:sp>
+        <p:nvSpPr>
+          <p:cNvPr id="53" name="Shape 51"/>
+          <p:cNvSpPr/>
+          <p:nvPr/>
+        </p:nvSpPr>
+        <p:spPr>
+          <a:xfrm>
+            <a:off x="1097280" y="7022592"/>
+            <a:ext cx="6949440" cy="1828"/>
+          </a:xfrm>
+          <a:prstGeom prst="line">
+            <a:avLst/>
+          </a:prstGeom>
+          <a:noFill/>
+          <a:ln w="25400">
+            <a:solidFill>
+              <a:srgbClr val="CFC7B5"/>
+            </a:solidFill>
+            <a:prstDash val="solid"/>
+          </a:ln>
+        </p:spPr>
+      </p:sp>
+      <p:sp>
+        <p:nvSpPr>
+          <p:cNvPr id="54" name="Text 52"/>
+          <p:cNvSpPr/>
+          <p:nvPr/>
+        </p:nvSpPr>
+        <p:spPr>
+          <a:xfrm>
+            <a:off x="1097280" y="7315200"/>
+            <a:ext cx="7863840" cy="914400"/>
+          </a:xfrm>
+          <a:prstGeom prst="rect">
+            <a:avLst/>
+          </a:prstGeom>
+          <a:noFill/>
+          <a:ln/>
+        </p:spPr>
+        <p:txBody>
+          <a:bodyPr wrap="square" lIns="0" tIns="0" rIns="0" bIns="0" rtlCol="0" anchor="ctr"/>
+          <a:lstStyle/>
+          <a:p>
+            <a:pPr indent="0" marL="0">
+              <a:buNone/>
+            </a:pPr>
+            <a:r>
+              <a:rPr lang="en-US" sz="4200" dirty="0">
+                <a:solidFill>
+                  <a:srgbClr val="0F1D18"/>
                 </a:solidFill>
                 <a:latin typeface="Courier New" pitchFamily="34" charset="0"/>
                 <a:ea typeface="Courier New" pitchFamily="34" charset="-122"/>
                 <a:cs typeface="Courier New" pitchFamily="34" charset="-120"/>
               </a:rPr>
-              <a:t>14 desplaz. cortos (25 km)</a:t>
-            </a:r>
-            <a:pPr algn="ctr" indent="0" marL="0">
-              <a:buNone/>
-            </a:pPr>
-            <a:r>
-              <a:rPr lang="en-US" sz="3000" dirty="0">
-                <a:solidFill>
-                  <a:srgbClr val="8B92A5"/>
+              <a:t>50 − 25</a:t>
+            </a:r>
+            <a:pPr indent="0" marL="0">
+              <a:buNone/>
+            </a:pPr>
+            <a:r>
+              <a:rPr lang="en-US" sz="2600" dirty="0">
+                <a:solidFill>
+                  <a:srgbClr val="C1432E"/>
                 </a:solidFill>
                 <a:latin typeface="Courier New" pitchFamily="34" charset="0"/>
                 <a:ea typeface="Courier New" pitchFamily="34" charset="-122"/>
                 <a:cs typeface="Courier New" pitchFamily="34" charset="-120"/>
               </a:rPr>
-              <a:t> + </a:t>
-            </a:r>
-            <a:pPr algn="ctr" indent="0" marL="0">
-              <a:buNone/>
-            </a:pPr>
-            <a:r>
-              <a:rPr lang="en-US" sz="3000" b="1" dirty="0">
-                <a:solidFill>
-                  <a:srgbClr val="E8554D"/>
+              <a:t> saltos </a:t>
+            </a:r>
+            <a:pPr indent="0" marL="0">
+              <a:buNone/>
+            </a:pPr>
+            <a:r>
+              <a:rPr lang="en-US" sz="4200" b="1" dirty="0">
+                <a:solidFill>
+                  <a:srgbClr val="2D7A55"/>
                 </a:solidFill>
                 <a:latin typeface="Courier New" pitchFamily="34" charset="0"/>
                 <a:ea typeface="Courier New" pitchFamily="34" charset="-122"/>
                 <a:cs typeface="Courier New" pitchFamily="34" charset="-120"/>
               </a:rPr>
-              <a:t>2 saltos (25 km)</a:t>
-            </a:r>
-            <a:pPr algn="ctr" indent="0" marL="0">
-              <a:buNone/>
-            </a:pPr>
-            <a:r>
-              <a:rPr lang="en-US" sz="3000" dirty="0">
-                <a:solidFill>
-                  <a:srgbClr val="8B92A5"/>
-                </a:solidFill>
-                <a:latin typeface="Courier New" pitchFamily="34" charset="0"/>
-                <a:ea typeface="Courier New" pitchFamily="34" charset="-122"/>
-                <a:cs typeface="Courier New" pitchFamily="34" charset="-120"/>
-              </a:rPr>
-              <a:t> = </a:t>
-            </a:r>
-            <a:pPr algn="ctr" indent="0" marL="0">
-              <a:buNone/>
-            </a:pPr>
-            <a:r>
-              <a:rPr lang="en-US" sz="3000" b="1" dirty="0">
-                <a:solidFill>
-                  <a:srgbClr val="F97316"/>
-                </a:solidFill>
-                <a:latin typeface="Courier New" pitchFamily="34" charset="0"/>
-                <a:ea typeface="Courier New" pitchFamily="34" charset="-122"/>
-                <a:cs typeface="Courier New" pitchFamily="34" charset="-120"/>
-              </a:rPr>
-              <a:t>50 km</a:t>
-            </a:r>
-            <a:endParaRPr lang="en-US" sz="3000" dirty="0"/>
-          </a:p>
-        </p:txBody>
-      </p:sp>
-      <p:sp>
-        <p:nvSpPr>
-          <p:cNvPr id="7" name="Text 5"/>
-          <p:cNvSpPr/>
-          <p:nvPr/>
-        </p:nvSpPr>
-        <p:spPr>
-          <a:xfrm>
-            <a:off x="2560320" y="6400800"/>
-            <a:ext cx="13167360" cy="1097280"/>
+              <a:t>= 25 km</a:t>
+            </a:r>
+            <a:endParaRPr lang="en-US" sz="4200" dirty="0"/>
+          </a:p>
+        </p:txBody>
+      </p:sp>
+      <p:sp>
+        <p:nvSpPr>
+          <p:cNvPr id="55" name="Text 53"/>
+          <p:cNvSpPr/>
+          <p:nvPr/>
+        </p:nvSpPr>
+        <p:spPr>
+          <a:xfrm>
+            <a:off x="1097280" y="8412480"/>
+            <a:ext cx="7863840" cy="1005840"/>
           </a:xfrm>
           <a:prstGeom prst="rect">
             <a:avLst/>
@@ -10017,72 +11165,19 @@
           <a:bodyPr wrap="square" lIns="0" tIns="0" rIns="0" bIns="0" rtlCol="0" anchor="ctr"/>
           <a:lstStyle/>
           <a:p>
-            <a:pPr algn="ctr" indent="0" marL="0">
-              <a:buNone/>
-            </a:pPr>
-            <a:r>
-              <a:rPr lang="en-US" sz="5000" dirty="0">
-                <a:solidFill>
-                  <a:srgbClr val="E8EAF0"/>
-                </a:solidFill>
-                <a:latin typeface="Courier New" pitchFamily="34" charset="0"/>
-                <a:ea typeface="Courier New" pitchFamily="34" charset="-122"/>
-                <a:cs typeface="Courier New" pitchFamily="34" charset="-120"/>
-              </a:rPr>
-              <a:t>50 km ÷ 20 pedidos = </a:t>
-            </a:r>
-            <a:pPr algn="ctr" indent="0" marL="0">
-              <a:buNone/>
-            </a:pPr>
-            <a:r>
-              <a:rPr lang="en-US" sz="5000" b="1" dirty="0">
-                <a:solidFill>
-                  <a:srgbClr val="F97316"/>
-                </a:solidFill>
-                <a:latin typeface="Courier New" pitchFamily="34" charset="0"/>
-                <a:ea typeface="Courier New" pitchFamily="34" charset="-122"/>
-                <a:cs typeface="Courier New" pitchFamily="34" charset="-120"/>
-              </a:rPr>
-              <a:t>2.5 km/pedido</a:t>
-            </a:r>
-            <a:endParaRPr lang="en-US" sz="5000" dirty="0"/>
-          </a:p>
-        </p:txBody>
-      </p:sp>
-      <p:sp>
-        <p:nvSpPr>
-          <p:cNvPr id="8" name="Text 6"/>
-          <p:cNvSpPr/>
-          <p:nvPr/>
-        </p:nvSpPr>
-        <p:spPr>
-          <a:xfrm>
-            <a:off x="1097280" y="8686800"/>
-            <a:ext cx="16093440" cy="731520"/>
-          </a:xfrm>
-          <a:prstGeom prst="rect">
-            <a:avLst/>
-          </a:prstGeom>
-          <a:noFill/>
-          <a:ln/>
-        </p:spPr>
-        <p:txBody>
-          <a:bodyPr wrap="square" lIns="0" tIns="0" rIns="0" bIns="0" rtlCol="0" anchor="ctr"/>
-          <a:lstStyle/>
-          <a:p>
-            <a:pPr algn="ctr" indent="0" marL="0">
+            <a:pPr indent="0" marL="0">
               <a:buNone/>
             </a:pPr>
             <a:r>
               <a:rPr lang="en-US" sz="2500" i="1" dirty="0">
                 <a:solidFill>
-                  <a:srgbClr val="8B92A5"/>
+                  <a:srgbClr val="6A7A72"/>
                 </a:solidFill>
                 <a:latin typeface="Arial" pitchFamily="34" charset="0"/>
                 <a:ea typeface="Arial" pitchFamily="34" charset="-122"/>
                 <a:cs typeface="Arial" pitchFamily="34" charset="-120"/>
               </a:rPr>
-              <a:t>Es el número del panel superior de la herramienta: la foto fiel de lo que el área recorre hoy por cada pedido.</a:t>
+              <a:t>los dos tramos rojos desaparecen del día; nadie vuelve a recorrerlos</a:t>
             </a:r>
             <a:endParaRPr lang="en-US" sz="2500" dirty="0"/>
           </a:p>
@@ -10592,11 +11687,11 @@
 
 <file path=ppt/slides/slide20.xml><?xml version="1.0" encoding="utf-8"?>
 <p:sld xmlns:a="http://schemas.openxmlformats.org/drawingml/2006/main" xmlns:r="http://schemas.openxmlformats.org/officeDocument/2006/relationships" xmlns:p="http://schemas.openxmlformats.org/presentationml/2006/main">
-  <p:cSld name="Slide 6">
+  <p:cSld name="Slide 8">
     <p:bg>
       <p:bgPr>
         <a:solidFill>
-          <a:srgbClr val="0D0F14"/>
+          <a:srgbClr val="F4F1EA"/>
         </a:solidFill>
       </p:bgPr>
     </p:bg>
@@ -10641,13 +11736,13 @@
             <a:r>
               <a:rPr lang="en-US" sz="2400" spc="600" kern="0" dirty="0">
                 <a:solidFill>
-                  <a:srgbClr val="8B92A5"/>
+                  <a:srgbClr val="6A7A72"/>
                 </a:solidFill>
                 <a:latin typeface="Courier New" pitchFamily="34" charset="0"/>
                 <a:ea typeface="Courier New" pitchFamily="34" charset="-122"/>
                 <a:cs typeface="Courier New" pitchFamily="34" charset="-120"/>
               </a:rPr>
-              <a:t>05 · LA PROPUESTA</a:t>
+              <a:t>05 · LA MEJORA</a:t>
             </a:r>
             <a:endParaRPr lang="en-US" sz="2400" dirty="0"/>
           </a:p>
@@ -10680,13 +11775,13 @@
             <a:r>
               <a:rPr lang="en-US" sz="6000" b="1" dirty="0">
                 <a:solidFill>
-                  <a:srgbClr val="E8EAF0"/>
+                  <a:srgbClr val="0F1D18"/>
                 </a:solidFill>
                 <a:latin typeface="Arial" pitchFamily="34" charset="0"/>
                 <a:ea typeface="Arial" pitchFamily="34" charset="-122"/>
                 <a:cs typeface="Arial" pitchFamily="34" charset="-120"/>
               </a:rPr>
-              <a:t>Cómo se trazan los corredores</a:t>
+              <a:t>El km/pedido se queda en la mitad</a:t>
             </a:r>
             <a:endParaRPr lang="en-US" sz="6000" dirty="0"/>
           </a:p>
@@ -10700,20 +11795,20 @@
         </p:nvSpPr>
         <p:spPr>
           <a:xfrm>
-            <a:off x="10149840" y="2651760"/>
-            <a:ext cx="7132320" cy="6766560"/>
+            <a:off x="1097280" y="3108960"/>
+            <a:ext cx="9326880" cy="6035040"/>
           </a:xfrm>
           <a:prstGeom prst="roundRect">
             <a:avLst>
-              <a:gd name="adj" fmla="val 1622"/>
+              <a:gd name="adj" fmla="val 1818"/>
             </a:avLst>
           </a:prstGeom>
           <a:solidFill>
-            <a:srgbClr val="161B26"/>
+            <a:srgbClr val="ECE7DC"/>
           </a:solidFill>
           <a:ln w="25400">
             <a:solidFill>
-              <a:srgbClr val="2A3040"/>
+              <a:srgbClr val="CFC7B5"/>
             </a:solidFill>
             <a:prstDash val="solid"/>
           </a:ln>
@@ -10721,122 +11816,14 @@
       </p:sp>
       <p:sp>
         <p:nvSpPr>
-          <p:cNvPr id="5" name="Shape 3"/>
-          <p:cNvSpPr/>
-          <p:nvPr/>
-        </p:nvSpPr>
-        <p:spPr>
-          <a:xfrm>
-            <a:off x="10881360" y="3383280"/>
-            <a:ext cx="2468880" cy="2103120"/>
-          </a:xfrm>
-          <a:prstGeom prst="roundRect">
-            <a:avLst>
-              <a:gd name="adj" fmla="val 6957"/>
-            </a:avLst>
-          </a:prstGeom>
-          <a:solidFill>
-            <a:srgbClr val="12273B"/>
-          </a:solidFill>
-          <a:ln w="31750">
-            <a:solidFill>
-              <a:srgbClr val="4D9DE0"/>
-            </a:solidFill>
-            <a:prstDash val="dash"/>
-          </a:ln>
-        </p:spPr>
-      </p:sp>
-      <p:sp>
-        <p:nvSpPr>
-          <p:cNvPr id="6" name="Shape 4"/>
-          <p:cNvSpPr/>
-          <p:nvPr/>
-        </p:nvSpPr>
-        <p:spPr>
-          <a:xfrm>
-            <a:off x="10881360" y="6126480"/>
-            <a:ext cx="2468880" cy="2103120"/>
-          </a:xfrm>
-          <a:prstGeom prst="roundRect">
-            <a:avLst>
-              <a:gd name="adj" fmla="val 6957"/>
-            </a:avLst>
-          </a:prstGeom>
-          <a:solidFill>
-            <a:srgbClr val="12273B"/>
-          </a:solidFill>
-          <a:ln w="31750">
-            <a:solidFill>
-              <a:srgbClr val="4D9DE0"/>
-            </a:solidFill>
-            <a:prstDash val="dash"/>
-          </a:ln>
-        </p:spPr>
-      </p:sp>
-      <p:sp>
-        <p:nvSpPr>
-          <p:cNvPr id="7" name="Shape 5"/>
-          <p:cNvSpPr/>
-          <p:nvPr/>
-        </p:nvSpPr>
-        <p:spPr>
-          <a:xfrm>
-            <a:off x="14173200" y="3383280"/>
-            <a:ext cx="2468880" cy="2103120"/>
-          </a:xfrm>
-          <a:prstGeom prst="roundRect">
-            <a:avLst>
-              <a:gd name="adj" fmla="val 6957"/>
-            </a:avLst>
-          </a:prstGeom>
-          <a:solidFill>
-            <a:srgbClr val="0F2B26"/>
-          </a:solidFill>
-          <a:ln w="31750">
-            <a:solidFill>
-              <a:srgbClr val="2DD4BF"/>
-            </a:solidFill>
-            <a:prstDash val="dash"/>
-          </a:ln>
-        </p:spPr>
-      </p:sp>
-      <p:sp>
-        <p:nvSpPr>
-          <p:cNvPr id="8" name="Shape 6"/>
-          <p:cNvSpPr/>
-          <p:nvPr/>
-        </p:nvSpPr>
-        <p:spPr>
-          <a:xfrm>
-            <a:off x="14173200" y="6126480"/>
-            <a:ext cx="2468880" cy="2103120"/>
-          </a:xfrm>
-          <a:prstGeom prst="roundRect">
-            <a:avLst>
-              <a:gd name="adj" fmla="val 6957"/>
-            </a:avLst>
-          </a:prstGeom>
-          <a:solidFill>
-            <a:srgbClr val="0F2B26"/>
-          </a:solidFill>
-          <a:ln w="31750">
-            <a:solidFill>
-              <a:srgbClr val="2DD4BF"/>
-            </a:solidFill>
-            <a:prstDash val="dash"/>
-          </a:ln>
-        </p:spPr>
-      </p:sp>
-      <p:sp>
-        <p:nvSpPr>
-          <p:cNvPr id="9" name="Text 7"/>
-          <p:cNvSpPr/>
-          <p:nvPr/>
-        </p:nvSpPr>
-        <p:spPr>
-          <a:xfrm>
-            <a:off x="10881360" y="4151376"/>
-            <a:ext cx="2468880" cy="548640"/>
+          <p:cNvPr id="5" name="Text 3"/>
+          <p:cNvSpPr/>
+          <p:nvPr/>
+        </p:nvSpPr>
+        <p:spPr>
+          <a:xfrm>
+            <a:off x="1554480" y="3566160"/>
+            <a:ext cx="8412480" cy="914400"/>
           </a:xfrm>
           <a:prstGeom prst="rect">
             <a:avLst/>
@@ -10848,73 +11835,48 @@
           <a:bodyPr wrap="square" lIns="0" tIns="0" rIns="0" bIns="0" rtlCol="0" anchor="ctr"/>
           <a:lstStyle/>
           <a:p>
-            <a:pPr algn="ctr" indent="0" marL="0">
-              <a:buNone/>
-            </a:pPr>
-            <a:r>
-              <a:rPr lang="en-US" sz="2400" dirty="0">
-                <a:solidFill>
-                  <a:srgbClr val="E8EAF0"/>
+            <a:pPr indent="0" marL="0">
+              <a:buNone/>
+            </a:pPr>
+            <a:r>
+              <a:rPr lang="en-US" sz="3800" dirty="0">
+                <a:solidFill>
+                  <a:srgbClr val="0F1D18"/>
                 </a:solidFill>
                 <a:latin typeface="Courier New" pitchFamily="34" charset="0"/>
                 <a:ea typeface="Courier New" pitchFamily="34" charset="-122"/>
                 <a:cs typeface="Courier New" pitchFamily="34" charset="-120"/>
               </a:rPr>
-              <a:t>28001</a:t>
-            </a:r>
-            <a:endParaRPr lang="en-US" sz="2400" dirty="0"/>
-          </a:p>
-        </p:txBody>
-      </p:sp>
-      <p:sp>
-        <p:nvSpPr>
-          <p:cNvPr id="10" name="Text 8"/>
-          <p:cNvSpPr/>
-          <p:nvPr/>
-        </p:nvSpPr>
-        <p:spPr>
-          <a:xfrm>
-            <a:off x="10881360" y="6894576"/>
-            <a:ext cx="2468880" cy="548640"/>
-          </a:xfrm>
-          <a:prstGeom prst="rect">
-            <a:avLst/>
-          </a:prstGeom>
-          <a:noFill/>
-          <a:ln/>
-        </p:spPr>
-        <p:txBody>
-          <a:bodyPr wrap="square" lIns="0" tIns="0" rIns="0" bIns="0" rtlCol="0" anchor="ctr"/>
-          <a:lstStyle/>
-          <a:p>
-            <a:pPr algn="ctr" indent="0" marL="0">
-              <a:buNone/>
-            </a:pPr>
-            <a:r>
-              <a:rPr lang="en-US" sz="2400" dirty="0">
-                <a:solidFill>
-                  <a:srgbClr val="E8EAF0"/>
+              <a:t>25 km ÷ 20 pedidos = </a:t>
+            </a:r>
+            <a:pPr indent="0" marL="0">
+              <a:buNone/>
+            </a:pPr>
+            <a:r>
+              <a:rPr lang="en-US" sz="3800" b="1" dirty="0">
+                <a:solidFill>
+                  <a:srgbClr val="2D7A55"/>
                 </a:solidFill>
                 <a:latin typeface="Courier New" pitchFamily="34" charset="0"/>
                 <a:ea typeface="Courier New" pitchFamily="34" charset="-122"/>
                 <a:cs typeface="Courier New" pitchFamily="34" charset="-120"/>
               </a:rPr>
-              <a:t>28002</a:t>
-            </a:r>
-            <a:endParaRPr lang="en-US" sz="2400" dirty="0"/>
-          </a:p>
-        </p:txBody>
-      </p:sp>
-      <p:sp>
-        <p:nvSpPr>
-          <p:cNvPr id="11" name="Text 9"/>
-          <p:cNvSpPr/>
-          <p:nvPr/>
-        </p:nvSpPr>
-        <p:spPr>
-          <a:xfrm>
-            <a:off x="14173200" y="4151376"/>
-            <a:ext cx="2468880" cy="548640"/>
+              <a:t>1.25 km/ped</a:t>
+            </a:r>
+            <a:endParaRPr lang="en-US" sz="3800" dirty="0"/>
+          </a:p>
+        </p:txBody>
+      </p:sp>
+      <p:sp>
+        <p:nvSpPr>
+          <p:cNvPr id="6" name="Text 4"/>
+          <p:cNvSpPr/>
+          <p:nvPr/>
+        </p:nvSpPr>
+        <p:spPr>
+          <a:xfrm>
+            <a:off x="1554480" y="5029200"/>
+            <a:ext cx="1828800" cy="548640"/>
           </a:xfrm>
           <a:prstGeom prst="rect">
             <a:avLst/>
@@ -10926,34 +11888,95 @@
           <a:bodyPr wrap="square" lIns="0" tIns="0" rIns="0" bIns="0" rtlCol="0" anchor="ctr"/>
           <a:lstStyle/>
           <a:p>
-            <a:pPr algn="ctr" indent="0" marL="0">
-              <a:buNone/>
-            </a:pPr>
-            <a:r>
-              <a:rPr lang="en-US" sz="2400" dirty="0">
-                <a:solidFill>
-                  <a:srgbClr val="E8EAF0"/>
+            <a:pPr indent="0" marL="0">
+              <a:buNone/>
+            </a:pPr>
+            <a:r>
+              <a:rPr lang="en-US" sz="2500" dirty="0">
+                <a:solidFill>
+                  <a:srgbClr val="6A7A72"/>
+                </a:solidFill>
+                <a:latin typeface="Arial" pitchFamily="34" charset="0"/>
+                <a:ea typeface="Arial" pitchFamily="34" charset="-122"/>
+                <a:cs typeface="Arial" pitchFamily="34" charset="-120"/>
+              </a:rPr>
+              <a:t>Hoy</a:t>
+            </a:r>
+            <a:endParaRPr lang="en-US" sz="2500" dirty="0"/>
+          </a:p>
+        </p:txBody>
+      </p:sp>
+      <p:sp>
+        <p:nvSpPr>
+          <p:cNvPr id="7" name="Shape 5"/>
+          <p:cNvSpPr/>
+          <p:nvPr/>
+        </p:nvSpPr>
+        <p:spPr>
+          <a:xfrm>
+            <a:off x="3383280" y="5010912"/>
+            <a:ext cx="6217920" cy="658368"/>
+          </a:xfrm>
+          <a:prstGeom prst="roundRect">
+            <a:avLst>
+              <a:gd name="adj" fmla="val 13889"/>
+            </a:avLst>
+          </a:prstGeom>
+          <a:solidFill>
+            <a:srgbClr val="CFC7B5"/>
+          </a:solidFill>
+          <a:ln/>
+        </p:spPr>
+      </p:sp>
+      <p:sp>
+        <p:nvSpPr>
+          <p:cNvPr id="8" name="Text 6"/>
+          <p:cNvSpPr/>
+          <p:nvPr/>
+        </p:nvSpPr>
+        <p:spPr>
+          <a:xfrm>
+            <a:off x="3383280" y="5010912"/>
+            <a:ext cx="6035040" cy="658368"/>
+          </a:xfrm>
+          <a:prstGeom prst="rect">
+            <a:avLst/>
+          </a:prstGeom>
+          <a:noFill/>
+          <a:ln/>
+        </p:spPr>
+        <p:txBody>
+          <a:bodyPr wrap="square" lIns="0" tIns="0" rIns="0" bIns="0" rtlCol="0" anchor="ctr"/>
+          <a:lstStyle/>
+          <a:p>
+            <a:pPr algn="r" indent="0" marL="0">
+              <a:buNone/>
+            </a:pPr>
+            <a:r>
+              <a:rPr lang="en-US" sz="2600" b="1" dirty="0">
+                <a:solidFill>
+                  <a:srgbClr val="0D0F14"/>
                 </a:solidFill>
                 <a:latin typeface="Courier New" pitchFamily="34" charset="0"/>
                 <a:ea typeface="Courier New" pitchFamily="34" charset="-122"/>
                 <a:cs typeface="Courier New" pitchFamily="34" charset="-120"/>
               </a:rPr>
-              <a:t>28010</a:t>
-            </a:r>
-            <a:endParaRPr lang="en-US" sz="2400" dirty="0"/>
-          </a:p>
-        </p:txBody>
-      </p:sp>
-      <p:sp>
-        <p:nvSpPr>
-          <p:cNvPr id="12" name="Text 10"/>
-          <p:cNvSpPr/>
-          <p:nvPr/>
-        </p:nvSpPr>
-        <p:spPr>
-          <a:xfrm>
-            <a:off x="14173200" y="6894576"/>
-            <a:ext cx="2468880" cy="548640"/>
+              <a:t>2.5</a:t>
+            </a:r>
+            <a:endParaRPr lang="en-US" sz="2600" dirty="0"/>
+          </a:p>
+        </p:txBody>
+      </p:sp>
+      <p:sp>
+        <p:nvSpPr>
+          <p:cNvPr id="9" name="Text 7"/>
+          <p:cNvSpPr/>
+          <p:nvPr/>
+        </p:nvSpPr>
+        <p:spPr>
+          <a:xfrm>
+            <a:off x="1554480" y="6071616"/>
+            <a:ext cx="1828800" cy="548640"/>
           </a:xfrm>
           <a:prstGeom prst="rect">
             <a:avLst/>
@@ -10965,21 +11988,124 @@
           <a:bodyPr wrap="square" lIns="0" tIns="0" rIns="0" bIns="0" rtlCol="0" anchor="ctr"/>
           <a:lstStyle/>
           <a:p>
-            <a:pPr algn="ctr" indent="0" marL="0">
-              <a:buNone/>
-            </a:pPr>
-            <a:r>
-              <a:rPr lang="en-US" sz="2400" dirty="0">
-                <a:solidFill>
-                  <a:srgbClr val="E8EAF0"/>
+            <a:pPr indent="0" marL="0">
+              <a:buNone/>
+            </a:pPr>
+            <a:r>
+              <a:rPr lang="en-US" sz="2500" dirty="0">
+                <a:solidFill>
+                  <a:srgbClr val="6A7A72"/>
+                </a:solidFill>
+                <a:latin typeface="Arial" pitchFamily="34" charset="0"/>
+                <a:ea typeface="Arial" pitchFamily="34" charset="-122"/>
+                <a:cs typeface="Arial" pitchFamily="34" charset="-120"/>
+              </a:rPr>
+              <a:t>Corredores</a:t>
+            </a:r>
+            <a:endParaRPr lang="en-US" sz="2500" dirty="0"/>
+          </a:p>
+        </p:txBody>
+      </p:sp>
+      <p:sp>
+        <p:nvSpPr>
+          <p:cNvPr id="10" name="Shape 8"/>
+          <p:cNvSpPr/>
+          <p:nvPr/>
+        </p:nvSpPr>
+        <p:spPr>
+          <a:xfrm>
+            <a:off x="3383280" y="6053328"/>
+            <a:ext cx="3108960" cy="658368"/>
+          </a:xfrm>
+          <a:prstGeom prst="roundRect">
+            <a:avLst>
+              <a:gd name="adj" fmla="val 13889"/>
+            </a:avLst>
+          </a:prstGeom>
+          <a:solidFill>
+            <a:srgbClr val="8FBBA6"/>
+          </a:solidFill>
+          <a:ln/>
+        </p:spPr>
+      </p:sp>
+      <p:sp>
+        <p:nvSpPr>
+          <p:cNvPr id="11" name="Text 9"/>
+          <p:cNvSpPr/>
+          <p:nvPr/>
+        </p:nvSpPr>
+        <p:spPr>
+          <a:xfrm>
+            <a:off x="3383280" y="6053328"/>
+            <a:ext cx="2926080" cy="658368"/>
+          </a:xfrm>
+          <a:prstGeom prst="rect">
+            <a:avLst/>
+          </a:prstGeom>
+          <a:noFill/>
+          <a:ln/>
+        </p:spPr>
+        <p:txBody>
+          <a:bodyPr wrap="square" lIns="0" tIns="0" rIns="0" bIns="0" rtlCol="0" anchor="ctr"/>
+          <a:lstStyle/>
+          <a:p>
+            <a:pPr algn="r" indent="0" marL="0">
+              <a:buNone/>
+            </a:pPr>
+            <a:r>
+              <a:rPr lang="en-US" sz="2600" b="1" dirty="0">
+                <a:solidFill>
+                  <a:srgbClr val="0D0F14"/>
                 </a:solidFill>
                 <a:latin typeface="Courier New" pitchFamily="34" charset="0"/>
                 <a:ea typeface="Courier New" pitchFamily="34" charset="-122"/>
                 <a:cs typeface="Courier New" pitchFamily="34" charset="-120"/>
               </a:rPr>
-              <a:t>28011</a:t>
-            </a:r>
-            <a:endParaRPr lang="en-US" sz="2400" dirty="0"/>
+              <a:t>1.25</a:t>
+            </a:r>
+            <a:endParaRPr lang="en-US" sz="2600" dirty="0"/>
+          </a:p>
+        </p:txBody>
+      </p:sp>
+      <p:sp>
+        <p:nvSpPr>
+          <p:cNvPr id="12" name="Text 10"/>
+          <p:cNvSpPr/>
+          <p:nvPr/>
+        </p:nvSpPr>
+        <p:spPr>
+          <a:xfrm>
+            <a:off x="1554480" y="7406640"/>
+            <a:ext cx="8412480" cy="1280160"/>
+          </a:xfrm>
+          <a:prstGeom prst="rect">
+            <a:avLst/>
+          </a:prstGeom>
+          <a:noFill/>
+          <a:ln/>
+        </p:spPr>
+        <p:txBody>
+          <a:bodyPr wrap="square" lIns="0" tIns="0" rIns="0" bIns="0" rtlCol="0" anchor="ctr"/>
+          <a:lstStyle/>
+          <a:p>
+            <a:pPr indent="0" marL="0">
+              <a:lnSpc>
+                <a:spcPct val="112000"/>
+              </a:lnSpc>
+              <a:buNone/>
+            </a:pPr>
+            <a:r>
+              <a:rPr lang="en-US" sz="2600" i="1" dirty="0">
+                <a:solidFill>
+                  <a:srgbClr val="6A7A72"/>
+                </a:solidFill>
+                <a:latin typeface="Arial" pitchFamily="34" charset="0"/>
+                <a:ea typeface="Arial" pitchFamily="34" charset="-122"/>
+                <a:cs typeface="Arial" pitchFamily="34" charset="-120"/>
+              </a:rPr>
+              <a:t>Mismos 20 pedidos. Misma flota de 4 rutas. Solo cambia por dónde se mueven.</a:t>
+            </a:r>
+            <a:endParaRPr lang="en-US" sz="2600" dirty="0"/>
           </a:p>
         </p:txBody>
       </p:sp>
@@ -10991,18 +12117,22 @@
         </p:nvSpPr>
         <p:spPr>
           <a:xfrm>
-            <a:off x="13752576" y="3108960"/>
-            <a:ext cx="1828" cy="5394960"/>
-          </a:xfrm>
-          <a:prstGeom prst="line">
-            <a:avLst/>
-          </a:prstGeom>
-          <a:noFill/>
+            <a:off x="10972800" y="3108960"/>
+            <a:ext cx="6217920" cy="6035040"/>
+          </a:xfrm>
+          <a:prstGeom prst="roundRect">
+            <a:avLst>
+              <a:gd name="adj" fmla="val 1818"/>
+            </a:avLst>
+          </a:prstGeom>
+          <a:solidFill>
+            <a:srgbClr val="FBFAF5"/>
+          </a:solidFill>
           <a:ln w="25400">
             <a:solidFill>
-              <a:srgbClr val="6B7280"/>
+              <a:srgbClr val="CFC7B5"/>
             </a:solidFill>
-            <a:prstDash val="sysDot"/>
+            <a:prstDash val="solid"/>
           </a:ln>
         </p:spPr>
       </p:sp>
@@ -11014,8 +12144,8 @@
         </p:nvSpPr>
         <p:spPr>
           <a:xfrm>
-            <a:off x="12801600" y="8631936"/>
-            <a:ext cx="2011680" cy="402336"/>
+            <a:off x="11430000" y="4114800"/>
+            <a:ext cx="5303520" cy="4206240"/>
           </a:xfrm>
           <a:prstGeom prst="rect">
             <a:avLst/>
@@ -11031,410 +12161,51 @@
               <a:buNone/>
             </a:pPr>
             <a:r>
-              <a:rPr lang="en-US" sz="1900" dirty="0">
-                <a:solidFill>
-                  <a:srgbClr val="6B7280"/>
+              <a:rPr lang="en-US" sz="11200" b="1" dirty="0">
+                <a:solidFill>
+                  <a:srgbClr val="2D7A55"/>
                 </a:solidFill>
                 <a:latin typeface="Courier New" pitchFamily="34" charset="0"/>
                 <a:ea typeface="Courier New" pitchFamily="34" charset="-122"/>
                 <a:cs typeface="Courier New" pitchFamily="34" charset="-120"/>
               </a:rPr>
-              <a:t>frontera</a:t>
-            </a:r>
-            <a:endParaRPr lang="en-US" sz="1900" dirty="0"/>
-          </a:p>
-        </p:txBody>
-      </p:sp>
-      <p:sp>
-        <p:nvSpPr>
-          <p:cNvPr id="15" name="Text 13"/>
-          <p:cNvSpPr/>
-          <p:nvPr/>
-        </p:nvSpPr>
-        <p:spPr>
-          <a:xfrm>
-            <a:off x="10881360" y="2743200"/>
-            <a:ext cx="2468880" cy="457200"/>
-          </a:xfrm>
-          <a:prstGeom prst="rect">
-            <a:avLst/>
-          </a:prstGeom>
-          <a:noFill/>
-          <a:ln/>
-        </p:spPr>
-        <p:txBody>
-          <a:bodyPr wrap="square" lIns="0" tIns="0" rIns="0" bIns="0" rtlCol="0" anchor="ctr"/>
-          <a:lstStyle/>
+              <a:t>÷ 2</a:t>
+            </a:r>
+            <a:endParaRPr lang="en-US" sz="11200" dirty="0"/>
+          </a:p>
           <a:p>
             <a:pPr algn="ctr" indent="0" marL="0">
               <a:buNone/>
             </a:pPr>
             <a:r>
-              <a:rPr lang="en-US" sz="2200" b="1" dirty="0">
-                <a:solidFill>
-                  <a:srgbClr val="4D9DE0"/>
-                </a:solidFill>
-                <a:latin typeface="Courier New" pitchFamily="34" charset="0"/>
-                <a:ea typeface="Courier New" pitchFamily="34" charset="-122"/>
-                <a:cs typeface="Courier New" pitchFamily="34" charset="-120"/>
-              </a:rPr>
-              <a:t>Corredor 1</a:t>
-            </a:r>
-            <a:endParaRPr lang="en-US" sz="2200" dirty="0"/>
-          </a:p>
-        </p:txBody>
-      </p:sp>
-      <p:sp>
-        <p:nvSpPr>
-          <p:cNvPr id="16" name="Text 14"/>
-          <p:cNvSpPr/>
-          <p:nvPr/>
-        </p:nvSpPr>
-        <p:spPr>
-          <a:xfrm>
-            <a:off x="14173200" y="2743200"/>
-            <a:ext cx="2468880" cy="457200"/>
-          </a:xfrm>
-          <a:prstGeom prst="rect">
-            <a:avLst/>
-          </a:prstGeom>
-          <a:noFill/>
-          <a:ln/>
-        </p:spPr>
-        <p:txBody>
-          <a:bodyPr wrap="square" lIns="0" tIns="0" rIns="0" bIns="0" rtlCol="0" anchor="ctr"/>
-          <a:lstStyle/>
+              <a:rPr lang="en-US" sz="2800" dirty="0">
+                <a:solidFill>
+                  <a:srgbClr val="6A7A72"/>
+                </a:solidFill>
+              </a:rPr>
+              <a:t>la mitad de km por pedido</a:t>
+            </a:r>
+            <a:endParaRPr lang="en-US" sz="11200" dirty="0"/>
+          </a:p>
           <a:p>
             <a:pPr algn="ctr" indent="0" marL="0">
               <a:buNone/>
             </a:pPr>
-            <a:r>
-              <a:rPr lang="en-US" sz="2200" b="1" dirty="0">
-                <a:solidFill>
-                  <a:srgbClr val="2DD4BF"/>
-                </a:solidFill>
-                <a:latin typeface="Courier New" pitchFamily="34" charset="0"/>
-                <a:ea typeface="Courier New" pitchFamily="34" charset="-122"/>
-                <a:cs typeface="Courier New" pitchFamily="34" charset="-120"/>
-              </a:rPr>
-              <a:t>Corredor 2</a:t>
-            </a:r>
-            <a:endParaRPr lang="en-US" sz="2200" dirty="0"/>
-          </a:p>
-        </p:txBody>
-      </p:sp>
-      <p:sp>
-        <p:nvSpPr>
-          <p:cNvPr id="17" name="Shape 15"/>
-          <p:cNvSpPr/>
-          <p:nvPr/>
-        </p:nvSpPr>
-        <p:spPr>
-          <a:xfrm>
-            <a:off x="1097280" y="3017520"/>
-            <a:ext cx="8321040" cy="1737360"/>
-          </a:xfrm>
-          <a:prstGeom prst="roundRect">
-            <a:avLst>
-              <a:gd name="adj" fmla="val 6316"/>
-            </a:avLst>
-          </a:prstGeom>
-          <a:solidFill>
-            <a:srgbClr val="161B26"/>
-          </a:solidFill>
-          <a:ln w="25400">
-            <a:solidFill>
-              <a:srgbClr val="2A3040"/>
-            </a:solidFill>
-            <a:prstDash val="solid"/>
-          </a:ln>
-        </p:spPr>
-      </p:sp>
-      <p:sp>
-        <p:nvSpPr>
-          <p:cNvPr id="18" name="Text 16"/>
-          <p:cNvSpPr/>
-          <p:nvPr/>
-        </p:nvSpPr>
-        <p:spPr>
-          <a:xfrm>
-            <a:off x="1554480" y="3255264"/>
-            <a:ext cx="7498080" cy="548640"/>
-          </a:xfrm>
-          <a:prstGeom prst="rect">
-            <a:avLst/>
-          </a:prstGeom>
-          <a:noFill/>
-          <a:ln/>
-        </p:spPr>
-        <p:txBody>
-          <a:bodyPr wrap="square" lIns="0" tIns="0" rIns="0" bIns="0" rtlCol="0" anchor="ctr"/>
-          <a:lstStyle/>
-          <a:p>
-            <a:pPr indent="0" marL="0">
-              <a:buNone/>
-            </a:pPr>
-            <a:r>
-              <a:rPr lang="en-US" sz="2900" b="1" dirty="0">
-                <a:solidFill>
-                  <a:srgbClr val="E8EAF0"/>
-                </a:solidFill>
-                <a:latin typeface="Arial" pitchFamily="34" charset="0"/>
-                <a:ea typeface="Arial" pitchFamily="34" charset="-122"/>
-                <a:cs typeface="Arial" pitchFamily="34" charset="-120"/>
-              </a:rPr>
-              <a:t>Cercanía real</a:t>
-            </a:r>
-            <a:endParaRPr lang="en-US" sz="2900" dirty="0"/>
-          </a:p>
-        </p:txBody>
-      </p:sp>
-      <p:sp>
-        <p:nvSpPr>
-          <p:cNvPr id="19" name="Text 17"/>
-          <p:cNvSpPr/>
-          <p:nvPr/>
-        </p:nvSpPr>
-        <p:spPr>
-          <a:xfrm>
-            <a:off x="1554480" y="3840480"/>
-            <a:ext cx="7498080" cy="768096"/>
-          </a:xfrm>
-          <a:prstGeom prst="rect">
-            <a:avLst/>
-          </a:prstGeom>
-          <a:noFill/>
-          <a:ln/>
-        </p:spPr>
-        <p:txBody>
-          <a:bodyPr wrap="square" lIns="0" tIns="0" rIns="0" bIns="0" rtlCol="0" anchor="ctr"/>
-          <a:lstStyle/>
-          <a:p>
-            <a:pPr indent="0" marL="0">
+            <a:endParaRPr lang="en-US" sz="11200" dirty="0"/>
+          </a:p>
+          <a:p>
+            <a:pPr algn="ctr" indent="0" marL="0">
               <a:buNone/>
             </a:pPr>
             <a:r>
               <a:rPr lang="en-US" sz="2300" dirty="0">
                 <a:solidFill>
-                  <a:srgbClr val="8B92A5"/>
-                </a:solidFill>
-                <a:latin typeface="Arial" pitchFamily="34" charset="0"/>
-                <a:ea typeface="Arial" pitchFamily="34" charset="-122"/>
-                <a:cs typeface="Arial" pitchFamily="34" charset="-120"/>
-              </a:rPr>
-              <a:t>agrupa lo que está cerca por carretera, no en el mapa</a:t>
-            </a:r>
-            <a:endParaRPr lang="en-US" sz="2300" dirty="0"/>
-          </a:p>
-        </p:txBody>
-      </p:sp>
-      <p:sp>
-        <p:nvSpPr>
-          <p:cNvPr id="20" name="Shape 18"/>
-          <p:cNvSpPr/>
-          <p:nvPr/>
-        </p:nvSpPr>
-        <p:spPr>
-          <a:xfrm>
-            <a:off x="1097280" y="5120640"/>
-            <a:ext cx="8321040" cy="1737360"/>
-          </a:xfrm>
-          <a:prstGeom prst="roundRect">
-            <a:avLst>
-              <a:gd name="adj" fmla="val 6316"/>
-            </a:avLst>
-          </a:prstGeom>
-          <a:solidFill>
-            <a:srgbClr val="161B26"/>
-          </a:solidFill>
-          <a:ln w="25400">
-            <a:solidFill>
-              <a:srgbClr val="2A3040"/>
-            </a:solidFill>
-            <a:prstDash val="solid"/>
-          </a:ln>
-        </p:spPr>
-      </p:sp>
-      <p:sp>
-        <p:nvSpPr>
-          <p:cNvPr id="21" name="Text 19"/>
-          <p:cNvSpPr/>
-          <p:nvPr/>
-        </p:nvSpPr>
-        <p:spPr>
-          <a:xfrm>
-            <a:off x="1554480" y="5358384"/>
-            <a:ext cx="7498080" cy="548640"/>
-          </a:xfrm>
-          <a:prstGeom prst="rect">
-            <a:avLst/>
-          </a:prstGeom>
-          <a:noFill/>
-          <a:ln/>
-        </p:spPr>
-        <p:txBody>
-          <a:bodyPr wrap="square" lIns="0" tIns="0" rIns="0" bIns="0" rtlCol="0" anchor="ctr"/>
-          <a:lstStyle/>
-          <a:p>
-            <a:pPr indent="0" marL="0">
-              <a:buNone/>
-            </a:pPr>
-            <a:r>
-              <a:rPr lang="en-US" sz="2900" b="1" dirty="0">
-                <a:solidFill>
-                  <a:srgbClr val="E8EAF0"/>
-                </a:solidFill>
-                <a:latin typeface="Arial" pitchFamily="34" charset="0"/>
-                <a:ea typeface="Arial" pitchFamily="34" charset="-122"/>
-                <a:cs typeface="Arial" pitchFamily="34" charset="-120"/>
-              </a:rPr>
-              <a:t>Afinidad histórica</a:t>
-            </a:r>
-            <a:endParaRPr lang="en-US" sz="2900" dirty="0"/>
-          </a:p>
-        </p:txBody>
-      </p:sp>
-      <p:sp>
-        <p:nvSpPr>
-          <p:cNvPr id="22" name="Text 20"/>
-          <p:cNvSpPr/>
-          <p:nvPr/>
-        </p:nvSpPr>
-        <p:spPr>
-          <a:xfrm>
-            <a:off x="1554480" y="5943600"/>
-            <a:ext cx="7498080" cy="768096"/>
-          </a:xfrm>
-          <a:prstGeom prst="rect">
-            <a:avLst/>
-          </a:prstGeom>
-          <a:noFill/>
-          <a:ln/>
-        </p:spPr>
-        <p:txBody>
-          <a:bodyPr wrap="square" lIns="0" tIns="0" rIns="0" bIns="0" rtlCol="0" anchor="ctr"/>
-          <a:lstStyle/>
-          <a:p>
-            <a:pPr indent="0" marL="0">
-              <a:buNone/>
-            </a:pPr>
-            <a:r>
-              <a:rPr lang="en-US" sz="2300" dirty="0">
-                <a:solidFill>
-                  <a:srgbClr val="8B92A5"/>
-                </a:solidFill>
-                <a:latin typeface="Arial" pitchFamily="34" charset="0"/>
-                <a:ea typeface="Arial" pitchFamily="34" charset="-122"/>
-                <a:cs typeface="Arial" pitchFamily="34" charset="-120"/>
-              </a:rPr>
-              <a:t>CPs que las rutas ya sirven juntos, siguen juntos</a:t>
-            </a:r>
-            <a:endParaRPr lang="en-US" sz="2300" dirty="0"/>
-          </a:p>
-        </p:txBody>
-      </p:sp>
-      <p:sp>
-        <p:nvSpPr>
-          <p:cNvPr id="23" name="Shape 21"/>
-          <p:cNvSpPr/>
-          <p:nvPr/>
-        </p:nvSpPr>
-        <p:spPr>
-          <a:xfrm>
-            <a:off x="1097280" y="7223760"/>
-            <a:ext cx="8321040" cy="1737360"/>
-          </a:xfrm>
-          <a:prstGeom prst="roundRect">
-            <a:avLst>
-              <a:gd name="adj" fmla="val 6316"/>
-            </a:avLst>
-          </a:prstGeom>
-          <a:solidFill>
-            <a:srgbClr val="161B26"/>
-          </a:solidFill>
-          <a:ln w="25400">
-            <a:solidFill>
-              <a:srgbClr val="2A3040"/>
-            </a:solidFill>
-            <a:prstDash val="solid"/>
-          </a:ln>
-        </p:spPr>
-      </p:sp>
-      <p:sp>
-        <p:nvSpPr>
-          <p:cNvPr id="24" name="Text 22"/>
-          <p:cNvSpPr/>
-          <p:nvPr/>
-        </p:nvSpPr>
-        <p:spPr>
-          <a:xfrm>
-            <a:off x="1554480" y="7461504"/>
-            <a:ext cx="7498080" cy="548640"/>
-          </a:xfrm>
-          <a:prstGeom prst="rect">
-            <a:avLst/>
-          </a:prstGeom>
-          <a:noFill/>
-          <a:ln/>
-        </p:spPr>
-        <p:txBody>
-          <a:bodyPr wrap="square" lIns="0" tIns="0" rIns="0" bIns="0" rtlCol="0" anchor="ctr"/>
-          <a:lstStyle/>
-          <a:p>
-            <a:pPr indent="0" marL="0">
-              <a:buNone/>
-            </a:pPr>
-            <a:r>
-              <a:rPr lang="en-US" sz="2900" b="1" dirty="0">
-                <a:solidFill>
-                  <a:srgbClr val="E8EAF0"/>
-                </a:solidFill>
-                <a:latin typeface="Arial" pitchFamily="34" charset="0"/>
-                <a:ea typeface="Arial" pitchFamily="34" charset="-122"/>
-                <a:cs typeface="Arial" pitchFamily="34" charset="-120"/>
-              </a:rPr>
-              <a:t>Anti-saltos</a:t>
-            </a:r>
-            <a:endParaRPr lang="en-US" sz="2900" dirty="0"/>
-          </a:p>
-        </p:txBody>
-      </p:sp>
-      <p:sp>
-        <p:nvSpPr>
-          <p:cNvPr id="25" name="Text 23"/>
-          <p:cNvSpPr/>
-          <p:nvPr/>
-        </p:nvSpPr>
-        <p:spPr>
-          <a:xfrm>
-            <a:off x="1554480" y="8046720"/>
-            <a:ext cx="7498080" cy="768096"/>
-          </a:xfrm>
-          <a:prstGeom prst="rect">
-            <a:avLst/>
-          </a:prstGeom>
-          <a:noFill/>
-          <a:ln/>
-        </p:spPr>
-        <p:txBody>
-          <a:bodyPr wrap="square" lIns="0" tIns="0" rIns="0" bIns="0" rtlCol="0" anchor="ctr"/>
-          <a:lstStyle/>
-          <a:p>
-            <a:pPr indent="0" marL="0">
-              <a:buNone/>
-            </a:pPr>
-            <a:r>
-              <a:rPr lang="en-US" sz="2300" dirty="0">
-                <a:solidFill>
-                  <a:srgbClr val="8B92A5"/>
-                </a:solidFill>
-                <a:latin typeface="Arial" pitchFamily="34" charset="0"/>
-                <a:ea typeface="Arial" pitchFamily="34" charset="-122"/>
-                <a:cs typeface="Arial" pitchFamily="34" charset="-120"/>
-              </a:rPr>
-              <a:t>cada salto &gt;10 km empuja a sus dos CPs a corredores distintos</a:t>
-            </a:r>
-            <a:endParaRPr lang="en-US" sz="2300" dirty="0"/>
+                  <a:srgbClr val="6A7A72"/>
+                </a:solidFill>
+              </a:rPr>
+              <a:t>y los minutos por pedido caen en la misma proporción</a:t>
+            </a:r>
+            <a:endParaRPr lang="en-US" sz="11200" dirty="0"/>
           </a:p>
         </p:txBody>
       </p:sp>
@@ -11448,11 +12219,11 @@
 
 <file path=ppt/slides/slide21.xml><?xml version="1.0" encoding="utf-8"?>
 <p:sld xmlns:a="http://schemas.openxmlformats.org/drawingml/2006/main" xmlns:r="http://schemas.openxmlformats.org/officeDocument/2006/relationships" xmlns:p="http://schemas.openxmlformats.org/presentationml/2006/main">
-  <p:cSld name="Slide 7">
+  <p:cSld name="Slide 10">
     <p:bg>
       <p:bgPr>
         <a:solidFill>
-          <a:srgbClr val="0D0F14"/>
+          <a:srgbClr val="F4F1EA"/>
         </a:solidFill>
       </p:bgPr>
     </p:bg>
@@ -11497,13 +12268,13 @@
             <a:r>
               <a:rPr lang="en-US" sz="2400" spc="600" kern="0" dirty="0">
                 <a:solidFill>
-                  <a:srgbClr val="8B92A5"/>
+                  <a:srgbClr val="6A7A72"/>
                 </a:solidFill>
                 <a:latin typeface="Courier New" pitchFamily="34" charset="0"/>
                 <a:ea typeface="Courier New" pitchFamily="34" charset="-122"/>
                 <a:cs typeface="Courier New" pitchFamily="34" charset="-120"/>
               </a:rPr>
-              <a:t>06 · EL MISMO DÍA, CON CORREDORES</a:t>
+              <a:t>06 · LA HERRAMIENTA</a:t>
             </a:r>
             <a:endParaRPr lang="en-US" sz="2400" dirty="0"/>
           </a:p>
@@ -11536,13 +12307,13 @@
             <a:r>
               <a:rPr lang="en-US" sz="6000" b="1" dirty="0">
                 <a:solidFill>
-                  <a:srgbClr val="E8EAF0"/>
+                  <a:srgbClr val="0F1D18"/>
                 </a:solidFill>
                 <a:latin typeface="Arial" pitchFamily="34" charset="0"/>
                 <a:ea typeface="Arial" pitchFamily="34" charset="-122"/>
                 <a:cs typeface="Arial" pitchFamily="34" charset="-120"/>
               </a:rPr>
-              <a:t>Mismas paradas, sin cruces</a:t>
+              <a:t>Del CSV al corredor en cuatro pasos</a:t>
             </a:r>
             <a:endParaRPr lang="en-US" sz="6000" dirty="0"/>
           </a:p>
@@ -11556,20 +12327,20 @@
         </p:nvSpPr>
         <p:spPr>
           <a:xfrm>
-            <a:off x="9784080" y="2834640"/>
-            <a:ext cx="7589520" cy="7040880"/>
+            <a:off x="1097280" y="3291840"/>
+            <a:ext cx="3803904" cy="4937760"/>
           </a:xfrm>
           <a:prstGeom prst="roundRect">
             <a:avLst>
-              <a:gd name="adj" fmla="val 1558"/>
+              <a:gd name="adj" fmla="val 2885"/>
             </a:avLst>
           </a:prstGeom>
           <a:solidFill>
-            <a:srgbClr val="161B26"/>
+            <a:srgbClr val="FBFAF5"/>
           </a:solidFill>
           <a:ln w="25400">
             <a:solidFill>
-              <a:srgbClr val="2A3040"/>
+              <a:srgbClr val="CFC7B5"/>
             </a:solidFill>
             <a:prstDash val="solid"/>
           </a:ln>
@@ -11583,124 +12354,35 @@
         </p:nvSpPr>
         <p:spPr>
           <a:xfrm>
-            <a:off x="10515600" y="3621024"/>
-            <a:ext cx="2651760" cy="2286000"/>
-          </a:xfrm>
-          <a:prstGeom prst="roundRect">
-            <a:avLst>
-              <a:gd name="adj" fmla="val 6400"/>
-            </a:avLst>
+            <a:off x="1499616" y="3749040"/>
+            <a:ext cx="914400" cy="914400"/>
+          </a:xfrm>
+          <a:prstGeom prst="ellipse">
+            <a:avLst/>
           </a:prstGeom>
           <a:solidFill>
             <a:srgbClr val="0D0F14">
               <a:alpha val="0"/>
             </a:srgbClr>
           </a:solidFill>
-          <a:ln w="25400">
+          <a:ln w="44450">
             <a:solidFill>
-              <a:srgbClr val="4D9DE0"/>
+              <a:srgbClr val="1E4F3A"/>
             </a:solidFill>
-            <a:prstDash val="dash"/>
+            <a:prstDash val="solid"/>
           </a:ln>
         </p:spPr>
       </p:sp>
       <p:sp>
         <p:nvSpPr>
-          <p:cNvPr id="6" name="Shape 4"/>
-          <p:cNvSpPr/>
-          <p:nvPr/>
-        </p:nvSpPr>
-        <p:spPr>
-          <a:xfrm>
-            <a:off x="14081760" y="3621024"/>
-            <a:ext cx="2651760" cy="2286000"/>
-          </a:xfrm>
-          <a:prstGeom prst="roundRect">
-            <a:avLst>
-              <a:gd name="adj" fmla="val 6400"/>
-            </a:avLst>
-          </a:prstGeom>
-          <a:solidFill>
-            <a:srgbClr val="0D0F14">
-              <a:alpha val="0"/>
-            </a:srgbClr>
-          </a:solidFill>
-          <a:ln w="25400">
-            <a:solidFill>
-              <a:srgbClr val="2DD4BF"/>
-            </a:solidFill>
-            <a:prstDash val="dash"/>
-          </a:ln>
-        </p:spPr>
-      </p:sp>
-      <p:sp>
-        <p:nvSpPr>
-          <p:cNvPr id="7" name="Shape 5"/>
-          <p:cNvSpPr/>
-          <p:nvPr/>
-        </p:nvSpPr>
-        <p:spPr>
-          <a:xfrm>
-            <a:off x="10515600" y="6455664"/>
-            <a:ext cx="2651760" cy="2286000"/>
-          </a:xfrm>
-          <a:prstGeom prst="roundRect">
-            <a:avLst>
-              <a:gd name="adj" fmla="val 6400"/>
-            </a:avLst>
-          </a:prstGeom>
-          <a:solidFill>
-            <a:srgbClr val="0D0F14">
-              <a:alpha val="0"/>
-            </a:srgbClr>
-          </a:solidFill>
-          <a:ln w="25400">
-            <a:solidFill>
-              <a:srgbClr val="4D9DE0"/>
-            </a:solidFill>
-            <a:prstDash val="dash"/>
-          </a:ln>
-        </p:spPr>
-      </p:sp>
-      <p:sp>
-        <p:nvSpPr>
-          <p:cNvPr id="8" name="Shape 6"/>
-          <p:cNvSpPr/>
-          <p:nvPr/>
-        </p:nvSpPr>
-        <p:spPr>
-          <a:xfrm>
-            <a:off x="14081760" y="6455664"/>
-            <a:ext cx="2651760" cy="2286000"/>
-          </a:xfrm>
-          <a:prstGeom prst="roundRect">
-            <a:avLst>
-              <a:gd name="adj" fmla="val 6400"/>
-            </a:avLst>
-          </a:prstGeom>
-          <a:solidFill>
-            <a:srgbClr val="0D0F14">
-              <a:alpha val="0"/>
-            </a:srgbClr>
-          </a:solidFill>
-          <a:ln w="25400">
-            <a:solidFill>
-              <a:srgbClr val="2DD4BF"/>
-            </a:solidFill>
-            <a:prstDash val="dash"/>
-          </a:ln>
-        </p:spPr>
-      </p:sp>
-      <p:sp>
-        <p:nvSpPr>
-          <p:cNvPr id="9" name="Text 7"/>
-          <p:cNvSpPr/>
-          <p:nvPr/>
-        </p:nvSpPr>
-        <p:spPr>
-          <a:xfrm>
-            <a:off x="10515600" y="3145536"/>
-            <a:ext cx="2651760" cy="402336"/>
+          <p:cNvPr id="6" name="Text 4"/>
+          <p:cNvSpPr/>
+          <p:nvPr/>
+        </p:nvSpPr>
+        <p:spPr>
+          <a:xfrm>
+            <a:off x="1499616" y="3749040"/>
+            <a:ext cx="914400" cy="914400"/>
           </a:xfrm>
           <a:prstGeom prst="rect">
             <a:avLst/>
@@ -11716,30 +12398,30 @@
               <a:buNone/>
             </a:pPr>
             <a:r>
-              <a:rPr lang="en-US" sz="2000" dirty="0">
-                <a:solidFill>
-                  <a:srgbClr val="8B92A5"/>
+              <a:rPr lang="en-US" sz="3600" b="1" dirty="0">
+                <a:solidFill>
+                  <a:srgbClr val="1E4F3A"/>
                 </a:solidFill>
                 <a:latin typeface="Courier New" pitchFamily="34" charset="0"/>
                 <a:ea typeface="Courier New" pitchFamily="34" charset="-122"/>
                 <a:cs typeface="Courier New" pitchFamily="34" charset="-120"/>
               </a:rPr>
-              <a:t>28001</a:t>
-            </a:r>
-            <a:endParaRPr lang="en-US" sz="2000" dirty="0"/>
-          </a:p>
-        </p:txBody>
-      </p:sp>
-      <p:sp>
-        <p:nvSpPr>
-          <p:cNvPr id="10" name="Text 8"/>
-          <p:cNvSpPr/>
-          <p:nvPr/>
-        </p:nvSpPr>
-        <p:spPr>
-          <a:xfrm>
-            <a:off x="14081760" y="3145536"/>
-            <a:ext cx="2651760" cy="402336"/>
+              <a:t>1</a:t>
+            </a:r>
+            <a:endParaRPr lang="en-US" sz="3600" dirty="0"/>
+          </a:p>
+        </p:txBody>
+      </p:sp>
+      <p:sp>
+        <p:nvSpPr>
+          <p:cNvPr id="7" name="Text 5"/>
+          <p:cNvSpPr/>
+          <p:nvPr/>
+        </p:nvSpPr>
+        <p:spPr>
+          <a:xfrm>
+            <a:off x="1499616" y="4974336"/>
+            <a:ext cx="3108960" cy="640080"/>
           </a:xfrm>
           <a:prstGeom prst="rect">
             <a:avLst/>
@@ -11751,1081 +12433,34 @@
           <a:bodyPr wrap="square" lIns="0" tIns="0" rIns="0" bIns="0" rtlCol="0" anchor="ctr"/>
           <a:lstStyle/>
           <a:p>
-            <a:pPr algn="ctr" indent="0" marL="0">
-              <a:buNone/>
-            </a:pPr>
-            <a:r>
-              <a:rPr lang="en-US" sz="2000" dirty="0">
-                <a:solidFill>
-                  <a:srgbClr val="8B92A5"/>
-                </a:solidFill>
-                <a:latin typeface="Courier New" pitchFamily="34" charset="0"/>
-                <a:ea typeface="Courier New" pitchFamily="34" charset="-122"/>
-                <a:cs typeface="Courier New" pitchFamily="34" charset="-120"/>
-              </a:rPr>
-              <a:t>28010</a:t>
-            </a:r>
-            <a:endParaRPr lang="en-US" sz="2000" dirty="0"/>
-          </a:p>
-        </p:txBody>
-      </p:sp>
-      <p:sp>
-        <p:nvSpPr>
-          <p:cNvPr id="11" name="Text 9"/>
-          <p:cNvSpPr/>
-          <p:nvPr/>
-        </p:nvSpPr>
-        <p:spPr>
-          <a:xfrm>
-            <a:off x="10515600" y="8778240"/>
-            <a:ext cx="2651760" cy="402336"/>
-          </a:xfrm>
-          <a:prstGeom prst="rect">
-            <a:avLst/>
-          </a:prstGeom>
-          <a:noFill/>
-          <a:ln/>
-        </p:spPr>
-        <p:txBody>
-          <a:bodyPr wrap="square" lIns="0" tIns="0" rIns="0" bIns="0" rtlCol="0" anchor="ctr"/>
-          <a:lstStyle/>
-          <a:p>
-            <a:pPr algn="ctr" indent="0" marL="0">
-              <a:buNone/>
-            </a:pPr>
-            <a:r>
-              <a:rPr lang="en-US" sz="2000" dirty="0">
-                <a:solidFill>
-                  <a:srgbClr val="8B92A5"/>
-                </a:solidFill>
-                <a:latin typeface="Courier New" pitchFamily="34" charset="0"/>
-                <a:ea typeface="Courier New" pitchFamily="34" charset="-122"/>
-                <a:cs typeface="Courier New" pitchFamily="34" charset="-120"/>
-              </a:rPr>
-              <a:t>28002</a:t>
-            </a:r>
-            <a:endParaRPr lang="en-US" sz="2000" dirty="0"/>
-          </a:p>
-        </p:txBody>
-      </p:sp>
-      <p:sp>
-        <p:nvSpPr>
-          <p:cNvPr id="12" name="Text 10"/>
-          <p:cNvSpPr/>
-          <p:nvPr/>
-        </p:nvSpPr>
-        <p:spPr>
-          <a:xfrm>
-            <a:off x="14081760" y="8778240"/>
-            <a:ext cx="2651760" cy="402336"/>
-          </a:xfrm>
-          <a:prstGeom prst="rect">
-            <a:avLst/>
-          </a:prstGeom>
-          <a:noFill/>
-          <a:ln/>
-        </p:spPr>
-        <p:txBody>
-          <a:bodyPr wrap="square" lIns="0" tIns="0" rIns="0" bIns="0" rtlCol="0" anchor="ctr"/>
-          <a:lstStyle/>
-          <a:p>
-            <a:pPr algn="ctr" indent="0" marL="0">
-              <a:buNone/>
-            </a:pPr>
-            <a:r>
-              <a:rPr lang="en-US" sz="2000" dirty="0">
-                <a:solidFill>
-                  <a:srgbClr val="8B92A5"/>
-                </a:solidFill>
-                <a:latin typeface="Courier New" pitchFamily="34" charset="0"/>
-                <a:ea typeface="Courier New" pitchFamily="34" charset="-122"/>
-                <a:cs typeface="Courier New" pitchFamily="34" charset="-120"/>
-              </a:rPr>
-              <a:t>28011</a:t>
-            </a:r>
-            <a:endParaRPr lang="en-US" sz="2000" dirty="0"/>
-          </a:p>
-        </p:txBody>
-      </p:sp>
-      <p:sp>
-        <p:nvSpPr>
-          <p:cNvPr id="13" name="Shape 11"/>
-          <p:cNvSpPr/>
-          <p:nvPr/>
-        </p:nvSpPr>
-        <p:spPr>
-          <a:xfrm>
-            <a:off x="13624560" y="3529584"/>
-            <a:ext cx="1828" cy="5303520"/>
-          </a:xfrm>
-          <a:prstGeom prst="line">
-            <a:avLst/>
-          </a:prstGeom>
-          <a:noFill/>
-          <a:ln w="25400">
-            <a:solidFill>
-              <a:srgbClr val="6B7280"/>
-            </a:solidFill>
-            <a:prstDash val="sysDot"/>
-          </a:ln>
-        </p:spPr>
-      </p:sp>
-      <p:sp>
-        <p:nvSpPr>
-          <p:cNvPr id="14" name="Shape 12"/>
-          <p:cNvSpPr/>
-          <p:nvPr/>
-        </p:nvSpPr>
-        <p:spPr>
-          <a:xfrm flipV="1">
-            <a:off x="12124944" y="4169664"/>
-            <a:ext cx="2377440" cy="36576"/>
-          </a:xfrm>
-          <a:prstGeom prst="line">
-            <a:avLst/>
-          </a:prstGeom>
-          <a:noFill/>
-          <a:ln w="31750">
-            <a:solidFill>
-              <a:srgbClr val="6B7280"/>
-            </a:solidFill>
-            <a:prstDash val="dash"/>
-          </a:ln>
-        </p:spPr>
-      </p:sp>
-      <p:sp>
-        <p:nvSpPr>
-          <p:cNvPr id="15" name="Shape 13"/>
-          <p:cNvSpPr/>
-          <p:nvPr/>
-        </p:nvSpPr>
-        <p:spPr>
-          <a:xfrm flipV="1">
-            <a:off x="11887200" y="7004304"/>
-            <a:ext cx="2560320" cy="1408176"/>
-          </a:xfrm>
-          <a:prstGeom prst="line">
-            <a:avLst/>
-          </a:prstGeom>
-          <a:noFill/>
-          <a:ln w="31750">
-            <a:solidFill>
-              <a:srgbClr val="6B7280"/>
-            </a:solidFill>
-            <a:prstDash val="dash"/>
-          </a:ln>
-        </p:spPr>
-      </p:sp>
-      <p:sp>
-        <p:nvSpPr>
-          <p:cNvPr id="16" name="Text 14"/>
-          <p:cNvSpPr/>
-          <p:nvPr/>
-        </p:nvSpPr>
-        <p:spPr>
-          <a:xfrm>
-            <a:off x="13075920" y="3913632"/>
-            <a:ext cx="548640" cy="548640"/>
-          </a:xfrm>
-          <a:prstGeom prst="rect">
-            <a:avLst/>
-          </a:prstGeom>
-          <a:noFill/>
-          <a:ln/>
-        </p:spPr>
-        <p:txBody>
-          <a:bodyPr wrap="square" lIns="0" tIns="0" rIns="0" bIns="0" rtlCol="0" anchor="ctr"/>
-          <a:lstStyle/>
-          <a:p>
-            <a:pPr algn="ctr" indent="0" marL="0">
-              <a:buNone/>
-            </a:pPr>
-            <a:r>
-              <a:rPr lang="en-US" sz="2800" b="1" dirty="0">
-                <a:solidFill>
-                  <a:srgbClr val="E8554D"/>
+            <a:pPr indent="0" marL="0">
+              <a:buNone/>
+            </a:pPr>
+            <a:r>
+              <a:rPr lang="en-US" sz="3200" b="1" dirty="0">
+                <a:solidFill>
+                  <a:srgbClr val="0F1D18"/>
                 </a:solidFill>
                 <a:latin typeface="Arial" pitchFamily="34" charset="0"/>
                 <a:ea typeface="Arial" pitchFamily="34" charset="-122"/>
                 <a:cs typeface="Arial" pitchFamily="34" charset="-120"/>
               </a:rPr>
-              <a:t>×</a:t>
-            </a:r>
-            <a:endParaRPr lang="en-US" sz="2800" dirty="0"/>
-          </a:p>
-        </p:txBody>
-      </p:sp>
-      <p:sp>
-        <p:nvSpPr>
-          <p:cNvPr id="17" name="Text 15"/>
-          <p:cNvSpPr/>
-          <p:nvPr/>
-        </p:nvSpPr>
-        <p:spPr>
-          <a:xfrm>
-            <a:off x="12929616" y="7388352"/>
-            <a:ext cx="548640" cy="548640"/>
-          </a:xfrm>
-          <a:prstGeom prst="rect">
-            <a:avLst/>
-          </a:prstGeom>
-          <a:noFill/>
-          <a:ln/>
-        </p:spPr>
-        <p:txBody>
-          <a:bodyPr wrap="square" lIns="0" tIns="0" rIns="0" bIns="0" rtlCol="0" anchor="ctr"/>
-          <a:lstStyle/>
-          <a:p>
-            <a:pPr algn="ctr" indent="0" marL="0">
-              <a:buNone/>
-            </a:pPr>
-            <a:r>
-              <a:rPr lang="en-US" sz="2800" b="1" dirty="0">
-                <a:solidFill>
-                  <a:srgbClr val="E8554D"/>
-                </a:solidFill>
-                <a:latin typeface="Arial" pitchFamily="34" charset="0"/>
-                <a:ea typeface="Arial" pitchFamily="34" charset="-122"/>
-                <a:cs typeface="Arial" pitchFamily="34" charset="-120"/>
-              </a:rPr>
-              <a:t>×</a:t>
-            </a:r>
-            <a:endParaRPr lang="en-US" sz="2800" dirty="0"/>
-          </a:p>
-        </p:txBody>
-      </p:sp>
-      <p:sp>
-        <p:nvSpPr>
-          <p:cNvPr id="18" name="Shape 16"/>
-          <p:cNvSpPr/>
-          <p:nvPr/>
-        </p:nvSpPr>
-        <p:spPr>
-          <a:xfrm>
-            <a:off x="10917936" y="4133088"/>
-            <a:ext cx="146304" cy="731520"/>
-          </a:xfrm>
-          <a:prstGeom prst="line">
-            <a:avLst/>
-          </a:prstGeom>
-          <a:noFill/>
-          <a:ln w="57150">
-            <a:solidFill>
-              <a:srgbClr val="4D9DE0"/>
-            </a:solidFill>
-            <a:prstDash val="solid"/>
-          </a:ln>
-        </p:spPr>
-      </p:sp>
-      <p:sp>
-        <p:nvSpPr>
-          <p:cNvPr id="19" name="Shape 17"/>
-          <p:cNvSpPr/>
-          <p:nvPr/>
-        </p:nvSpPr>
-        <p:spPr>
-          <a:xfrm flipH="1">
-            <a:off x="10972800" y="4864608"/>
-            <a:ext cx="91440" cy="2011680"/>
-          </a:xfrm>
-          <a:prstGeom prst="line">
-            <a:avLst/>
-          </a:prstGeom>
-          <a:noFill/>
-          <a:ln w="57150">
-            <a:solidFill>
-              <a:srgbClr val="4D9DE0"/>
-            </a:solidFill>
-            <a:prstDash val="solid"/>
-          </a:ln>
-        </p:spPr>
-      </p:sp>
-      <p:sp>
-        <p:nvSpPr>
-          <p:cNvPr id="20" name="Shape 18"/>
-          <p:cNvSpPr/>
-          <p:nvPr/>
-        </p:nvSpPr>
-        <p:spPr>
-          <a:xfrm>
-            <a:off x="10972800" y="6876288"/>
-            <a:ext cx="146304" cy="768096"/>
-          </a:xfrm>
-          <a:prstGeom prst="line">
-            <a:avLst/>
-          </a:prstGeom>
-          <a:noFill/>
-          <a:ln w="57150">
-            <a:solidFill>
-              <a:srgbClr val="4D9DE0"/>
-            </a:solidFill>
-            <a:prstDash val="solid"/>
-          </a:ln>
-        </p:spPr>
-      </p:sp>
-      <p:sp>
-        <p:nvSpPr>
-          <p:cNvPr id="21" name="Shape 19"/>
-          <p:cNvSpPr/>
-          <p:nvPr/>
-        </p:nvSpPr>
-        <p:spPr>
-          <a:xfrm>
-            <a:off x="11649456" y="7918704"/>
-            <a:ext cx="237744" cy="493776"/>
-          </a:xfrm>
-          <a:prstGeom prst="line">
-            <a:avLst/>
-          </a:prstGeom>
-          <a:noFill/>
-          <a:ln w="57150">
-            <a:solidFill>
-              <a:srgbClr val="EFA13B"/>
-            </a:solidFill>
-            <a:prstDash val="solid"/>
-          </a:ln>
-        </p:spPr>
-      </p:sp>
-      <p:sp>
-        <p:nvSpPr>
-          <p:cNvPr id="22" name="Shape 20"/>
-          <p:cNvSpPr/>
-          <p:nvPr/>
-        </p:nvSpPr>
-        <p:spPr>
-          <a:xfrm flipH="1" flipV="1">
-            <a:off x="12124944" y="7370064"/>
-            <a:ext cx="128016" cy="914400"/>
-          </a:xfrm>
-          <a:prstGeom prst="line">
-            <a:avLst/>
-          </a:prstGeom>
-          <a:noFill/>
-          <a:ln w="57150">
-            <a:solidFill>
-              <a:srgbClr val="8B83E8"/>
-            </a:solidFill>
-            <a:prstDash val="solid"/>
-          </a:ln>
-        </p:spPr>
-      </p:sp>
-      <p:sp>
-        <p:nvSpPr>
-          <p:cNvPr id="23" name="Shape 21"/>
-          <p:cNvSpPr/>
-          <p:nvPr/>
-        </p:nvSpPr>
-        <p:spPr>
-          <a:xfrm flipV="1">
-            <a:off x="12124944" y="5266944"/>
-            <a:ext cx="128016" cy="2103120"/>
-          </a:xfrm>
-          <a:prstGeom prst="line">
-            <a:avLst/>
-          </a:prstGeom>
-          <a:noFill/>
-          <a:ln w="57150">
-            <a:solidFill>
-              <a:srgbClr val="8B83E8"/>
-            </a:solidFill>
-            <a:prstDash val="solid"/>
-          </a:ln>
-        </p:spPr>
-      </p:sp>
-      <p:sp>
-        <p:nvSpPr>
-          <p:cNvPr id="24" name="Shape 22"/>
-          <p:cNvSpPr/>
-          <p:nvPr/>
-        </p:nvSpPr>
-        <p:spPr>
-          <a:xfrm flipH="1" flipV="1">
-            <a:off x="12124944" y="4206240"/>
-            <a:ext cx="128016" cy="1060704"/>
-          </a:xfrm>
-          <a:prstGeom prst="line">
-            <a:avLst/>
-          </a:prstGeom>
-          <a:noFill/>
-          <a:ln w="57150">
-            <a:solidFill>
-              <a:srgbClr val="8B83E8"/>
-            </a:solidFill>
-            <a:prstDash val="solid"/>
-          </a:ln>
-        </p:spPr>
-      </p:sp>
-      <p:sp>
-        <p:nvSpPr>
-          <p:cNvPr id="25" name="Shape 23"/>
-          <p:cNvSpPr/>
-          <p:nvPr/>
-        </p:nvSpPr>
-        <p:spPr>
-          <a:xfrm>
-            <a:off x="14502384" y="4169664"/>
-            <a:ext cx="402336" cy="694944"/>
-          </a:xfrm>
-          <a:prstGeom prst="line">
-            <a:avLst/>
-          </a:prstGeom>
-          <a:noFill/>
-          <a:ln w="57150">
-            <a:solidFill>
-              <a:srgbClr val="8B83E8"/>
-            </a:solidFill>
-            <a:prstDash val="solid"/>
-          </a:ln>
-        </p:spPr>
-      </p:sp>
-      <p:sp>
-        <p:nvSpPr>
-          <p:cNvPr id="26" name="Shape 24"/>
-          <p:cNvSpPr/>
-          <p:nvPr/>
-        </p:nvSpPr>
-        <p:spPr>
-          <a:xfrm flipH="1">
-            <a:off x="15416784" y="5175504"/>
-            <a:ext cx="182880" cy="548640"/>
-          </a:xfrm>
-          <a:prstGeom prst="line">
-            <a:avLst/>
-          </a:prstGeom>
-          <a:noFill/>
-          <a:ln w="57150">
-            <a:solidFill>
-              <a:srgbClr val="DE6488"/>
-            </a:solidFill>
-            <a:prstDash val="solid"/>
-          </a:ln>
-        </p:spPr>
-      </p:sp>
-      <p:sp>
-        <p:nvSpPr>
-          <p:cNvPr id="27" name="Shape 25"/>
-          <p:cNvSpPr/>
-          <p:nvPr/>
-        </p:nvSpPr>
-        <p:spPr>
-          <a:xfrm>
-            <a:off x="15416784" y="5724144"/>
-            <a:ext cx="219456" cy="1280160"/>
-          </a:xfrm>
-          <a:prstGeom prst="line">
-            <a:avLst/>
-          </a:prstGeom>
-          <a:noFill/>
-          <a:ln w="57150">
-            <a:solidFill>
-              <a:srgbClr val="DE6488"/>
-            </a:solidFill>
-            <a:prstDash val="solid"/>
-          </a:ln>
-        </p:spPr>
-      </p:sp>
-      <p:sp>
-        <p:nvSpPr>
-          <p:cNvPr id="28" name="Shape 26"/>
-          <p:cNvSpPr/>
-          <p:nvPr/>
-        </p:nvSpPr>
-        <p:spPr>
-          <a:xfrm flipH="1">
-            <a:off x="15453360" y="7004304"/>
-            <a:ext cx="182880" cy="822960"/>
-          </a:xfrm>
-          <a:prstGeom prst="line">
-            <a:avLst/>
-          </a:prstGeom>
-          <a:noFill/>
-          <a:ln w="57150">
-            <a:solidFill>
-              <a:srgbClr val="DE6488"/>
-            </a:solidFill>
-            <a:prstDash val="solid"/>
-          </a:ln>
-        </p:spPr>
-      </p:sp>
-      <p:sp>
-        <p:nvSpPr>
-          <p:cNvPr id="29" name="Shape 27"/>
-          <p:cNvSpPr/>
-          <p:nvPr/>
-        </p:nvSpPr>
-        <p:spPr>
-          <a:xfrm>
-            <a:off x="15453360" y="7827264"/>
-            <a:ext cx="329184" cy="585216"/>
-          </a:xfrm>
-          <a:prstGeom prst="line">
-            <a:avLst/>
-          </a:prstGeom>
-          <a:noFill/>
-          <a:ln w="57150">
-            <a:solidFill>
-              <a:srgbClr val="DE6488"/>
-            </a:solidFill>
-            <a:prstDash val="solid"/>
-          </a:ln>
-        </p:spPr>
-      </p:sp>
-      <p:sp>
-        <p:nvSpPr>
-          <p:cNvPr id="30" name="Shape 28"/>
-          <p:cNvSpPr/>
-          <p:nvPr/>
-        </p:nvSpPr>
-        <p:spPr>
-          <a:xfrm>
-            <a:off x="14447520" y="7004304"/>
-            <a:ext cx="310896" cy="731520"/>
-          </a:xfrm>
-          <a:prstGeom prst="line">
-            <a:avLst/>
-          </a:prstGeom>
-          <a:noFill/>
-          <a:ln w="57150">
-            <a:solidFill>
-              <a:srgbClr val="EFA13B"/>
-            </a:solidFill>
-            <a:prstDash val="solid"/>
-          </a:ln>
-        </p:spPr>
-      </p:sp>
-      <p:sp>
-        <p:nvSpPr>
-          <p:cNvPr id="31" name="Shape 29"/>
-          <p:cNvSpPr/>
-          <p:nvPr/>
-        </p:nvSpPr>
-        <p:spPr>
-          <a:xfrm>
-            <a:off x="14758416" y="7735824"/>
-            <a:ext cx="329184" cy="640080"/>
-          </a:xfrm>
-          <a:prstGeom prst="line">
-            <a:avLst/>
-          </a:prstGeom>
-          <a:noFill/>
-          <a:ln w="57150">
-            <a:solidFill>
-              <a:srgbClr val="EFA13B"/>
-            </a:solidFill>
-            <a:prstDash val="solid"/>
-          </a:ln>
-        </p:spPr>
-      </p:sp>
-      <p:sp>
-        <p:nvSpPr>
-          <p:cNvPr id="32" name="Shape 30"/>
-          <p:cNvSpPr/>
-          <p:nvPr/>
-        </p:nvSpPr>
-        <p:spPr>
-          <a:xfrm>
-            <a:off x="10817352" y="4032504"/>
-            <a:ext cx="201168" cy="201168"/>
-          </a:xfrm>
-          <a:prstGeom prst="ellipse">
-            <a:avLst/>
-          </a:prstGeom>
-          <a:solidFill>
-            <a:srgbClr val="4D9DE0"/>
-          </a:solidFill>
-          <a:ln w="19050">
-            <a:solidFill>
-              <a:srgbClr val="0D0F14"/>
-            </a:solidFill>
-            <a:prstDash val="solid"/>
-          </a:ln>
-        </p:spPr>
-      </p:sp>
-      <p:sp>
-        <p:nvSpPr>
-          <p:cNvPr id="33" name="Shape 31"/>
-          <p:cNvSpPr/>
-          <p:nvPr/>
-        </p:nvSpPr>
-        <p:spPr>
-          <a:xfrm>
-            <a:off x="10963656" y="4764024"/>
-            <a:ext cx="201168" cy="201168"/>
-          </a:xfrm>
-          <a:prstGeom prst="ellipse">
-            <a:avLst/>
-          </a:prstGeom>
-          <a:solidFill>
-            <a:srgbClr val="4D9DE0"/>
-          </a:solidFill>
-          <a:ln w="19050">
-            <a:solidFill>
-              <a:srgbClr val="0D0F14"/>
-            </a:solidFill>
-            <a:prstDash val="solid"/>
-          </a:ln>
-        </p:spPr>
-      </p:sp>
-      <p:sp>
-        <p:nvSpPr>
-          <p:cNvPr id="34" name="Shape 32"/>
-          <p:cNvSpPr/>
-          <p:nvPr/>
-        </p:nvSpPr>
-        <p:spPr>
-          <a:xfrm>
-            <a:off x="10872216" y="6775704"/>
-            <a:ext cx="201168" cy="201168"/>
-          </a:xfrm>
-          <a:prstGeom prst="ellipse">
-            <a:avLst/>
-          </a:prstGeom>
-          <a:solidFill>
-            <a:srgbClr val="4D9DE0"/>
-          </a:solidFill>
-          <a:ln w="19050">
-            <a:solidFill>
-              <a:srgbClr val="0D0F14"/>
-            </a:solidFill>
-            <a:prstDash val="solid"/>
-          </a:ln>
-        </p:spPr>
-      </p:sp>
-      <p:sp>
-        <p:nvSpPr>
-          <p:cNvPr id="35" name="Shape 33"/>
-          <p:cNvSpPr/>
-          <p:nvPr/>
-        </p:nvSpPr>
-        <p:spPr>
-          <a:xfrm>
-            <a:off x="11018520" y="7543800"/>
-            <a:ext cx="201168" cy="201168"/>
-          </a:xfrm>
-          <a:prstGeom prst="ellipse">
-            <a:avLst/>
-          </a:prstGeom>
-          <a:solidFill>
-            <a:srgbClr val="4D9DE0"/>
-          </a:solidFill>
-          <a:ln w="19050">
-            <a:solidFill>
-              <a:srgbClr val="0D0F14"/>
-            </a:solidFill>
-            <a:prstDash val="solid"/>
-          </a:ln>
-        </p:spPr>
-      </p:sp>
-      <p:sp>
-        <p:nvSpPr>
-          <p:cNvPr id="36" name="Shape 34"/>
-          <p:cNvSpPr/>
-          <p:nvPr/>
-        </p:nvSpPr>
-        <p:spPr>
-          <a:xfrm>
-            <a:off x="11548872" y="7818120"/>
-            <a:ext cx="201168" cy="201168"/>
-          </a:xfrm>
-          <a:prstGeom prst="ellipse">
-            <a:avLst/>
-          </a:prstGeom>
-          <a:solidFill>
-            <a:srgbClr val="EFA13B"/>
-          </a:solidFill>
-          <a:ln w="19050">
-            <a:solidFill>
-              <a:srgbClr val="0D0F14"/>
-            </a:solidFill>
-            <a:prstDash val="solid"/>
-          </a:ln>
-        </p:spPr>
-      </p:sp>
-      <p:sp>
-        <p:nvSpPr>
-          <p:cNvPr id="37" name="Shape 35"/>
-          <p:cNvSpPr/>
-          <p:nvPr/>
-        </p:nvSpPr>
-        <p:spPr>
-          <a:xfrm>
-            <a:off x="11786616" y="8311896"/>
-            <a:ext cx="201168" cy="201168"/>
-          </a:xfrm>
-          <a:prstGeom prst="ellipse">
-            <a:avLst/>
-          </a:prstGeom>
-          <a:solidFill>
-            <a:srgbClr val="EFA13B"/>
-          </a:solidFill>
-          <a:ln w="19050">
-            <a:solidFill>
-              <a:srgbClr val="0D0F14"/>
-            </a:solidFill>
-            <a:prstDash val="solid"/>
-          </a:ln>
-        </p:spPr>
-      </p:sp>
-      <p:sp>
-        <p:nvSpPr>
-          <p:cNvPr id="38" name="Shape 36"/>
-          <p:cNvSpPr/>
-          <p:nvPr/>
-        </p:nvSpPr>
-        <p:spPr>
-          <a:xfrm>
-            <a:off x="12152376" y="8183880"/>
-            <a:ext cx="201168" cy="201168"/>
-          </a:xfrm>
-          <a:prstGeom prst="ellipse">
-            <a:avLst/>
-          </a:prstGeom>
-          <a:solidFill>
-            <a:srgbClr val="8B83E8"/>
-          </a:solidFill>
-          <a:ln w="19050">
-            <a:solidFill>
-              <a:srgbClr val="0D0F14"/>
-            </a:solidFill>
-            <a:prstDash val="solid"/>
-          </a:ln>
-        </p:spPr>
-      </p:sp>
-      <p:sp>
-        <p:nvSpPr>
-          <p:cNvPr id="39" name="Shape 37"/>
-          <p:cNvSpPr/>
-          <p:nvPr/>
-        </p:nvSpPr>
-        <p:spPr>
-          <a:xfrm>
-            <a:off x="12024360" y="7269480"/>
-            <a:ext cx="201168" cy="201168"/>
-          </a:xfrm>
-          <a:prstGeom prst="ellipse">
-            <a:avLst/>
-          </a:prstGeom>
-          <a:solidFill>
-            <a:srgbClr val="8B83E8"/>
-          </a:solidFill>
-          <a:ln w="19050">
-            <a:solidFill>
-              <a:srgbClr val="0D0F14"/>
-            </a:solidFill>
-            <a:prstDash val="solid"/>
-          </a:ln>
-        </p:spPr>
-      </p:sp>
-      <p:sp>
-        <p:nvSpPr>
-          <p:cNvPr id="40" name="Shape 38"/>
-          <p:cNvSpPr/>
-          <p:nvPr/>
-        </p:nvSpPr>
-        <p:spPr>
-          <a:xfrm>
-            <a:off x="12152376" y="5166360"/>
-            <a:ext cx="201168" cy="201168"/>
-          </a:xfrm>
-          <a:prstGeom prst="ellipse">
-            <a:avLst/>
-          </a:prstGeom>
-          <a:solidFill>
-            <a:srgbClr val="8B83E8"/>
-          </a:solidFill>
-          <a:ln w="19050">
-            <a:solidFill>
-              <a:srgbClr val="0D0F14"/>
-            </a:solidFill>
-            <a:prstDash val="solid"/>
-          </a:ln>
-        </p:spPr>
-      </p:sp>
-      <p:sp>
-        <p:nvSpPr>
-          <p:cNvPr id="41" name="Shape 39"/>
-          <p:cNvSpPr/>
-          <p:nvPr/>
-        </p:nvSpPr>
-        <p:spPr>
-          <a:xfrm>
-            <a:off x="12024360" y="4105656"/>
-            <a:ext cx="201168" cy="201168"/>
-          </a:xfrm>
-          <a:prstGeom prst="ellipse">
-            <a:avLst/>
-          </a:prstGeom>
-          <a:solidFill>
-            <a:srgbClr val="8B83E8"/>
-          </a:solidFill>
-          <a:ln w="19050">
-            <a:solidFill>
-              <a:srgbClr val="0D0F14"/>
-            </a:solidFill>
-            <a:prstDash val="solid"/>
-          </a:ln>
-        </p:spPr>
-      </p:sp>
-      <p:sp>
-        <p:nvSpPr>
-          <p:cNvPr id="42" name="Shape 40"/>
-          <p:cNvSpPr/>
-          <p:nvPr/>
-        </p:nvSpPr>
-        <p:spPr>
-          <a:xfrm>
-            <a:off x="14401800" y="4069080"/>
-            <a:ext cx="201168" cy="201168"/>
-          </a:xfrm>
-          <a:prstGeom prst="ellipse">
-            <a:avLst/>
-          </a:prstGeom>
-          <a:solidFill>
-            <a:srgbClr val="8B83E8"/>
-          </a:solidFill>
-          <a:ln w="19050">
-            <a:solidFill>
-              <a:srgbClr val="0D0F14"/>
-            </a:solidFill>
-            <a:prstDash val="solid"/>
-          </a:ln>
-        </p:spPr>
-      </p:sp>
-      <p:sp>
-        <p:nvSpPr>
-          <p:cNvPr id="43" name="Shape 41"/>
-          <p:cNvSpPr/>
-          <p:nvPr/>
-        </p:nvSpPr>
-        <p:spPr>
-          <a:xfrm>
-            <a:off x="14804136" y="4764024"/>
-            <a:ext cx="201168" cy="201168"/>
-          </a:xfrm>
-          <a:prstGeom prst="ellipse">
-            <a:avLst/>
-          </a:prstGeom>
-          <a:solidFill>
-            <a:srgbClr val="8B83E8"/>
-          </a:solidFill>
-          <a:ln w="19050">
-            <a:solidFill>
-              <a:srgbClr val="0D0F14"/>
-            </a:solidFill>
-            <a:prstDash val="solid"/>
-          </a:ln>
-        </p:spPr>
-      </p:sp>
-      <p:sp>
-        <p:nvSpPr>
-          <p:cNvPr id="44" name="Shape 42"/>
-          <p:cNvSpPr/>
-          <p:nvPr/>
-        </p:nvSpPr>
-        <p:spPr>
-          <a:xfrm>
-            <a:off x="14346936" y="6903720"/>
-            <a:ext cx="201168" cy="201168"/>
-          </a:xfrm>
-          <a:prstGeom prst="ellipse">
-            <a:avLst/>
-          </a:prstGeom>
-          <a:solidFill>
-            <a:srgbClr val="EFA13B"/>
-          </a:solidFill>
-          <a:ln w="19050">
-            <a:solidFill>
-              <a:srgbClr val="0D0F14"/>
-            </a:solidFill>
-            <a:prstDash val="solid"/>
-          </a:ln>
-        </p:spPr>
-      </p:sp>
-      <p:sp>
-        <p:nvSpPr>
-          <p:cNvPr id="45" name="Shape 43"/>
-          <p:cNvSpPr/>
-          <p:nvPr/>
-        </p:nvSpPr>
-        <p:spPr>
-          <a:xfrm>
-            <a:off x="14657832" y="7635240"/>
-            <a:ext cx="201168" cy="201168"/>
-          </a:xfrm>
-          <a:prstGeom prst="ellipse">
-            <a:avLst/>
-          </a:prstGeom>
-          <a:solidFill>
-            <a:srgbClr val="EFA13B"/>
-          </a:solidFill>
-          <a:ln w="19050">
-            <a:solidFill>
-              <a:srgbClr val="0D0F14"/>
-            </a:solidFill>
-            <a:prstDash val="solid"/>
-          </a:ln>
-        </p:spPr>
-      </p:sp>
-      <p:sp>
-        <p:nvSpPr>
-          <p:cNvPr id="46" name="Shape 44"/>
-          <p:cNvSpPr/>
-          <p:nvPr/>
-        </p:nvSpPr>
-        <p:spPr>
-          <a:xfrm>
-            <a:off x="14987016" y="8275320"/>
-            <a:ext cx="201168" cy="201168"/>
-          </a:xfrm>
-          <a:prstGeom prst="ellipse">
-            <a:avLst/>
-          </a:prstGeom>
-          <a:solidFill>
-            <a:srgbClr val="EFA13B"/>
-          </a:solidFill>
-          <a:ln w="19050">
-            <a:solidFill>
-              <a:srgbClr val="0D0F14"/>
-            </a:solidFill>
-            <a:prstDash val="solid"/>
-          </a:ln>
-        </p:spPr>
-      </p:sp>
-      <p:sp>
-        <p:nvSpPr>
-          <p:cNvPr id="47" name="Shape 45"/>
-          <p:cNvSpPr/>
-          <p:nvPr/>
-        </p:nvSpPr>
-        <p:spPr>
-          <a:xfrm>
-            <a:off x="15499080" y="5074920"/>
-            <a:ext cx="201168" cy="201168"/>
-          </a:xfrm>
-          <a:prstGeom prst="ellipse">
-            <a:avLst/>
-          </a:prstGeom>
-          <a:solidFill>
-            <a:srgbClr val="DE6488"/>
-          </a:solidFill>
-          <a:ln w="19050">
-            <a:solidFill>
-              <a:srgbClr val="0D0F14"/>
-            </a:solidFill>
-            <a:prstDash val="solid"/>
-          </a:ln>
-        </p:spPr>
-      </p:sp>
-      <p:sp>
-        <p:nvSpPr>
-          <p:cNvPr id="48" name="Shape 46"/>
-          <p:cNvSpPr/>
-          <p:nvPr/>
-        </p:nvSpPr>
-        <p:spPr>
-          <a:xfrm>
-            <a:off x="15316200" y="5623560"/>
-            <a:ext cx="201168" cy="201168"/>
-          </a:xfrm>
-          <a:prstGeom prst="ellipse">
-            <a:avLst/>
-          </a:prstGeom>
-          <a:solidFill>
-            <a:srgbClr val="DE6488"/>
-          </a:solidFill>
-          <a:ln w="19050">
-            <a:solidFill>
-              <a:srgbClr val="0D0F14"/>
-            </a:solidFill>
-            <a:prstDash val="solid"/>
-          </a:ln>
-        </p:spPr>
-      </p:sp>
-      <p:sp>
-        <p:nvSpPr>
-          <p:cNvPr id="49" name="Shape 47"/>
-          <p:cNvSpPr/>
-          <p:nvPr/>
-        </p:nvSpPr>
-        <p:spPr>
-          <a:xfrm>
-            <a:off x="15535656" y="6903720"/>
-            <a:ext cx="201168" cy="201168"/>
-          </a:xfrm>
-          <a:prstGeom prst="ellipse">
-            <a:avLst/>
-          </a:prstGeom>
-          <a:solidFill>
-            <a:srgbClr val="DE6488"/>
-          </a:solidFill>
-          <a:ln w="19050">
-            <a:solidFill>
-              <a:srgbClr val="0D0F14"/>
-            </a:solidFill>
-            <a:prstDash val="solid"/>
-          </a:ln>
-        </p:spPr>
-      </p:sp>
-      <p:sp>
-        <p:nvSpPr>
-          <p:cNvPr id="50" name="Shape 48"/>
-          <p:cNvSpPr/>
-          <p:nvPr/>
-        </p:nvSpPr>
-        <p:spPr>
-          <a:xfrm>
-            <a:off x="15352776" y="7726680"/>
-            <a:ext cx="201168" cy="201168"/>
-          </a:xfrm>
-          <a:prstGeom prst="ellipse">
-            <a:avLst/>
-          </a:prstGeom>
-          <a:solidFill>
-            <a:srgbClr val="DE6488"/>
-          </a:solidFill>
-          <a:ln w="19050">
-            <a:solidFill>
-              <a:srgbClr val="0D0F14"/>
-            </a:solidFill>
-            <a:prstDash val="solid"/>
-          </a:ln>
-        </p:spPr>
-      </p:sp>
-      <p:sp>
-        <p:nvSpPr>
-          <p:cNvPr id="51" name="Shape 49"/>
-          <p:cNvSpPr/>
-          <p:nvPr/>
-        </p:nvSpPr>
-        <p:spPr>
-          <a:xfrm>
-            <a:off x="15681960" y="8311896"/>
-            <a:ext cx="201168" cy="201168"/>
-          </a:xfrm>
-          <a:prstGeom prst="ellipse">
-            <a:avLst/>
-          </a:prstGeom>
-          <a:solidFill>
-            <a:srgbClr val="DE6488"/>
-          </a:solidFill>
-          <a:ln w="19050">
-            <a:solidFill>
-              <a:srgbClr val="0D0F14"/>
-            </a:solidFill>
-            <a:prstDash val="solid"/>
-          </a:ln>
-        </p:spPr>
-      </p:sp>
-      <p:sp>
-        <p:nvSpPr>
-          <p:cNvPr id="52" name="Text 50"/>
-          <p:cNvSpPr/>
-          <p:nvPr/>
-        </p:nvSpPr>
-        <p:spPr>
-          <a:xfrm>
-            <a:off x="1097280" y="3200400"/>
-            <a:ext cx="7863840" cy="3383280"/>
+              <a:t>Carga</a:t>
+            </a:r>
+            <a:endParaRPr lang="en-US" sz="3200" dirty="0"/>
+          </a:p>
+        </p:txBody>
+      </p:sp>
+      <p:sp>
+        <p:nvSpPr>
+          <p:cNvPr id="8" name="Text 6"/>
+          <p:cNvSpPr/>
+          <p:nvPr/>
+        </p:nvSpPr>
+        <p:spPr>
+          <a:xfrm>
+            <a:off x="1499616" y="5705856"/>
+            <a:ext cx="3072384" cy="2286000"/>
           </a:xfrm>
           <a:prstGeom prst="rect">
             <a:avLst/>
@@ -12844,18 +12479,172 @@
               <a:buNone/>
             </a:pPr>
             <a:r>
-              <a:rPr lang="en-US" sz="2700" b="1" dirty="0">
-                <a:solidFill>
-                  <a:srgbClr val="E8EAF0"/>
+              <a:rPr lang="en-US" sz="2300" dirty="0">
+                <a:solidFill>
+                  <a:srgbClr val="6A7A72"/>
                 </a:solidFill>
                 <a:latin typeface="Arial" pitchFamily="34" charset="0"/>
                 <a:ea typeface="Arial" pitchFamily="34" charset="-122"/>
                 <a:cs typeface="Arial" pitchFamily="34" charset="-120"/>
               </a:rPr>
-              <a:t>Las 20 paradas y sus desplazamientos cortos no cambian. </a:t>
-            </a:r>
-            <a:endParaRPr lang="en-US" sz="2700" dirty="0"/>
-          </a:p>
+              <a:t>el CSV del mes de la colmena: rutas, paradas y orden de entrega</a:t>
+            </a:r>
+            <a:endParaRPr lang="en-US" sz="2300" dirty="0"/>
+          </a:p>
+        </p:txBody>
+      </p:sp>
+      <p:sp>
+        <p:nvSpPr>
+          <p:cNvPr id="9" name="Shape 7"/>
+          <p:cNvSpPr/>
+          <p:nvPr/>
+        </p:nvSpPr>
+        <p:spPr>
+          <a:xfrm>
+            <a:off x="5266944" y="3291840"/>
+            <a:ext cx="3803904" cy="4937760"/>
+          </a:xfrm>
+          <a:prstGeom prst="roundRect">
+            <a:avLst>
+              <a:gd name="adj" fmla="val 2885"/>
+            </a:avLst>
+          </a:prstGeom>
+          <a:solidFill>
+            <a:srgbClr val="FBFAF5"/>
+          </a:solidFill>
+          <a:ln w="25400">
+            <a:solidFill>
+              <a:srgbClr val="CFC7B5"/>
+            </a:solidFill>
+            <a:prstDash val="solid"/>
+          </a:ln>
+        </p:spPr>
+      </p:sp>
+      <p:sp>
+        <p:nvSpPr>
+          <p:cNvPr id="10" name="Shape 8"/>
+          <p:cNvSpPr/>
+          <p:nvPr/>
+        </p:nvSpPr>
+        <p:spPr>
+          <a:xfrm>
+            <a:off x="5669280" y="3749040"/>
+            <a:ext cx="914400" cy="914400"/>
+          </a:xfrm>
+          <a:prstGeom prst="ellipse">
+            <a:avLst/>
+          </a:prstGeom>
+          <a:solidFill>
+            <a:srgbClr val="0D0F14">
+              <a:alpha val="0"/>
+            </a:srgbClr>
+          </a:solidFill>
+          <a:ln w="44450">
+            <a:solidFill>
+              <a:srgbClr val="C1432E"/>
+            </a:solidFill>
+            <a:prstDash val="solid"/>
+          </a:ln>
+        </p:spPr>
+      </p:sp>
+      <p:sp>
+        <p:nvSpPr>
+          <p:cNvPr id="11" name="Text 9"/>
+          <p:cNvSpPr/>
+          <p:nvPr/>
+        </p:nvSpPr>
+        <p:spPr>
+          <a:xfrm>
+            <a:off x="5669280" y="3749040"/>
+            <a:ext cx="914400" cy="914400"/>
+          </a:xfrm>
+          <a:prstGeom prst="rect">
+            <a:avLst/>
+          </a:prstGeom>
+          <a:noFill/>
+          <a:ln/>
+        </p:spPr>
+        <p:txBody>
+          <a:bodyPr wrap="square" lIns="0" tIns="0" rIns="0" bIns="0" rtlCol="0" anchor="ctr"/>
+          <a:lstStyle/>
+          <a:p>
+            <a:pPr algn="ctr" indent="0" marL="0">
+              <a:buNone/>
+            </a:pPr>
+            <a:r>
+              <a:rPr lang="en-US" sz="3600" b="1" dirty="0">
+                <a:solidFill>
+                  <a:srgbClr val="C1432E"/>
+                </a:solidFill>
+                <a:latin typeface="Courier New" pitchFamily="34" charset="0"/>
+                <a:ea typeface="Courier New" pitchFamily="34" charset="-122"/>
+                <a:cs typeface="Courier New" pitchFamily="34" charset="-120"/>
+              </a:rPr>
+              <a:t>2</a:t>
+            </a:r>
+            <a:endParaRPr lang="en-US" sz="3600" dirty="0"/>
+          </a:p>
+        </p:txBody>
+      </p:sp>
+      <p:sp>
+        <p:nvSpPr>
+          <p:cNvPr id="12" name="Text 10"/>
+          <p:cNvSpPr/>
+          <p:nvPr/>
+        </p:nvSpPr>
+        <p:spPr>
+          <a:xfrm>
+            <a:off x="5669280" y="4974336"/>
+            <a:ext cx="3108960" cy="640080"/>
+          </a:xfrm>
+          <a:prstGeom prst="rect">
+            <a:avLst/>
+          </a:prstGeom>
+          <a:noFill/>
+          <a:ln/>
+        </p:spPr>
+        <p:txBody>
+          <a:bodyPr wrap="square" lIns="0" tIns="0" rIns="0" bIns="0" rtlCol="0" anchor="ctr"/>
+          <a:lstStyle/>
+          <a:p>
+            <a:pPr indent="0" marL="0">
+              <a:buNone/>
+            </a:pPr>
+            <a:r>
+              <a:rPr lang="en-US" sz="3200" b="1" dirty="0">
+                <a:solidFill>
+                  <a:srgbClr val="0F1D18"/>
+                </a:solidFill>
+                <a:latin typeface="Arial" pitchFamily="34" charset="0"/>
+                <a:ea typeface="Arial" pitchFamily="34" charset="-122"/>
+                <a:cs typeface="Arial" pitchFamily="34" charset="-120"/>
+              </a:rPr>
+              <a:t>Detecta</a:t>
+            </a:r>
+            <a:endParaRPr lang="en-US" sz="3200" dirty="0"/>
+          </a:p>
+        </p:txBody>
+      </p:sp>
+      <p:sp>
+        <p:nvSpPr>
+          <p:cNvPr id="13" name="Text 11"/>
+          <p:cNvSpPr/>
+          <p:nvPr/>
+        </p:nvSpPr>
+        <p:spPr>
+          <a:xfrm>
+            <a:off x="5669280" y="5705856"/>
+            <a:ext cx="3072384" cy="2286000"/>
+          </a:xfrm>
+          <a:prstGeom prst="rect">
+            <a:avLst/>
+          </a:prstGeom>
+          <a:noFill/>
+          <a:ln/>
+        </p:spPr>
+        <p:txBody>
+          <a:bodyPr wrap="square" lIns="0" tIns="0" rIns="0" bIns="0" rtlCol="0" anchor="ctr"/>
+          <a:lstStyle/>
           <a:p>
             <a:pPr indent="0" marL="0">
               <a:lnSpc>
@@ -12863,810 +12652,30 @@
               </a:lnSpc>
               <a:buNone/>
             </a:pPr>
-            <a:endParaRPr lang="en-US" sz="2700" dirty="0"/>
-          </a:p>
-          <a:p>
-            <a:pPr indent="0" marL="0">
-              <a:lnSpc>
-                <a:spcPct val="113000"/>
-              </a:lnSpc>
-              <a:buNone/>
-            </a:pPr>
-            <a:r>
-              <a:rPr lang="en-US" sz="2700" dirty="0">
-                <a:solidFill>
-                  <a:srgbClr val="8B92A5"/>
+            <a:r>
+              <a:rPr lang="en-US" sz="2300" dirty="0">
+                <a:solidFill>
+                  <a:srgbClr val="6A7A72"/>
                 </a:solidFill>
                 <a:latin typeface="Arial" pitchFamily="34" charset="0"/>
                 <a:ea typeface="Arial" pitchFamily="34" charset="-122"/>
                 <a:cs typeface="Arial" pitchFamily="34" charset="-120"/>
               </a:rPr>
-              <a:t>El corredor solo quita de la cuenta los dos saltos: nadie tiene que cruzar la frontera para entregar. Cómo se organizan las rutas de cada día dentro de su corredor lo sigue decidiendo la operación, como siempre.</a:t>
-            </a:r>
-            <a:endParaRPr lang="en-US" sz="2700" dirty="0"/>
-          </a:p>
-        </p:txBody>
-      </p:sp>
-      <p:sp>
-        <p:nvSpPr>
-          <p:cNvPr id="53" name="Shape 51"/>
-          <p:cNvSpPr/>
-          <p:nvPr/>
-        </p:nvSpPr>
-        <p:spPr>
-          <a:xfrm>
-            <a:off x="1097280" y="7022592"/>
-            <a:ext cx="6949440" cy="1828"/>
-          </a:xfrm>
-          <a:prstGeom prst="line">
-            <a:avLst/>
-          </a:prstGeom>
-          <a:noFill/>
-          <a:ln w="25400">
-            <a:solidFill>
-              <a:srgbClr val="2A3040"/>
-            </a:solidFill>
-            <a:prstDash val="solid"/>
-          </a:ln>
-        </p:spPr>
-      </p:sp>
-      <p:sp>
-        <p:nvSpPr>
-          <p:cNvPr id="54" name="Text 52"/>
-          <p:cNvSpPr/>
-          <p:nvPr/>
-        </p:nvSpPr>
-        <p:spPr>
-          <a:xfrm>
-            <a:off x="1097280" y="7315200"/>
-            <a:ext cx="7863840" cy="914400"/>
-          </a:xfrm>
-          <a:prstGeom prst="rect">
-            <a:avLst/>
-          </a:prstGeom>
-          <a:noFill/>
-          <a:ln/>
-        </p:spPr>
-        <p:txBody>
-          <a:bodyPr wrap="square" lIns="0" tIns="0" rIns="0" bIns="0" rtlCol="0" anchor="ctr"/>
-          <a:lstStyle/>
-          <a:p>
-            <a:pPr indent="0" marL="0">
-              <a:buNone/>
-            </a:pPr>
-            <a:r>
-              <a:rPr lang="en-US" sz="4200" dirty="0">
-                <a:solidFill>
-                  <a:srgbClr val="E8EAF0"/>
-                </a:solidFill>
-                <a:latin typeface="Courier New" pitchFamily="34" charset="0"/>
-                <a:ea typeface="Courier New" pitchFamily="34" charset="-122"/>
-                <a:cs typeface="Courier New" pitchFamily="34" charset="-120"/>
-              </a:rPr>
-              <a:t>50 − 25</a:t>
-            </a:r>
-            <a:pPr indent="0" marL="0">
-              <a:buNone/>
-            </a:pPr>
-            <a:r>
-              <a:rPr lang="en-US" sz="2600" dirty="0">
-                <a:solidFill>
-                  <a:srgbClr val="E8554D"/>
-                </a:solidFill>
-                <a:latin typeface="Courier New" pitchFamily="34" charset="0"/>
-                <a:ea typeface="Courier New" pitchFamily="34" charset="-122"/>
-                <a:cs typeface="Courier New" pitchFamily="34" charset="-120"/>
-              </a:rPr>
-              <a:t> saltos </a:t>
-            </a:r>
-            <a:pPr indent="0" marL="0">
-              <a:buNone/>
-            </a:pPr>
-            <a:r>
-              <a:rPr lang="en-US" sz="4200" b="1" dirty="0">
-                <a:solidFill>
-                  <a:srgbClr val="34D399"/>
-                </a:solidFill>
-                <a:latin typeface="Courier New" pitchFamily="34" charset="0"/>
-                <a:ea typeface="Courier New" pitchFamily="34" charset="-122"/>
-                <a:cs typeface="Courier New" pitchFamily="34" charset="-120"/>
-              </a:rPr>
-              <a:t>= 25 km</a:t>
-            </a:r>
-            <a:endParaRPr lang="en-US" sz="4200" dirty="0"/>
-          </a:p>
-        </p:txBody>
-      </p:sp>
-      <p:sp>
-        <p:nvSpPr>
-          <p:cNvPr id="55" name="Text 53"/>
-          <p:cNvSpPr/>
-          <p:nvPr/>
-        </p:nvSpPr>
-        <p:spPr>
-          <a:xfrm>
-            <a:off x="1097280" y="8412480"/>
-            <a:ext cx="7863840" cy="1005840"/>
-          </a:xfrm>
-          <a:prstGeom prst="rect">
-            <a:avLst/>
-          </a:prstGeom>
-          <a:noFill/>
-          <a:ln/>
-        </p:spPr>
-        <p:txBody>
-          <a:bodyPr wrap="square" lIns="0" tIns="0" rIns="0" bIns="0" rtlCol="0" anchor="ctr"/>
-          <a:lstStyle/>
-          <a:p>
-            <a:pPr indent="0" marL="0">
-              <a:buNone/>
-            </a:pPr>
-            <a:r>
-              <a:rPr lang="en-US" sz="2500" i="1" dirty="0">
-                <a:solidFill>
-                  <a:srgbClr val="8B92A5"/>
-                </a:solidFill>
-                <a:latin typeface="Arial" pitchFamily="34" charset="0"/>
-                <a:ea typeface="Arial" pitchFamily="34" charset="-122"/>
-                <a:cs typeface="Arial" pitchFamily="34" charset="-120"/>
-              </a:rPr>
-              <a:t>los dos tramos rojos desaparecen del día; nadie vuelve a recorrerlos</a:t>
-            </a:r>
-            <a:endParaRPr lang="en-US" sz="2500" dirty="0"/>
-          </a:p>
-        </p:txBody>
-      </p:sp>
-    </p:spTree>
-  </p:cSld>
-  <p:clrMapOvr>
-    <a:masterClrMapping/>
-  </p:clrMapOvr>
-</p:sld>
-</file>
-
-<file path=ppt/slides/slide22.xml><?xml version="1.0" encoding="utf-8"?>
-<p:sld xmlns:a="http://schemas.openxmlformats.org/drawingml/2006/main" xmlns:r="http://schemas.openxmlformats.org/officeDocument/2006/relationships" xmlns:p="http://schemas.openxmlformats.org/presentationml/2006/main">
-  <p:cSld name="Slide 8">
-    <p:bg>
-      <p:bgPr>
-        <a:solidFill>
-          <a:srgbClr val="0D0F14"/>
-        </a:solidFill>
-      </p:bgPr>
-    </p:bg>
-    <p:spTree>
-      <p:nvGrpSpPr>
-        <p:cNvPr id="1" name=""/>
-        <p:cNvGrpSpPr/>
-        <p:nvPr/>
-      </p:nvGrpSpPr>
-      <p:grpSpPr>
-        <a:xfrm>
-          <a:off x="0" y="0"/>
-          <a:ext cx="0" cy="0"/>
-          <a:chOff x="0" y="0"/>
-          <a:chExt cx="0" cy="0"/>
-        </a:xfrm>
-      </p:grpSpPr>
-      <p:sp>
-        <p:nvSpPr>
-          <p:cNvPr id="2" name="Text 0"/>
-          <p:cNvSpPr/>
-          <p:nvPr/>
-        </p:nvSpPr>
-        <p:spPr>
-          <a:xfrm>
-            <a:off x="1097280" y="822960"/>
-            <a:ext cx="10972800" cy="548640"/>
-          </a:xfrm>
-          <a:prstGeom prst="rect">
-            <a:avLst/>
-          </a:prstGeom>
-          <a:noFill/>
-          <a:ln/>
-        </p:spPr>
-        <p:txBody>
-          <a:bodyPr wrap="square" lIns="0" tIns="0" rIns="0" bIns="0" rtlCol="0" anchor="ctr"/>
-          <a:lstStyle/>
-          <a:p>
-            <a:pPr indent="0" marL="0">
-              <a:buNone/>
-            </a:pPr>
-            <a:r>
-              <a:rPr lang="en-US" sz="2400" spc="600" kern="0" dirty="0">
-                <a:solidFill>
-                  <a:srgbClr val="8B92A5"/>
-                </a:solidFill>
-                <a:latin typeface="Courier New" pitchFamily="34" charset="0"/>
-                <a:ea typeface="Courier New" pitchFamily="34" charset="-122"/>
-                <a:cs typeface="Courier New" pitchFamily="34" charset="-120"/>
-              </a:rPr>
-              <a:t>07 · LA MEJORA</a:t>
-            </a:r>
-            <a:endParaRPr lang="en-US" sz="2400" dirty="0"/>
-          </a:p>
-        </p:txBody>
-      </p:sp>
-      <p:sp>
-        <p:nvSpPr>
-          <p:cNvPr id="3" name="Text 1"/>
-          <p:cNvSpPr/>
-          <p:nvPr/>
-        </p:nvSpPr>
-        <p:spPr>
-          <a:xfrm>
-            <a:off x="1097280" y="1426464"/>
-            <a:ext cx="16093440" cy="1280160"/>
-          </a:xfrm>
-          <a:prstGeom prst="rect">
-            <a:avLst/>
-          </a:prstGeom>
-          <a:noFill/>
-          <a:ln/>
-        </p:spPr>
-        <p:txBody>
-          <a:bodyPr wrap="square" lIns="0" tIns="0" rIns="0" bIns="0" rtlCol="0" anchor="ctr"/>
-          <a:lstStyle/>
-          <a:p>
-            <a:pPr indent="0" marL="0">
-              <a:buNone/>
-            </a:pPr>
-            <a:r>
-              <a:rPr lang="en-US" sz="6000" b="1" dirty="0">
-                <a:solidFill>
-                  <a:srgbClr val="E8EAF0"/>
-                </a:solidFill>
-                <a:latin typeface="Arial" pitchFamily="34" charset="0"/>
-                <a:ea typeface="Arial" pitchFamily="34" charset="-122"/>
-                <a:cs typeface="Arial" pitchFamily="34" charset="-120"/>
-              </a:rPr>
-              <a:t>El km/pedido se queda en la mitad</a:t>
-            </a:r>
-            <a:endParaRPr lang="en-US" sz="6000" dirty="0"/>
-          </a:p>
-        </p:txBody>
-      </p:sp>
-      <p:sp>
-        <p:nvSpPr>
-          <p:cNvPr id="4" name="Shape 2"/>
-          <p:cNvSpPr/>
-          <p:nvPr/>
-        </p:nvSpPr>
-        <p:spPr>
-          <a:xfrm>
-            <a:off x="1097280" y="3108960"/>
-            <a:ext cx="9326880" cy="6035040"/>
-          </a:xfrm>
-          <a:prstGeom prst="roundRect">
-            <a:avLst>
-              <a:gd name="adj" fmla="val 1818"/>
-            </a:avLst>
-          </a:prstGeom>
-          <a:solidFill>
-            <a:srgbClr val="1B2130"/>
-          </a:solidFill>
-          <a:ln w="25400">
-            <a:solidFill>
-              <a:srgbClr val="2A3040"/>
-            </a:solidFill>
-            <a:prstDash val="solid"/>
-          </a:ln>
-        </p:spPr>
-      </p:sp>
-      <p:sp>
-        <p:nvSpPr>
-          <p:cNvPr id="5" name="Text 3"/>
-          <p:cNvSpPr/>
-          <p:nvPr/>
-        </p:nvSpPr>
-        <p:spPr>
-          <a:xfrm>
-            <a:off x="1554480" y="3566160"/>
-            <a:ext cx="8412480" cy="914400"/>
-          </a:xfrm>
-          <a:prstGeom prst="rect">
-            <a:avLst/>
-          </a:prstGeom>
-          <a:noFill/>
-          <a:ln/>
-        </p:spPr>
-        <p:txBody>
-          <a:bodyPr wrap="square" lIns="0" tIns="0" rIns="0" bIns="0" rtlCol="0" anchor="ctr"/>
-          <a:lstStyle/>
-          <a:p>
-            <a:pPr indent="0" marL="0">
-              <a:buNone/>
-            </a:pPr>
-            <a:r>
-              <a:rPr lang="en-US" sz="3800" dirty="0">
-                <a:solidFill>
-                  <a:srgbClr val="E8EAF0"/>
-                </a:solidFill>
-                <a:latin typeface="Courier New" pitchFamily="34" charset="0"/>
-                <a:ea typeface="Courier New" pitchFamily="34" charset="-122"/>
-                <a:cs typeface="Courier New" pitchFamily="34" charset="-120"/>
-              </a:rPr>
-              <a:t>25 km ÷ 20 pedidos = </a:t>
-            </a:r>
-            <a:pPr indent="0" marL="0">
-              <a:buNone/>
-            </a:pPr>
-            <a:r>
-              <a:rPr lang="en-US" sz="3800" b="1" dirty="0">
-                <a:solidFill>
-                  <a:srgbClr val="34D399"/>
-                </a:solidFill>
-                <a:latin typeface="Courier New" pitchFamily="34" charset="0"/>
-                <a:ea typeface="Courier New" pitchFamily="34" charset="-122"/>
-                <a:cs typeface="Courier New" pitchFamily="34" charset="-120"/>
-              </a:rPr>
-              <a:t>1.25 km/ped</a:t>
-            </a:r>
-            <a:endParaRPr lang="en-US" sz="3800" dirty="0"/>
-          </a:p>
-        </p:txBody>
-      </p:sp>
-      <p:sp>
-        <p:nvSpPr>
-          <p:cNvPr id="6" name="Text 4"/>
-          <p:cNvSpPr/>
-          <p:nvPr/>
-        </p:nvSpPr>
-        <p:spPr>
-          <a:xfrm>
-            <a:off x="1554480" y="5029200"/>
-            <a:ext cx="1828800" cy="548640"/>
-          </a:xfrm>
-          <a:prstGeom prst="rect">
-            <a:avLst/>
-          </a:prstGeom>
-          <a:noFill/>
-          <a:ln/>
-        </p:spPr>
-        <p:txBody>
-          <a:bodyPr wrap="square" lIns="0" tIns="0" rIns="0" bIns="0" rtlCol="0" anchor="ctr"/>
-          <a:lstStyle/>
-          <a:p>
-            <a:pPr indent="0" marL="0">
-              <a:buNone/>
-            </a:pPr>
-            <a:r>
-              <a:rPr lang="en-US" sz="2500" dirty="0">
-                <a:solidFill>
-                  <a:srgbClr val="8B92A5"/>
-                </a:solidFill>
-                <a:latin typeface="Arial" pitchFamily="34" charset="0"/>
-                <a:ea typeface="Arial" pitchFamily="34" charset="-122"/>
-                <a:cs typeface="Arial" pitchFamily="34" charset="-120"/>
-              </a:rPr>
-              <a:t>Hoy</a:t>
-            </a:r>
-            <a:endParaRPr lang="en-US" sz="2500" dirty="0"/>
-          </a:p>
-        </p:txBody>
-      </p:sp>
-      <p:sp>
-        <p:nvSpPr>
-          <p:cNvPr id="7" name="Shape 5"/>
-          <p:cNvSpPr/>
-          <p:nvPr/>
-        </p:nvSpPr>
-        <p:spPr>
-          <a:xfrm>
-            <a:off x="3383280" y="5010912"/>
-            <a:ext cx="6217920" cy="658368"/>
-          </a:xfrm>
-          <a:prstGeom prst="roundRect">
-            <a:avLst>
-              <a:gd name="adj" fmla="val 13889"/>
-            </a:avLst>
-          </a:prstGeom>
-          <a:solidFill>
-            <a:srgbClr val="F97316"/>
-          </a:solidFill>
-          <a:ln/>
-        </p:spPr>
-      </p:sp>
-      <p:sp>
-        <p:nvSpPr>
-          <p:cNvPr id="8" name="Text 6"/>
-          <p:cNvSpPr/>
-          <p:nvPr/>
-        </p:nvSpPr>
-        <p:spPr>
-          <a:xfrm>
-            <a:off x="3383280" y="5010912"/>
-            <a:ext cx="6035040" cy="658368"/>
-          </a:xfrm>
-          <a:prstGeom prst="rect">
-            <a:avLst/>
-          </a:prstGeom>
-          <a:noFill/>
-          <a:ln/>
-        </p:spPr>
-        <p:txBody>
-          <a:bodyPr wrap="square" lIns="0" tIns="0" rIns="0" bIns="0" rtlCol="0" anchor="ctr"/>
-          <a:lstStyle/>
-          <a:p>
-            <a:pPr algn="r" indent="0" marL="0">
-              <a:buNone/>
-            </a:pPr>
-            <a:r>
-              <a:rPr lang="en-US" sz="2600" b="1" dirty="0">
-                <a:solidFill>
-                  <a:srgbClr val="0D0F14"/>
-                </a:solidFill>
-                <a:latin typeface="Courier New" pitchFamily="34" charset="0"/>
-                <a:ea typeface="Courier New" pitchFamily="34" charset="-122"/>
-                <a:cs typeface="Courier New" pitchFamily="34" charset="-120"/>
-              </a:rPr>
-              <a:t>2.5</a:t>
-            </a:r>
-            <a:endParaRPr lang="en-US" sz="2600" dirty="0"/>
-          </a:p>
-        </p:txBody>
-      </p:sp>
-      <p:sp>
-        <p:nvSpPr>
-          <p:cNvPr id="9" name="Text 7"/>
-          <p:cNvSpPr/>
-          <p:nvPr/>
-        </p:nvSpPr>
-        <p:spPr>
-          <a:xfrm>
-            <a:off x="1554480" y="6071616"/>
-            <a:ext cx="1828800" cy="548640"/>
-          </a:xfrm>
-          <a:prstGeom prst="rect">
-            <a:avLst/>
-          </a:prstGeom>
-          <a:noFill/>
-          <a:ln/>
-        </p:spPr>
-        <p:txBody>
-          <a:bodyPr wrap="square" lIns="0" tIns="0" rIns="0" bIns="0" rtlCol="0" anchor="ctr"/>
-          <a:lstStyle/>
-          <a:p>
-            <a:pPr indent="0" marL="0">
-              <a:buNone/>
-            </a:pPr>
-            <a:r>
-              <a:rPr lang="en-US" sz="2500" dirty="0">
-                <a:solidFill>
-                  <a:srgbClr val="8B92A5"/>
-                </a:solidFill>
-                <a:latin typeface="Arial" pitchFamily="34" charset="0"/>
-                <a:ea typeface="Arial" pitchFamily="34" charset="-122"/>
-                <a:cs typeface="Arial" pitchFamily="34" charset="-120"/>
-              </a:rPr>
-              <a:t>Corredores</a:t>
-            </a:r>
-            <a:endParaRPr lang="en-US" sz="2500" dirty="0"/>
-          </a:p>
-        </p:txBody>
-      </p:sp>
-      <p:sp>
-        <p:nvSpPr>
-          <p:cNvPr id="10" name="Shape 8"/>
-          <p:cNvSpPr/>
-          <p:nvPr/>
-        </p:nvSpPr>
-        <p:spPr>
-          <a:xfrm>
-            <a:off x="3383280" y="6053328"/>
-            <a:ext cx="3108960" cy="658368"/>
-          </a:xfrm>
-          <a:prstGeom prst="roundRect">
-            <a:avLst>
-              <a:gd name="adj" fmla="val 13889"/>
-            </a:avLst>
-          </a:prstGeom>
-          <a:solidFill>
-            <a:srgbClr val="34D399"/>
-          </a:solidFill>
-          <a:ln/>
-        </p:spPr>
-      </p:sp>
-      <p:sp>
-        <p:nvSpPr>
-          <p:cNvPr id="11" name="Text 9"/>
-          <p:cNvSpPr/>
-          <p:nvPr/>
-        </p:nvSpPr>
-        <p:spPr>
-          <a:xfrm>
-            <a:off x="3383280" y="6053328"/>
-            <a:ext cx="2926080" cy="658368"/>
-          </a:xfrm>
-          <a:prstGeom prst="rect">
-            <a:avLst/>
-          </a:prstGeom>
-          <a:noFill/>
-          <a:ln/>
-        </p:spPr>
-        <p:txBody>
-          <a:bodyPr wrap="square" lIns="0" tIns="0" rIns="0" bIns="0" rtlCol="0" anchor="ctr"/>
-          <a:lstStyle/>
-          <a:p>
-            <a:pPr algn="r" indent="0" marL="0">
-              <a:buNone/>
-            </a:pPr>
-            <a:r>
-              <a:rPr lang="en-US" sz="2600" b="1" dirty="0">
-                <a:solidFill>
-                  <a:srgbClr val="0D0F14"/>
-                </a:solidFill>
-                <a:latin typeface="Courier New" pitchFamily="34" charset="0"/>
-                <a:ea typeface="Courier New" pitchFamily="34" charset="-122"/>
-                <a:cs typeface="Courier New" pitchFamily="34" charset="-120"/>
-              </a:rPr>
-              <a:t>1.25</a:t>
-            </a:r>
-            <a:endParaRPr lang="en-US" sz="2600" dirty="0"/>
-          </a:p>
-        </p:txBody>
-      </p:sp>
-      <p:sp>
-        <p:nvSpPr>
-          <p:cNvPr id="12" name="Text 10"/>
-          <p:cNvSpPr/>
-          <p:nvPr/>
-        </p:nvSpPr>
-        <p:spPr>
-          <a:xfrm>
-            <a:off x="1554480" y="7406640"/>
-            <a:ext cx="8412480" cy="1280160"/>
-          </a:xfrm>
-          <a:prstGeom prst="rect">
-            <a:avLst/>
-          </a:prstGeom>
-          <a:noFill/>
-          <a:ln/>
-        </p:spPr>
-        <p:txBody>
-          <a:bodyPr wrap="square" lIns="0" tIns="0" rIns="0" bIns="0" rtlCol="0" anchor="ctr"/>
-          <a:lstStyle/>
-          <a:p>
-            <a:pPr indent="0" marL="0">
-              <a:lnSpc>
-                <a:spcPct val="112000"/>
-              </a:lnSpc>
-              <a:buNone/>
-            </a:pPr>
-            <a:r>
-              <a:rPr lang="en-US" sz="2600" i="1" dirty="0">
-                <a:solidFill>
-                  <a:srgbClr val="8B92A5"/>
-                </a:solidFill>
-                <a:latin typeface="Arial" pitchFamily="34" charset="0"/>
-                <a:ea typeface="Arial" pitchFamily="34" charset="-122"/>
-                <a:cs typeface="Arial" pitchFamily="34" charset="-120"/>
-              </a:rPr>
-              <a:t>Mismos 20 pedidos. Misma flota de 4 rutas. Solo cambia por dónde se mueven.</a:t>
-            </a:r>
-            <a:endParaRPr lang="en-US" sz="2600" dirty="0"/>
-          </a:p>
-        </p:txBody>
-      </p:sp>
-      <p:sp>
-        <p:nvSpPr>
-          <p:cNvPr id="13" name="Shape 11"/>
-          <p:cNvSpPr/>
-          <p:nvPr/>
-        </p:nvSpPr>
-        <p:spPr>
-          <a:xfrm>
-            <a:off x="10972800" y="3108960"/>
-            <a:ext cx="6217920" cy="6035040"/>
-          </a:xfrm>
-          <a:prstGeom prst="roundRect">
-            <a:avLst>
-              <a:gd name="adj" fmla="val 1818"/>
-            </a:avLst>
-          </a:prstGeom>
-          <a:solidFill>
-            <a:srgbClr val="161B26"/>
-          </a:solidFill>
-          <a:ln w="25400">
-            <a:solidFill>
-              <a:srgbClr val="2A3040"/>
-            </a:solidFill>
-            <a:prstDash val="solid"/>
-          </a:ln>
-        </p:spPr>
-      </p:sp>
-      <p:sp>
-        <p:nvSpPr>
-          <p:cNvPr id="14" name="Text 12"/>
-          <p:cNvSpPr/>
-          <p:nvPr/>
-        </p:nvSpPr>
-        <p:spPr>
-          <a:xfrm>
-            <a:off x="11430000" y="4114800"/>
-            <a:ext cx="5303520" cy="4206240"/>
-          </a:xfrm>
-          <a:prstGeom prst="rect">
-            <a:avLst/>
-          </a:prstGeom>
-          <a:noFill/>
-          <a:ln/>
-        </p:spPr>
-        <p:txBody>
-          <a:bodyPr wrap="square" lIns="0" tIns="0" rIns="0" bIns="0" rtlCol="0" anchor="ctr"/>
-          <a:lstStyle/>
-          <a:p>
-            <a:pPr algn="ctr" indent="0" marL="0">
-              <a:buNone/>
-            </a:pPr>
-            <a:r>
-              <a:rPr lang="en-US" sz="11200" b="1" dirty="0">
-                <a:solidFill>
-                  <a:srgbClr val="34D399"/>
-                </a:solidFill>
-                <a:latin typeface="Courier New" pitchFamily="34" charset="0"/>
-                <a:ea typeface="Courier New" pitchFamily="34" charset="-122"/>
-                <a:cs typeface="Courier New" pitchFamily="34" charset="-120"/>
-              </a:rPr>
-              <a:t>÷ 2</a:t>
-            </a:r>
-            <a:endParaRPr lang="en-US" sz="11200" dirty="0"/>
-          </a:p>
-          <a:p>
-            <a:pPr algn="ctr" indent="0" marL="0">
-              <a:buNone/>
-            </a:pPr>
-            <a:r>
-              <a:rPr lang="en-US" sz="2800" dirty="0">
-                <a:solidFill>
-                  <a:srgbClr val="8B92A5"/>
-                </a:solidFill>
-              </a:rPr>
-              <a:t>la mitad de km por pedido</a:t>
-            </a:r>
-            <a:endParaRPr lang="en-US" sz="11200" dirty="0"/>
-          </a:p>
-          <a:p>
-            <a:pPr algn="ctr" indent="0" marL="0">
-              <a:buNone/>
-            </a:pPr>
-            <a:endParaRPr lang="en-US" sz="11200" dirty="0"/>
-          </a:p>
-          <a:p>
-            <a:pPr algn="ctr" indent="0" marL="0">
-              <a:buNone/>
-            </a:pPr>
-            <a:r>
-              <a:rPr lang="en-US" sz="2300" dirty="0">
-                <a:solidFill>
-                  <a:srgbClr val="6B7280"/>
-                </a:solidFill>
-              </a:rPr>
-              <a:t>y los minutos por pedido caen en la misma proporción</a:t>
-            </a:r>
-            <a:endParaRPr lang="en-US" sz="11200" dirty="0"/>
-          </a:p>
-        </p:txBody>
-      </p:sp>
-    </p:spTree>
-  </p:cSld>
-  <p:clrMapOvr>
-    <a:masterClrMapping/>
-  </p:clrMapOvr>
-</p:sld>
-</file>
-
-<file path=ppt/slides/slide23.xml><?xml version="1.0" encoding="utf-8"?>
-<p:sld xmlns:a="http://schemas.openxmlformats.org/drawingml/2006/main" xmlns:r="http://schemas.openxmlformats.org/officeDocument/2006/relationships" xmlns:p="http://schemas.openxmlformats.org/presentationml/2006/main">
-  <p:cSld name="Slide 10">
-    <p:bg>
-      <p:bgPr>
-        <a:solidFill>
-          <a:srgbClr val="0D0F14"/>
-        </a:solidFill>
-      </p:bgPr>
-    </p:bg>
-    <p:spTree>
-      <p:nvGrpSpPr>
-        <p:cNvPr id="1" name=""/>
-        <p:cNvGrpSpPr/>
-        <p:nvPr/>
-      </p:nvGrpSpPr>
-      <p:grpSpPr>
-        <a:xfrm>
-          <a:off x="0" y="0"/>
-          <a:ext cx="0" cy="0"/>
-          <a:chOff x="0" y="0"/>
-          <a:chExt cx="0" cy="0"/>
-        </a:xfrm>
-      </p:grpSpPr>
-      <p:sp>
-        <p:nvSpPr>
-          <p:cNvPr id="2" name="Text 0"/>
-          <p:cNvSpPr/>
-          <p:nvPr/>
-        </p:nvSpPr>
-        <p:spPr>
-          <a:xfrm>
-            <a:off x="1097280" y="822960"/>
-            <a:ext cx="10972800" cy="548640"/>
-          </a:xfrm>
-          <a:prstGeom prst="rect">
-            <a:avLst/>
-          </a:prstGeom>
-          <a:noFill/>
-          <a:ln/>
-        </p:spPr>
-        <p:txBody>
-          <a:bodyPr wrap="square" lIns="0" tIns="0" rIns="0" bIns="0" rtlCol="0" anchor="ctr"/>
-          <a:lstStyle/>
-          <a:p>
-            <a:pPr indent="0" marL="0">
-              <a:buNone/>
-            </a:pPr>
-            <a:r>
-              <a:rPr lang="en-US" sz="2400" spc="600" kern="0" dirty="0">
-                <a:solidFill>
-                  <a:srgbClr val="8B92A5"/>
-                </a:solidFill>
-                <a:latin typeface="Courier New" pitchFamily="34" charset="0"/>
-                <a:ea typeface="Courier New" pitchFamily="34" charset="-122"/>
-                <a:cs typeface="Courier New" pitchFamily="34" charset="-120"/>
-              </a:rPr>
-              <a:t>08 · LA HERRAMIENTA</a:t>
-            </a:r>
-            <a:endParaRPr lang="en-US" sz="2400" dirty="0"/>
-          </a:p>
-        </p:txBody>
-      </p:sp>
-      <p:sp>
-        <p:nvSpPr>
-          <p:cNvPr id="3" name="Text 1"/>
-          <p:cNvSpPr/>
-          <p:nvPr/>
-        </p:nvSpPr>
-        <p:spPr>
-          <a:xfrm>
-            <a:off x="1097280" y="1426464"/>
-            <a:ext cx="16093440" cy="1280160"/>
-          </a:xfrm>
-          <a:prstGeom prst="rect">
-            <a:avLst/>
-          </a:prstGeom>
-          <a:noFill/>
-          <a:ln/>
-        </p:spPr>
-        <p:txBody>
-          <a:bodyPr wrap="square" lIns="0" tIns="0" rIns="0" bIns="0" rtlCol="0" anchor="ctr"/>
-          <a:lstStyle/>
-          <a:p>
-            <a:pPr indent="0" marL="0">
-              <a:buNone/>
-            </a:pPr>
-            <a:r>
-              <a:rPr lang="en-US" sz="6000" b="1" dirty="0">
-                <a:solidFill>
-                  <a:srgbClr val="E8EAF0"/>
-                </a:solidFill>
-                <a:latin typeface="Arial" pitchFamily="34" charset="0"/>
-                <a:ea typeface="Arial" pitchFamily="34" charset="-122"/>
-                <a:cs typeface="Arial" pitchFamily="34" charset="-120"/>
-              </a:rPr>
-              <a:t>Del CSV al corredor en cuatro pasos</a:t>
-            </a:r>
-            <a:endParaRPr lang="en-US" sz="6000" dirty="0"/>
-          </a:p>
-        </p:txBody>
-      </p:sp>
-      <p:sp>
-        <p:nvSpPr>
-          <p:cNvPr id="4" name="Shape 2"/>
-          <p:cNvSpPr/>
-          <p:nvPr/>
-        </p:nvSpPr>
-        <p:spPr>
-          <a:xfrm>
-            <a:off x="1097280" y="3291840"/>
+              <a:t>los saltos &gt;10 km, los pinta en el mapa y calcula el baseline</a:t>
+            </a:r>
+            <a:endParaRPr lang="en-US" sz="2300" dirty="0"/>
+          </a:p>
+        </p:txBody>
+      </p:sp>
+      <p:sp>
+        <p:nvSpPr>
+          <p:cNvPr id="14" name="Shape 12"/>
+          <p:cNvSpPr/>
+          <p:nvPr/>
+        </p:nvSpPr>
+        <p:spPr>
+          <a:xfrm>
+            <a:off x="9436608" y="3291840"/>
             <a:ext cx="3803904" cy="4937760"/>
           </a:xfrm>
           <a:prstGeom prst="roundRect">
@@ -13675,359 +12684,11 @@
             </a:avLst>
           </a:prstGeom>
           <a:solidFill>
-            <a:srgbClr val="161B26"/>
+            <a:srgbClr val="FBFAF5"/>
           </a:solidFill>
           <a:ln w="25400">
             <a:solidFill>
-              <a:srgbClr val="2A3040"/>
-            </a:solidFill>
-            <a:prstDash val="solid"/>
-          </a:ln>
-        </p:spPr>
-      </p:sp>
-      <p:sp>
-        <p:nvSpPr>
-          <p:cNvPr id="5" name="Shape 3"/>
-          <p:cNvSpPr/>
-          <p:nvPr/>
-        </p:nvSpPr>
-        <p:spPr>
-          <a:xfrm>
-            <a:off x="1499616" y="3749040"/>
-            <a:ext cx="914400" cy="914400"/>
-          </a:xfrm>
-          <a:prstGeom prst="ellipse">
-            <a:avLst/>
-          </a:prstGeom>
-          <a:solidFill>
-            <a:srgbClr val="0D0F14">
-              <a:alpha val="0"/>
-            </a:srgbClr>
-          </a:solidFill>
-          <a:ln w="44450">
-            <a:solidFill>
-              <a:srgbClr val="F97316"/>
-            </a:solidFill>
-            <a:prstDash val="solid"/>
-          </a:ln>
-        </p:spPr>
-      </p:sp>
-      <p:sp>
-        <p:nvSpPr>
-          <p:cNvPr id="6" name="Text 4"/>
-          <p:cNvSpPr/>
-          <p:nvPr/>
-        </p:nvSpPr>
-        <p:spPr>
-          <a:xfrm>
-            <a:off x="1499616" y="3749040"/>
-            <a:ext cx="914400" cy="914400"/>
-          </a:xfrm>
-          <a:prstGeom prst="rect">
-            <a:avLst/>
-          </a:prstGeom>
-          <a:noFill/>
-          <a:ln/>
-        </p:spPr>
-        <p:txBody>
-          <a:bodyPr wrap="square" lIns="0" tIns="0" rIns="0" bIns="0" rtlCol="0" anchor="ctr"/>
-          <a:lstStyle/>
-          <a:p>
-            <a:pPr algn="ctr" indent="0" marL="0">
-              <a:buNone/>
-            </a:pPr>
-            <a:r>
-              <a:rPr lang="en-US" sz="3600" b="1" dirty="0">
-                <a:solidFill>
-                  <a:srgbClr val="F97316"/>
-                </a:solidFill>
-                <a:latin typeface="Courier New" pitchFamily="34" charset="0"/>
-                <a:ea typeface="Courier New" pitchFamily="34" charset="-122"/>
-                <a:cs typeface="Courier New" pitchFamily="34" charset="-120"/>
-              </a:rPr>
-              <a:t>1</a:t>
-            </a:r>
-            <a:endParaRPr lang="en-US" sz="3600" dirty="0"/>
-          </a:p>
-        </p:txBody>
-      </p:sp>
-      <p:sp>
-        <p:nvSpPr>
-          <p:cNvPr id="7" name="Text 5"/>
-          <p:cNvSpPr/>
-          <p:nvPr/>
-        </p:nvSpPr>
-        <p:spPr>
-          <a:xfrm>
-            <a:off x="1499616" y="4974336"/>
-            <a:ext cx="3108960" cy="640080"/>
-          </a:xfrm>
-          <a:prstGeom prst="rect">
-            <a:avLst/>
-          </a:prstGeom>
-          <a:noFill/>
-          <a:ln/>
-        </p:spPr>
-        <p:txBody>
-          <a:bodyPr wrap="square" lIns="0" tIns="0" rIns="0" bIns="0" rtlCol="0" anchor="ctr"/>
-          <a:lstStyle/>
-          <a:p>
-            <a:pPr indent="0" marL="0">
-              <a:buNone/>
-            </a:pPr>
-            <a:r>
-              <a:rPr lang="en-US" sz="3200" b="1" dirty="0">
-                <a:solidFill>
-                  <a:srgbClr val="E8EAF0"/>
-                </a:solidFill>
-                <a:latin typeface="Arial" pitchFamily="34" charset="0"/>
-                <a:ea typeface="Arial" pitchFamily="34" charset="-122"/>
-                <a:cs typeface="Arial" pitchFamily="34" charset="-120"/>
-              </a:rPr>
-              <a:t>Carga</a:t>
-            </a:r>
-            <a:endParaRPr lang="en-US" sz="3200" dirty="0"/>
-          </a:p>
-        </p:txBody>
-      </p:sp>
-      <p:sp>
-        <p:nvSpPr>
-          <p:cNvPr id="8" name="Text 6"/>
-          <p:cNvSpPr/>
-          <p:nvPr/>
-        </p:nvSpPr>
-        <p:spPr>
-          <a:xfrm>
-            <a:off x="1499616" y="5705856"/>
-            <a:ext cx="3072384" cy="2286000"/>
-          </a:xfrm>
-          <a:prstGeom prst="rect">
-            <a:avLst/>
-          </a:prstGeom>
-          <a:noFill/>
-          <a:ln/>
-        </p:spPr>
-        <p:txBody>
-          <a:bodyPr wrap="square" lIns="0" tIns="0" rIns="0" bIns="0" rtlCol="0" anchor="ctr"/>
-          <a:lstStyle/>
-          <a:p>
-            <a:pPr indent="0" marL="0">
-              <a:lnSpc>
-                <a:spcPct val="113000"/>
-              </a:lnSpc>
-              <a:buNone/>
-            </a:pPr>
-            <a:r>
-              <a:rPr lang="en-US" sz="2300" dirty="0">
-                <a:solidFill>
-                  <a:srgbClr val="8B92A5"/>
-                </a:solidFill>
-                <a:latin typeface="Arial" pitchFamily="34" charset="0"/>
-                <a:ea typeface="Arial" pitchFamily="34" charset="-122"/>
-                <a:cs typeface="Arial" pitchFamily="34" charset="-120"/>
-              </a:rPr>
-              <a:t>el CSV del mes de la colmena: rutas, paradas y orden de entrega</a:t>
-            </a:r>
-            <a:endParaRPr lang="en-US" sz="2300" dirty="0"/>
-          </a:p>
-        </p:txBody>
-      </p:sp>
-      <p:sp>
-        <p:nvSpPr>
-          <p:cNvPr id="9" name="Shape 7"/>
-          <p:cNvSpPr/>
-          <p:nvPr/>
-        </p:nvSpPr>
-        <p:spPr>
-          <a:xfrm>
-            <a:off x="5266944" y="3291840"/>
-            <a:ext cx="3803904" cy="4937760"/>
-          </a:xfrm>
-          <a:prstGeom prst="roundRect">
-            <a:avLst>
-              <a:gd name="adj" fmla="val 2885"/>
-            </a:avLst>
-          </a:prstGeom>
-          <a:solidFill>
-            <a:srgbClr val="161B26"/>
-          </a:solidFill>
-          <a:ln w="25400">
-            <a:solidFill>
-              <a:srgbClr val="2A3040"/>
-            </a:solidFill>
-            <a:prstDash val="solid"/>
-          </a:ln>
-        </p:spPr>
-      </p:sp>
-      <p:sp>
-        <p:nvSpPr>
-          <p:cNvPr id="10" name="Shape 8"/>
-          <p:cNvSpPr/>
-          <p:nvPr/>
-        </p:nvSpPr>
-        <p:spPr>
-          <a:xfrm>
-            <a:off x="5669280" y="3749040"/>
-            <a:ext cx="914400" cy="914400"/>
-          </a:xfrm>
-          <a:prstGeom prst="ellipse">
-            <a:avLst/>
-          </a:prstGeom>
-          <a:solidFill>
-            <a:srgbClr val="0D0F14">
-              <a:alpha val="0"/>
-            </a:srgbClr>
-          </a:solidFill>
-          <a:ln w="44450">
-            <a:solidFill>
-              <a:srgbClr val="E8554D"/>
-            </a:solidFill>
-            <a:prstDash val="solid"/>
-          </a:ln>
-        </p:spPr>
-      </p:sp>
-      <p:sp>
-        <p:nvSpPr>
-          <p:cNvPr id="11" name="Text 9"/>
-          <p:cNvSpPr/>
-          <p:nvPr/>
-        </p:nvSpPr>
-        <p:spPr>
-          <a:xfrm>
-            <a:off x="5669280" y="3749040"/>
-            <a:ext cx="914400" cy="914400"/>
-          </a:xfrm>
-          <a:prstGeom prst="rect">
-            <a:avLst/>
-          </a:prstGeom>
-          <a:noFill/>
-          <a:ln/>
-        </p:spPr>
-        <p:txBody>
-          <a:bodyPr wrap="square" lIns="0" tIns="0" rIns="0" bIns="0" rtlCol="0" anchor="ctr"/>
-          <a:lstStyle/>
-          <a:p>
-            <a:pPr algn="ctr" indent="0" marL="0">
-              <a:buNone/>
-            </a:pPr>
-            <a:r>
-              <a:rPr lang="en-US" sz="3600" b="1" dirty="0">
-                <a:solidFill>
-                  <a:srgbClr val="E8554D"/>
-                </a:solidFill>
-                <a:latin typeface="Courier New" pitchFamily="34" charset="0"/>
-                <a:ea typeface="Courier New" pitchFamily="34" charset="-122"/>
-                <a:cs typeface="Courier New" pitchFamily="34" charset="-120"/>
-              </a:rPr>
-              <a:t>2</a:t>
-            </a:r>
-            <a:endParaRPr lang="en-US" sz="3600" dirty="0"/>
-          </a:p>
-        </p:txBody>
-      </p:sp>
-      <p:sp>
-        <p:nvSpPr>
-          <p:cNvPr id="12" name="Text 10"/>
-          <p:cNvSpPr/>
-          <p:nvPr/>
-        </p:nvSpPr>
-        <p:spPr>
-          <a:xfrm>
-            <a:off x="5669280" y="4974336"/>
-            <a:ext cx="3108960" cy="640080"/>
-          </a:xfrm>
-          <a:prstGeom prst="rect">
-            <a:avLst/>
-          </a:prstGeom>
-          <a:noFill/>
-          <a:ln/>
-        </p:spPr>
-        <p:txBody>
-          <a:bodyPr wrap="square" lIns="0" tIns="0" rIns="0" bIns="0" rtlCol="0" anchor="ctr"/>
-          <a:lstStyle/>
-          <a:p>
-            <a:pPr indent="0" marL="0">
-              <a:buNone/>
-            </a:pPr>
-            <a:r>
-              <a:rPr lang="en-US" sz="3200" b="1" dirty="0">
-                <a:solidFill>
-                  <a:srgbClr val="E8EAF0"/>
-                </a:solidFill>
-                <a:latin typeface="Arial" pitchFamily="34" charset="0"/>
-                <a:ea typeface="Arial" pitchFamily="34" charset="-122"/>
-                <a:cs typeface="Arial" pitchFamily="34" charset="-120"/>
-              </a:rPr>
-              <a:t>Detecta</a:t>
-            </a:r>
-            <a:endParaRPr lang="en-US" sz="3200" dirty="0"/>
-          </a:p>
-        </p:txBody>
-      </p:sp>
-      <p:sp>
-        <p:nvSpPr>
-          <p:cNvPr id="13" name="Text 11"/>
-          <p:cNvSpPr/>
-          <p:nvPr/>
-        </p:nvSpPr>
-        <p:spPr>
-          <a:xfrm>
-            <a:off x="5669280" y="5705856"/>
-            <a:ext cx="3072384" cy="2286000"/>
-          </a:xfrm>
-          <a:prstGeom prst="rect">
-            <a:avLst/>
-          </a:prstGeom>
-          <a:noFill/>
-          <a:ln/>
-        </p:spPr>
-        <p:txBody>
-          <a:bodyPr wrap="square" lIns="0" tIns="0" rIns="0" bIns="0" rtlCol="0" anchor="ctr"/>
-          <a:lstStyle/>
-          <a:p>
-            <a:pPr indent="0" marL="0">
-              <a:lnSpc>
-                <a:spcPct val="113000"/>
-              </a:lnSpc>
-              <a:buNone/>
-            </a:pPr>
-            <a:r>
-              <a:rPr lang="en-US" sz="2300" dirty="0">
-                <a:solidFill>
-                  <a:srgbClr val="8B92A5"/>
-                </a:solidFill>
-                <a:latin typeface="Arial" pitchFamily="34" charset="0"/>
-                <a:ea typeface="Arial" pitchFamily="34" charset="-122"/>
-                <a:cs typeface="Arial" pitchFamily="34" charset="-120"/>
-              </a:rPr>
-              <a:t>los saltos &gt;10 km, los pinta en el mapa y calcula el baseline</a:t>
-            </a:r>
-            <a:endParaRPr lang="en-US" sz="2300" dirty="0"/>
-          </a:p>
-        </p:txBody>
-      </p:sp>
-      <p:sp>
-        <p:nvSpPr>
-          <p:cNvPr id="14" name="Shape 12"/>
-          <p:cNvSpPr/>
-          <p:nvPr/>
-        </p:nvSpPr>
-        <p:spPr>
-          <a:xfrm>
-            <a:off x="9436608" y="3291840"/>
-            <a:ext cx="3803904" cy="4937760"/>
-          </a:xfrm>
-          <a:prstGeom prst="roundRect">
-            <a:avLst>
-              <a:gd name="adj" fmla="val 2885"/>
-            </a:avLst>
-          </a:prstGeom>
-          <a:solidFill>
-            <a:srgbClr val="161B26"/>
-          </a:solidFill>
-          <a:ln w="25400">
-            <a:solidFill>
-              <a:srgbClr val="2A3040"/>
+              <a:srgbClr val="CFC7B5"/>
             </a:solidFill>
             <a:prstDash val="solid"/>
           </a:ln>
@@ -14126,7 +12787,7 @@
             <a:r>
               <a:rPr lang="en-US" sz="3200" b="1" dirty="0">
                 <a:solidFill>
-                  <a:srgbClr val="E8EAF0"/>
+                  <a:srgbClr val="0F1D18"/>
                 </a:solidFill>
                 <a:latin typeface="Arial" pitchFamily="34" charset="0"/>
                 <a:ea typeface="Arial" pitchFamily="34" charset="-122"/>
@@ -14168,7 +12829,7 @@
             <a:r>
               <a:rPr lang="en-US" sz="2300" dirty="0">
                 <a:solidFill>
-                  <a:srgbClr val="8B92A5"/>
+                  <a:srgbClr val="6A7A72"/>
                 </a:solidFill>
                 <a:latin typeface="Arial" pitchFamily="34" charset="0"/>
                 <a:ea typeface="Arial" pitchFamily="34" charset="-122"/>
@@ -14197,11 +12858,11 @@
             </a:avLst>
           </a:prstGeom>
           <a:solidFill>
-            <a:srgbClr val="161B26"/>
+            <a:srgbClr val="FBFAF5"/>
           </a:solidFill>
           <a:ln w="25400">
             <a:solidFill>
-              <a:srgbClr val="2A3040"/>
+              <a:srgbClr val="CFC7B5"/>
             </a:solidFill>
             <a:prstDash val="solid"/>
           </a:ln>
@@ -14228,7 +12889,7 @@
           </a:solidFill>
           <a:ln w="44450">
             <a:solidFill>
-              <a:srgbClr val="34D399"/>
+              <a:srgbClr val="2D7A55"/>
             </a:solidFill>
             <a:prstDash val="solid"/>
           </a:ln>
@@ -14261,7 +12922,7 @@
             <a:r>
               <a:rPr lang="en-US" sz="3600" b="1" dirty="0">
                 <a:solidFill>
-                  <a:srgbClr val="34D399"/>
+                  <a:srgbClr val="2D7A55"/>
                 </a:solidFill>
                 <a:latin typeface="Courier New" pitchFamily="34" charset="0"/>
                 <a:ea typeface="Courier New" pitchFamily="34" charset="-122"/>
@@ -14300,7 +12961,7 @@
             <a:r>
               <a:rPr lang="en-US" sz="3200" b="1" dirty="0">
                 <a:solidFill>
-                  <a:srgbClr val="E8EAF0"/>
+                  <a:srgbClr val="0F1D18"/>
                 </a:solidFill>
                 <a:latin typeface="Arial" pitchFamily="34" charset="0"/>
                 <a:ea typeface="Arial" pitchFamily="34" charset="-122"/>
@@ -14342,7 +13003,7 @@
             <a:r>
               <a:rPr lang="en-US" sz="2300" dirty="0">
                 <a:solidFill>
-                  <a:srgbClr val="8B92A5"/>
+                  <a:srgbClr val="6A7A72"/>
                 </a:solidFill>
                 <a:latin typeface="Arial" pitchFamily="34" charset="0"/>
                 <a:ea typeface="Arial" pitchFamily="34" charset="-122"/>
@@ -14381,7 +13042,7 @@
             <a:r>
               <a:rPr lang="en-US" sz="2600" i="1" dirty="0">
                 <a:solidFill>
-                  <a:srgbClr val="8B92A5"/>
+                  <a:srgbClr val="6A7A72"/>
                 </a:solidFill>
                 <a:latin typeface="Arial" pitchFamily="34" charset="0"/>
                 <a:ea typeface="Arial" pitchFamily="34" charset="-122"/>
